--- a/media/module5/slides.pptx
+++ b/media/module5/slides.pptx
@@ -36,6 +36,19 @@
     <p:sldId id="284" r:id="rId36"/>
     <p:sldId id="285" r:id="rId37"/>
     <p:sldId id="286" r:id="rId38"/>
+    <p:sldId id="287" r:id="rId39"/>
+    <p:sldId id="288" r:id="rId40"/>
+    <p:sldId id="289" r:id="rId41"/>
+    <p:sldId id="290" r:id="rId42"/>
+    <p:sldId id="291" r:id="rId43"/>
+    <p:sldId id="292" r:id="rId44"/>
+    <p:sldId id="293" r:id="rId45"/>
+    <p:sldId id="294" r:id="rId46"/>
+    <p:sldId id="295" r:id="rId47"/>
+    <p:sldId id="296" r:id="rId48"/>
+    <p:sldId id="297" r:id="rId49"/>
+    <p:sldId id="298" r:id="rId50"/>
+    <p:sldId id="299" r:id="rId51"/>
   </p:sldIdLst>
   <p:sldSz cx="12191695" cy="6858000" type="screen4x3"/>
   <p:notesSz cx="6858000" cy="9144000"/>
@@ -602,7 +615,7 @@
           <a:lstStyle/>
           <a:p>
             <a:r>
-              <a:t>Run from course repository root.</a:t>
+              <a:t>From MODULE5 Verification &amp; Testing Methods.</a:t>
             </a:r>
           </a:p>
         </p:txBody>
@@ -672,7 +685,7 @@
           <a:lstStyle/>
           <a:p>
             <a:r>
-              <a:t>module5/examples/examples/spi_baseline/README.md</a:t>
+              <a:t>From MODULE5 Topics Covered.</a:t>
             </a:r>
           </a:p>
         </p:txBody>
@@ -742,7 +755,7 @@
           <a:lstStyle/>
           <a:p>
             <a:r>
-              <a:t>Hands-on: module5/examples/examples/spi_baseline/</a:t>
+              <a:t>From MODULE5 Topics Covered.</a:t>
             </a:r>
           </a:p>
         </p:txBody>
@@ -812,7 +825,427 @@
           <a:lstStyle/>
           <a:p>
             <a:r>
-              <a:t>From MODULE5 Learning Outcomes.</a:t>
+              <a:t>Run from course repository root.</a:t>
+            </a:r>
+          </a:p>
+        </p:txBody>
+      </p:sp>
+      <p:sp>
+        <p:nvSpPr>
+          <p:cNvPr id="4" name="Slide Number Placeholder 3"/>
+          <p:cNvSpPr>
+            <a:spLocks noGrp="1"/>
+          </p:cNvSpPr>
+          <p:nvPr>
+            <p:ph type="sldNum" idx="5" sz="quarter"/>
+          </p:nvPr>
+        </p:nvSpPr>
+        <p:spPr/>
+      </p:sp>
+    </p:spTree>
+  </p:cSld>
+  <p:clrMapOvr>
+    <a:masterClrMapping/>
+  </p:clrMapOvr>
+</p:notes>
+</file>
+
+<file path=ppt/notesSlides/notesSlide14.xml><?xml version="1.0" encoding="utf-8"?>
+<p:notes xmlns:a="http://schemas.openxmlformats.org/drawingml/2006/main" xmlns:p="http://schemas.openxmlformats.org/presentationml/2006/main" xmlns:r="http://schemas.openxmlformats.org/officeDocument/2006/relationships">
+  <p:cSld>
+    <p:spTree>
+      <p:nvGrpSpPr>
+        <p:cNvPr id="1" name=""/>
+        <p:cNvGrpSpPr/>
+        <p:nvPr/>
+      </p:nvGrpSpPr>
+      <p:grpSpPr>
+        <a:xfrm>
+          <a:off x="0" y="0"/>
+          <a:ext cx="0" cy="0"/>
+          <a:chOff x="0" y="0"/>
+          <a:chExt cx="0" cy="0"/>
+        </a:xfrm>
+      </p:grpSpPr>
+      <p:sp>
+        <p:nvSpPr>
+          <p:cNvPr id="2" name="Slide Image Placeholder 1"/>
+          <p:cNvSpPr>
+            <a:spLocks noGrp="1"/>
+          </p:cNvSpPr>
+          <p:nvPr>
+            <p:ph type="sldImg" idx="2"/>
+          </p:nvPr>
+        </p:nvSpPr>
+        <p:spPr/>
+      </p:sp>
+      <p:sp>
+        <p:nvSpPr>
+          <p:cNvPr id="3" name="Notes Placeholder 2"/>
+          <p:cNvSpPr>
+            <a:spLocks noGrp="1"/>
+          </p:cNvSpPr>
+          <p:nvPr>
+            <p:ph type="body" idx="3" sz="quarter"/>
+          </p:nvPr>
+        </p:nvSpPr>
+        <p:spPr/>
+        <p:txBody>
+          <a:bodyPr/>
+          <a:lstStyle/>
+          <a:p>
+            <a:r>
+              <a:t>module5/examples/spi_baseline/README.md</a:t>
+            </a:r>
+          </a:p>
+        </p:txBody>
+      </p:sp>
+      <p:sp>
+        <p:nvSpPr>
+          <p:cNvPr id="4" name="Slide Number Placeholder 3"/>
+          <p:cNvSpPr>
+            <a:spLocks noGrp="1"/>
+          </p:cNvSpPr>
+          <p:nvPr>
+            <p:ph type="sldNum" idx="5" sz="quarter"/>
+          </p:nvPr>
+        </p:nvSpPr>
+        <p:spPr/>
+      </p:sp>
+    </p:spTree>
+  </p:cSld>
+  <p:clrMapOvr>
+    <a:masterClrMapping/>
+  </p:clrMapOvr>
+</p:notes>
+</file>
+
+<file path=ppt/notesSlides/notesSlide15.xml><?xml version="1.0" encoding="utf-8"?>
+<p:notes xmlns:a="http://schemas.openxmlformats.org/drawingml/2006/main" xmlns:p="http://schemas.openxmlformats.org/presentationml/2006/main" xmlns:r="http://schemas.openxmlformats.org/officeDocument/2006/relationships">
+  <p:cSld>
+    <p:spTree>
+      <p:nvGrpSpPr>
+        <p:cNvPr id="1" name=""/>
+        <p:cNvGrpSpPr/>
+        <p:nvPr/>
+      </p:nvGrpSpPr>
+      <p:grpSpPr>
+        <a:xfrm>
+          <a:off x="0" y="0"/>
+          <a:ext cx="0" cy="0"/>
+          <a:chOff x="0" y="0"/>
+          <a:chExt cx="0" cy="0"/>
+        </a:xfrm>
+      </p:grpSpPr>
+      <p:sp>
+        <p:nvSpPr>
+          <p:cNvPr id="2" name="Slide Image Placeholder 1"/>
+          <p:cNvSpPr>
+            <a:spLocks noGrp="1"/>
+          </p:cNvSpPr>
+          <p:nvPr>
+            <p:ph type="sldImg" idx="2"/>
+          </p:nvPr>
+        </p:nvSpPr>
+        <p:spPr/>
+      </p:sp>
+      <p:sp>
+        <p:nvSpPr>
+          <p:cNvPr id="3" name="Notes Placeholder 2"/>
+          <p:cNvSpPr>
+            <a:spLocks noGrp="1"/>
+          </p:cNvSpPr>
+          <p:nvPr>
+            <p:ph type="body" idx="3" sz="quarter"/>
+          </p:nvPr>
+        </p:nvSpPr>
+        <p:spPr/>
+        <p:txBody>
+          <a:bodyPr/>
+          <a:lstStyle/>
+          <a:p>
+            <a:r>
+              <a:t>Hands-on: module5/examples/spi_baseline/</a:t>
+            </a:r>
+          </a:p>
+        </p:txBody>
+      </p:sp>
+      <p:sp>
+        <p:nvSpPr>
+          <p:cNvPr id="4" name="Slide Number Placeholder 3"/>
+          <p:cNvSpPr>
+            <a:spLocks noGrp="1"/>
+          </p:cNvSpPr>
+          <p:nvPr>
+            <p:ph type="sldNum" idx="5" sz="quarter"/>
+          </p:nvPr>
+        </p:nvSpPr>
+        <p:spPr/>
+      </p:sp>
+    </p:spTree>
+  </p:cSld>
+  <p:clrMapOvr>
+    <a:masterClrMapping/>
+  </p:clrMapOvr>
+</p:notes>
+</file>
+
+<file path=ppt/notesSlides/notesSlide16.xml><?xml version="1.0" encoding="utf-8"?>
+<p:notes xmlns:a="http://schemas.openxmlformats.org/drawingml/2006/main" xmlns:p="http://schemas.openxmlformats.org/presentationml/2006/main" xmlns:r="http://schemas.openxmlformats.org/officeDocument/2006/relationships">
+  <p:cSld>
+    <p:spTree>
+      <p:nvGrpSpPr>
+        <p:cNvPr id="1" name=""/>
+        <p:cNvGrpSpPr/>
+        <p:nvPr/>
+      </p:nvGrpSpPr>
+      <p:grpSpPr>
+        <a:xfrm>
+          <a:off x="0" y="0"/>
+          <a:ext cx="0" cy="0"/>
+          <a:chOff x="0" y="0"/>
+          <a:chExt cx="0" cy="0"/>
+        </a:xfrm>
+      </p:grpSpPr>
+      <p:sp>
+        <p:nvSpPr>
+          <p:cNvPr id="2" name="Slide Image Placeholder 1"/>
+          <p:cNvSpPr>
+            <a:spLocks noGrp="1"/>
+          </p:cNvSpPr>
+          <p:nvPr>
+            <p:ph type="sldImg" idx="2"/>
+          </p:nvPr>
+        </p:nvSpPr>
+        <p:spPr/>
+      </p:sp>
+      <p:sp>
+        <p:nvSpPr>
+          <p:cNvPr id="3" name="Notes Placeholder 2"/>
+          <p:cNvSpPr>
+            <a:spLocks noGrp="1"/>
+          </p:cNvSpPr>
+          <p:nvPr>
+            <p:ph type="body" idx="3" sz="quarter"/>
+          </p:nvPr>
+        </p:nvSpPr>
+        <p:spPr/>
+        <p:txBody>
+          <a:bodyPr/>
+          <a:lstStyle/>
+          <a:p>
+            <a:r>
+              <a:t>From MODULE5 Key Concepts.</a:t>
+            </a:r>
+          </a:p>
+        </p:txBody>
+      </p:sp>
+      <p:sp>
+        <p:nvSpPr>
+          <p:cNvPr id="4" name="Slide Number Placeholder 3"/>
+          <p:cNvSpPr>
+            <a:spLocks noGrp="1"/>
+          </p:cNvSpPr>
+          <p:nvPr>
+            <p:ph type="sldNum" idx="5" sz="quarter"/>
+          </p:nvPr>
+        </p:nvSpPr>
+        <p:spPr/>
+      </p:sp>
+    </p:spTree>
+  </p:cSld>
+  <p:clrMapOvr>
+    <a:masterClrMapping/>
+  </p:clrMapOvr>
+</p:notes>
+</file>
+
+<file path=ppt/notesSlides/notesSlide17.xml><?xml version="1.0" encoding="utf-8"?>
+<p:notes xmlns:a="http://schemas.openxmlformats.org/drawingml/2006/main" xmlns:p="http://schemas.openxmlformats.org/presentationml/2006/main" xmlns:r="http://schemas.openxmlformats.org/officeDocument/2006/relationships">
+  <p:cSld>
+    <p:spTree>
+      <p:nvGrpSpPr>
+        <p:cNvPr id="1" name=""/>
+        <p:cNvGrpSpPr/>
+        <p:nvPr/>
+      </p:nvGrpSpPr>
+      <p:grpSpPr>
+        <a:xfrm>
+          <a:off x="0" y="0"/>
+          <a:ext cx="0" cy="0"/>
+          <a:chOff x="0" y="0"/>
+          <a:chExt cx="0" cy="0"/>
+        </a:xfrm>
+      </p:grpSpPr>
+      <p:sp>
+        <p:nvSpPr>
+          <p:cNvPr id="2" name="Slide Image Placeholder 1"/>
+          <p:cNvSpPr>
+            <a:spLocks noGrp="1"/>
+          </p:cNvSpPr>
+          <p:nvPr>
+            <p:ph type="sldImg" idx="2"/>
+          </p:nvPr>
+        </p:nvSpPr>
+        <p:spPr/>
+      </p:sp>
+      <p:sp>
+        <p:nvSpPr>
+          <p:cNvPr id="3" name="Notes Placeholder 2"/>
+          <p:cNvSpPr>
+            <a:spLocks noGrp="1"/>
+          </p:cNvSpPr>
+          <p:nvPr>
+            <p:ph type="body" idx="3" sz="quarter"/>
+          </p:nvPr>
+        </p:nvSpPr>
+        <p:spPr/>
+        <p:txBody>
+          <a:bodyPr/>
+          <a:lstStyle/>
+          <a:p>
+            <a:r>
+              <a:t>From MODULE5 Key Concepts.</a:t>
+            </a:r>
+          </a:p>
+        </p:txBody>
+      </p:sp>
+      <p:sp>
+        <p:nvSpPr>
+          <p:cNvPr id="4" name="Slide Number Placeholder 3"/>
+          <p:cNvSpPr>
+            <a:spLocks noGrp="1"/>
+          </p:cNvSpPr>
+          <p:nvPr>
+            <p:ph type="sldNum" idx="5" sz="quarter"/>
+          </p:nvPr>
+        </p:nvSpPr>
+        <p:spPr/>
+      </p:sp>
+    </p:spTree>
+  </p:cSld>
+  <p:clrMapOvr>
+    <a:masterClrMapping/>
+  </p:clrMapOvr>
+</p:notes>
+</file>
+
+<file path=ppt/notesSlides/notesSlide18.xml><?xml version="1.0" encoding="utf-8"?>
+<p:notes xmlns:a="http://schemas.openxmlformats.org/drawingml/2006/main" xmlns:p="http://schemas.openxmlformats.org/presentationml/2006/main" xmlns:r="http://schemas.openxmlformats.org/officeDocument/2006/relationships">
+  <p:cSld>
+    <p:spTree>
+      <p:nvGrpSpPr>
+        <p:cNvPr id="1" name=""/>
+        <p:cNvGrpSpPr/>
+        <p:nvPr/>
+      </p:nvGrpSpPr>
+      <p:grpSpPr>
+        <a:xfrm>
+          <a:off x="0" y="0"/>
+          <a:ext cx="0" cy="0"/>
+          <a:chOff x="0" y="0"/>
+          <a:chExt cx="0" cy="0"/>
+        </a:xfrm>
+      </p:grpSpPr>
+      <p:sp>
+        <p:nvSpPr>
+          <p:cNvPr id="2" name="Slide Image Placeholder 1"/>
+          <p:cNvSpPr>
+            <a:spLocks noGrp="1"/>
+          </p:cNvSpPr>
+          <p:nvPr>
+            <p:ph type="sldImg" idx="2"/>
+          </p:nvPr>
+        </p:nvSpPr>
+        <p:spPr/>
+      </p:sp>
+      <p:sp>
+        <p:nvSpPr>
+          <p:cNvPr id="3" name="Notes Placeholder 2"/>
+          <p:cNvSpPr>
+            <a:spLocks noGrp="1"/>
+          </p:cNvSpPr>
+          <p:nvPr>
+            <p:ph type="body" idx="3" sz="quarter"/>
+          </p:nvPr>
+        </p:nvSpPr>
+        <p:spPr/>
+        <p:txBody>
+          <a:bodyPr/>
+          <a:lstStyle/>
+          <a:p>
+            <a:r>
+              <a:t>From MODULE5 Common Pitfalls.</a:t>
+            </a:r>
+          </a:p>
+        </p:txBody>
+      </p:sp>
+      <p:sp>
+        <p:nvSpPr>
+          <p:cNvPr id="4" name="Slide Number Placeholder 3"/>
+          <p:cNvSpPr>
+            <a:spLocks noGrp="1"/>
+          </p:cNvSpPr>
+          <p:nvPr>
+            <p:ph type="sldNum" idx="5" sz="quarter"/>
+          </p:nvPr>
+        </p:nvSpPr>
+        <p:spPr/>
+      </p:sp>
+    </p:spTree>
+  </p:cSld>
+  <p:clrMapOvr>
+    <a:masterClrMapping/>
+  </p:clrMapOvr>
+</p:notes>
+</file>
+
+<file path=ppt/notesSlides/notesSlide19.xml><?xml version="1.0" encoding="utf-8"?>
+<p:notes xmlns:a="http://schemas.openxmlformats.org/drawingml/2006/main" xmlns:p="http://schemas.openxmlformats.org/presentationml/2006/main" xmlns:r="http://schemas.openxmlformats.org/officeDocument/2006/relationships">
+  <p:cSld>
+    <p:spTree>
+      <p:nvGrpSpPr>
+        <p:cNvPr id="1" name=""/>
+        <p:cNvGrpSpPr/>
+        <p:nvPr/>
+      </p:nvGrpSpPr>
+      <p:grpSpPr>
+        <a:xfrm>
+          <a:off x="0" y="0"/>
+          <a:ext cx="0" cy="0"/>
+          <a:chOff x="0" y="0"/>
+          <a:chExt cx="0" cy="0"/>
+        </a:xfrm>
+      </p:grpSpPr>
+      <p:sp>
+        <p:nvSpPr>
+          <p:cNvPr id="2" name="Slide Image Placeholder 1"/>
+          <p:cNvSpPr>
+            <a:spLocks noGrp="1"/>
+          </p:cNvSpPr>
+          <p:nvPr>
+            <p:ph type="sldImg" idx="2"/>
+          </p:nvPr>
+        </p:nvSpPr>
+        <p:spPr/>
+      </p:sp>
+      <p:sp>
+        <p:nvSpPr>
+          <p:cNvPr id="3" name="Notes Placeholder 2"/>
+          <p:cNvSpPr>
+            <a:spLocks noGrp="1"/>
+          </p:cNvSpPr>
+          <p:nvPr>
+            <p:ph type="body" idx="3" sz="quarter"/>
+          </p:nvPr>
+        </p:nvSpPr>
+        <p:spPr/>
+        <p:txBody>
+          <a:bodyPr/>
+          <a:lstStyle/>
+          <a:p>
+            <a:r>
+              <a:t>From MODULE5 Common Pitfalls.</a:t>
             </a:r>
           </a:p>
         </p:txBody>
@@ -907,6 +1340,76 @@
 </p:notes>
 </file>
 
+<file path=ppt/notesSlides/notesSlide20.xml><?xml version="1.0" encoding="utf-8"?>
+<p:notes xmlns:a="http://schemas.openxmlformats.org/drawingml/2006/main" xmlns:p="http://schemas.openxmlformats.org/presentationml/2006/main" xmlns:r="http://schemas.openxmlformats.org/officeDocument/2006/relationships">
+  <p:cSld>
+    <p:spTree>
+      <p:nvGrpSpPr>
+        <p:cNvPr id="1" name=""/>
+        <p:cNvGrpSpPr/>
+        <p:nvPr/>
+      </p:nvGrpSpPr>
+      <p:grpSpPr>
+        <a:xfrm>
+          <a:off x="0" y="0"/>
+          <a:ext cx="0" cy="0"/>
+          <a:chOff x="0" y="0"/>
+          <a:chExt cx="0" cy="0"/>
+        </a:xfrm>
+      </p:grpSpPr>
+      <p:sp>
+        <p:nvSpPr>
+          <p:cNvPr id="2" name="Slide Image Placeholder 1"/>
+          <p:cNvSpPr>
+            <a:spLocks noGrp="1"/>
+          </p:cNvSpPr>
+          <p:nvPr>
+            <p:ph type="sldImg" idx="2"/>
+          </p:nvPr>
+        </p:nvSpPr>
+        <p:spPr/>
+      </p:sp>
+      <p:sp>
+        <p:nvSpPr>
+          <p:cNvPr id="3" name="Notes Placeholder 2"/>
+          <p:cNvSpPr>
+            <a:spLocks noGrp="1"/>
+          </p:cNvSpPr>
+          <p:nvPr>
+            <p:ph type="body" idx="3" sz="quarter"/>
+          </p:nvPr>
+        </p:nvSpPr>
+        <p:spPr/>
+        <p:txBody>
+          <a:bodyPr/>
+          <a:lstStyle/>
+          <a:p>
+            <a:r>
+              <a:t>From MODULE5 Learning Outcomes.</a:t>
+            </a:r>
+          </a:p>
+        </p:txBody>
+      </p:sp>
+      <p:sp>
+        <p:nvSpPr>
+          <p:cNvPr id="4" name="Slide Number Placeholder 3"/>
+          <p:cNvSpPr>
+            <a:spLocks noGrp="1"/>
+          </p:cNvSpPr>
+          <p:nvPr>
+            <p:ph type="sldNum" idx="5" sz="quarter"/>
+          </p:nvPr>
+        </p:nvSpPr>
+        <p:spPr/>
+      </p:sp>
+    </p:spTree>
+  </p:cSld>
+  <p:clrMapOvr>
+    <a:masterClrMapping/>
+  </p:clrMapOvr>
+</p:notes>
+</file>
+
 <file path=ppt/notesSlides/notesSlide3.xml><?xml version="1.0" encoding="utf-8"?>
 <p:notes xmlns:a="http://schemas.openxmlformats.org/drawingml/2006/main" xmlns:p="http://schemas.openxmlformats.org/presentationml/2006/main" xmlns:r="http://schemas.openxmlformats.org/officeDocument/2006/relationships">
   <p:cSld>
@@ -1092,7 +1595,7 @@
           <a:lstStyle/>
           <a:p>
             <a:r>
-              <a:t>From MODULE5 Verification &amp; Testing Methods.</a:t>
+              <a:t>From MODULE5 — execution and artifact layout.</a:t>
             </a:r>
           </a:p>
         </p:txBody>
@@ -1162,7 +1665,7 @@
           <a:lstStyle/>
           <a:p>
             <a:r>
-              <a:t>From MODULE5 Verification &amp; Testing Methods.</a:t>
+              <a:t>Match each path to files under module/examples/.</a:t>
             </a:r>
           </a:p>
         </p:txBody>
@@ -1232,7 +1735,7 @@
           <a:lstStyle/>
           <a:p>
             <a:r>
-              <a:t>From MODULE5 Verification &amp; Testing Methods.</a:t>
+              <a:t>Trace while running module5/EXAMPLES.md labs.</a:t>
             </a:r>
           </a:p>
         </p:txBody>
@@ -1302,7 +1805,7 @@
           <a:lstStyle/>
           <a:p>
             <a:r>
-              <a:t>From MODULE5 Topics Covered.</a:t>
+              <a:t>From MODULE5 Verification &amp; Testing Methods.</a:t>
             </a:r>
           </a:p>
         </p:txBody>
@@ -1372,7 +1875,7 @@
           <a:lstStyle/>
           <a:p>
             <a:r>
-              <a:t>From MODULE5 Topics Covered.</a:t>
+              <a:t>From MODULE5 Verification &amp; Testing Methods.</a:t>
             </a:r>
           </a:p>
         </p:txBody>
@@ -4530,14 +5033,189 @@
               </a:defRPr>
             </a:pPr>
             <a:r>
-              <a:t>Verification environment architecture</a:t>
+              <a:t>2. SPI master RTL</a:t>
+            </a:r>
+          </a:p>
+        </p:txBody>
+      </p:sp>
+      <p:sp>
+        <p:nvSpPr>
+          <p:cNvPr id="3" name="TextBox 2"/>
+          <p:cNvSpPr txBox="1"/>
+          <p:nvPr/>
+        </p:nvSpPr>
+        <p:spPr>
+          <a:xfrm>
+            <a:off x="548640" y="1234440"/>
+            <a:ext cx="5303520" cy="4754880"/>
+          </a:xfrm>
+          <a:prstGeom prst="rect">
+            <a:avLst/>
+          </a:prstGeom>
+          <a:noFill/>
+        </p:spPr>
+        <p:txBody>
+          <a:bodyPr wrap="square">
+            <a:noAutofit/>
+          </a:bodyPr>
+          <a:lstStyle/>
+          <a:p>
+            <a:pPr>
+              <a:lnSpc>
+                <a:spcPts val="2200"/>
+              </a:lnSpc>
+              <a:spcAft>
+                <a:spcPts val="1000"/>
+              </a:spcAft>
+              <a:defRPr sz="2000" b="0">
+                <a:solidFill>
+                  <a:srgbClr val="333333"/>
+                </a:solidFill>
+                <a:latin typeface="Calibri"/>
+              </a:defRPr>
+            </a:pPr>
+            <a:r>
+              <a:t>• clk_div: `clk_div_tick` every</a:t>
+            </a:r>
+          </a:p>
+          <a:p>
+            <a:pPr>
+              <a:lnSpc>
+                <a:spcPts val="2200"/>
+              </a:lnSpc>
+              <a:spcAft>
+                <a:spcPts val="1000"/>
+              </a:spcAft>
+              <a:defRPr sz="2000" b="0">
+                <a:solidFill>
+                  <a:srgbClr val="333333"/>
+                </a:solidFill>
+                <a:latin typeface="Calibri"/>
+              </a:defRPr>
+            </a:pPr>
+            <a:r>
+              <a:t>      `DIVIDER` clocks.</a:t>
+            </a:r>
+          </a:p>
+          <a:p>
+            <a:pPr>
+              <a:lnSpc>
+                <a:spcPts val="2200"/>
+              </a:lnSpc>
+              <a:spcAft>
+                <a:spcPts val="1000"/>
+              </a:spcAft>
+              <a:defRPr sz="2000" b="0">
+                <a:solidFill>
+                  <a:srgbClr val="333333"/>
+                </a:solidFill>
+                <a:latin typeface="Calibri"/>
+              </a:defRPr>
+            </a:pPr>
+            <a:r>
+              <a:t>• spi_master: Mode 0; `cs_n`</a:t>
+            </a:r>
+          </a:p>
+          <a:p>
+            <a:pPr>
+              <a:lnSpc>
+                <a:spcPts val="2200"/>
+              </a:lnSpc>
+              <a:spcAft>
+                <a:spcPts val="1000"/>
+              </a:spcAft>
+              <a:defRPr sz="2000" b="0">
+                <a:solidFill>
+                  <a:srgbClr val="333333"/>
+                </a:solidFill>
+                <a:latin typeface="Calibri"/>
+              </a:defRPr>
+            </a:pPr>
+            <a:r>
+              <a:t>      frames; MSB-first on `mosi`;</a:t>
+            </a:r>
+          </a:p>
+          <a:p>
+            <a:pPr>
+              <a:lnSpc>
+                <a:spcPts val="2200"/>
+              </a:lnSpc>
+              <a:spcAft>
+                <a:spcPts val="1000"/>
+              </a:spcAft>
+              <a:defRPr sz="2000" b="0">
+                <a:solidFill>
+                  <a:srgbClr val="333333"/>
+                </a:solidFill>
+                <a:latin typeface="Calibri"/>
+              </a:defRPr>
+            </a:pPr>
+            <a:r>
+              <a:t>      `done` when complete.</a:t>
+            </a:r>
+          </a:p>
+          <a:p>
+            <a:pPr>
+              <a:lnSpc>
+                <a:spcPts val="2200"/>
+              </a:lnSpc>
+              <a:spcAft>
+                <a:spcPts val="1000"/>
+              </a:spcAft>
+              <a:defRPr sz="2000" b="0">
+                <a:solidFill>
+                  <a:srgbClr val="333333"/>
+                </a:solidFill>
+                <a:latin typeface="Calibri"/>
+              </a:defRPr>
+            </a:pPr>
+            <a:r>
+              <a:t>• Outputs: `sclk` (idle low),</a:t>
+            </a:r>
+          </a:p>
+          <a:p>
+            <a:pPr>
+              <a:lnSpc>
+                <a:spcPts val="2200"/>
+              </a:lnSpc>
+              <a:spcAft>
+                <a:spcPts val="1000"/>
+              </a:spcAft>
+              <a:defRPr sz="2000" b="0">
+                <a:solidFill>
+                  <a:srgbClr val="333333"/>
+                </a:solidFill>
+                <a:latin typeface="Calibri"/>
+              </a:defRPr>
+            </a:pPr>
+            <a:r>
+              <a:t>      `mosi`, `cs_n` — no `miso` in</a:t>
+            </a:r>
+          </a:p>
+          <a:p>
+            <a:pPr>
+              <a:lnSpc>
+                <a:spcPts val="2200"/>
+              </a:lnSpc>
+              <a:spcAft>
+                <a:spcPts val="1000"/>
+              </a:spcAft>
+              <a:defRPr sz="2000" b="0">
+                <a:solidFill>
+                  <a:srgbClr val="333333"/>
+                </a:solidFill>
+                <a:latin typeface="Calibri"/>
+              </a:defRPr>
+            </a:pPr>
+            <a:r>
+              <a:t>      baseline.</a:t>
             </a:r>
           </a:p>
         </p:txBody>
       </p:sp>
       <p:pic>
         <p:nvPicPr>
-          <p:cNvPr id="3" name="Picture 2" descr="verification_architecture.png"/>
+          <p:cNvPr id="4" name="Picture 3" descr="verification_architecture.png"/>
           <p:cNvPicPr>
             <a:picLocks noChangeAspect="1"/>
           </p:cNvPicPr>
@@ -4551,53 +5229,14 @@
         </p:blipFill>
         <p:spPr>
           <a:xfrm>
-            <a:off x="548640" y="1143000"/>
-            <a:ext cx="8128000" cy="4572000"/>
+            <a:off x="6172200" y="2094547"/>
+            <a:ext cx="5394960" cy="3034665"/>
           </a:xfrm>
           <a:prstGeom prst="rect">
             <a:avLst/>
           </a:prstGeom>
         </p:spPr>
       </p:pic>
-      <p:sp>
-        <p:nvSpPr>
-          <p:cNvPr id="4" name="TextBox 3"/>
-          <p:cNvSpPr txBox="1"/>
-          <p:nvPr/>
-        </p:nvSpPr>
-        <p:spPr>
-          <a:xfrm>
-            <a:off x="548640" y="5897880"/>
-            <a:ext cx="11064240" cy="411480"/>
-          </a:xfrm>
-          <a:prstGeom prst="rect">
-            <a:avLst/>
-          </a:prstGeom>
-          <a:noFill/>
-        </p:spPr>
-        <p:txBody>
-          <a:bodyPr wrap="square">
-            <a:noAutofit/>
-          </a:bodyPr>
-          <a:lstStyle/>
-          <a:p>
-            <a:pPr>
-              <a:lnSpc>
-                <a:spcPts val="2200"/>
-              </a:lnSpc>
-              <a:defRPr sz="1200" b="0">
-                <a:solidFill>
-                  <a:srgbClr val="333333"/>
-                </a:solidFill>
-                <a:latin typeface="Calibri"/>
-              </a:defRPr>
-            </a:pPr>
-            <a:r>
-              <a:t>Module 5: UVM layers, agents, and checkers for this phase.</a:t>
-            </a:r>
-          </a:p>
-        </p:txBody>
-      </p:sp>
       <p:sp>
         <p:nvSpPr>
           <p:cNvPr id="5" name="TextBox 4"/>
@@ -4689,7 +5328,7 @@
               </a:defRPr>
             </a:pPr>
             <a:r>
-              <a:t>1. Block hierarchy</a:t>
+              <a:t>3. Mode 0 timing on the wire</a:t>
             </a:r>
           </a:p>
         </p:txBody>
@@ -4703,7 +5342,7 @@
         <p:spPr>
           <a:xfrm>
             <a:off x="548640" y="1234440"/>
-            <a:ext cx="11064240" cy="4937760"/>
+            <a:ext cx="5303520" cy="4754880"/>
           </a:xfrm>
           <a:prstGeom prst="rect">
             <a:avLst/>
@@ -4731,7 +5370,7 @@
               </a:defRPr>
             </a:pPr>
             <a:r>
-              <a:t>• top_spi_baseline → `clk_div` + `spi_master`; C++</a:t>
+              <a:t>• Capture on rising SCLK; change</a:t>
             </a:r>
           </a:p>
           <a:p>
@@ -4750,14 +5389,57 @@
               </a:defRPr>
             </a:pPr>
             <a:r>
-              <a:t>      supplies `clk`/`rst_n`.</a:t>
-            </a:r>
-          </a:p>
-        </p:txBody>
-      </p:sp>
-      <p:sp>
-        <p:nvSpPr>
-          <p:cNvPr id="4" name="TextBox 3"/>
+              <a:t>      MOSI on falling SCLK; 8 edges</a:t>
+            </a:r>
+          </a:p>
+          <a:p>
+            <a:pPr>
+              <a:lnSpc>
+                <a:spcPts val="2200"/>
+              </a:lnSpc>
+              <a:spcAft>
+                <a:spcPts val="1000"/>
+              </a:spcAft>
+              <a:defRPr sz="2000" b="0">
+                <a:solidFill>
+                  <a:srgbClr val="333333"/>
+                </a:solidFill>
+                <a:latin typeface="Calibri"/>
+              </a:defRPr>
+            </a:pPr>
+            <a:r>
+              <a:t>      per byte.</a:t>
+            </a:r>
+          </a:p>
+        </p:txBody>
+      </p:sp>
+      <p:pic>
+        <p:nvPicPr>
+          <p:cNvPr id="4" name="Picture 3" descr="testing_methods.png"/>
+          <p:cNvPicPr>
+            <a:picLocks noChangeAspect="1"/>
+          </p:cNvPicPr>
+          <p:nvPr/>
+        </p:nvPicPr>
+        <p:blipFill>
+          <a:blip r:embed="rId2"/>
+          <a:stretch>
+            <a:fillRect/>
+          </a:stretch>
+        </p:blipFill>
+        <p:spPr>
+          <a:xfrm>
+            <a:off x="6172200" y="2094547"/>
+            <a:ext cx="5394960" cy="3034665"/>
+          </a:xfrm>
+          <a:prstGeom prst="rect">
+            <a:avLst/>
+          </a:prstGeom>
+        </p:spPr>
+      </p:pic>
+      <p:sp>
+        <p:nvSpPr>
+          <p:cNvPr id="5" name="TextBox 4"/>
           <p:cNvSpPr txBox="1"/>
           <p:nvPr/>
         </p:nvSpPr>
@@ -4846,21 +5528,45 @@
               </a:defRPr>
             </a:pPr>
             <a:r>
-              <a:t>2. SPI master RTL</a:t>
-            </a:r>
-          </a:p>
-        </p:txBody>
-      </p:sp>
-      <p:sp>
-        <p:nvSpPr>
-          <p:cNvPr id="3" name="TextBox 2"/>
+              <a:t>RTL block diagram (reference)</a:t>
+            </a:r>
+          </a:p>
+        </p:txBody>
+      </p:sp>
+      <p:pic>
+        <p:nvPicPr>
+          <p:cNvPr id="3" name="Picture 2" descr="rtl_architecture.png"/>
+          <p:cNvPicPr>
+            <a:picLocks noChangeAspect="1"/>
+          </p:cNvPicPr>
+          <p:nvPr/>
+        </p:nvPicPr>
+        <p:blipFill>
+          <a:blip r:embed="rId2"/>
+          <a:stretch>
+            <a:fillRect/>
+          </a:stretch>
+        </p:blipFill>
+        <p:spPr>
+          <a:xfrm>
+            <a:off x="548640" y="1143000"/>
+            <a:ext cx="8128000" cy="4572000"/>
+          </a:xfrm>
+          <a:prstGeom prst="rect">
+            <a:avLst/>
+          </a:prstGeom>
+        </p:spPr>
+      </p:pic>
+      <p:sp>
+        <p:nvSpPr>
+          <p:cNvPr id="4" name="TextBox 3"/>
           <p:cNvSpPr txBox="1"/>
           <p:nvPr/>
         </p:nvSpPr>
         <p:spPr>
           <a:xfrm>
-            <a:off x="548640" y="1234440"/>
-            <a:ext cx="11064240" cy="4937760"/>
+            <a:off x="548640" y="5897880"/>
+            <a:ext cx="11064240" cy="411480"/>
           </a:xfrm>
           <a:prstGeom prst="rect">
             <a:avLst/>
@@ -4877,101 +5583,22 @@
               <a:lnSpc>
                 <a:spcPts val="2200"/>
               </a:lnSpc>
-              <a:spcAft>
-                <a:spcPts val="1000"/>
-              </a:spcAft>
-              <a:defRPr sz="2000" b="0">
-                <a:solidFill>
-                  <a:srgbClr val="333333"/>
-                </a:solidFill>
-                <a:latin typeface="Calibri"/>
-              </a:defRPr>
-            </a:pPr>
-            <a:r>
-              <a:t>• clk_div: `clk_div_tick` every `DIVIDER` clocks.</a:t>
-            </a:r>
-          </a:p>
-          <a:p>
-            <a:pPr>
-              <a:lnSpc>
-                <a:spcPts val="2200"/>
-              </a:lnSpc>
-              <a:spcAft>
-                <a:spcPts val="1000"/>
-              </a:spcAft>
-              <a:defRPr sz="2000" b="0">
-                <a:solidFill>
-                  <a:srgbClr val="333333"/>
-                </a:solidFill>
-                <a:latin typeface="Calibri"/>
-              </a:defRPr>
-            </a:pPr>
-            <a:r>
-              <a:t>• spi_master: Mode 0; `cs_n` frames; MSB-first on</a:t>
-            </a:r>
-          </a:p>
-          <a:p>
-            <a:pPr>
-              <a:lnSpc>
-                <a:spcPts val="2200"/>
-              </a:lnSpc>
-              <a:spcAft>
-                <a:spcPts val="1000"/>
-              </a:spcAft>
-              <a:defRPr sz="2000" b="0">
-                <a:solidFill>
-                  <a:srgbClr val="333333"/>
-                </a:solidFill>
-                <a:latin typeface="Calibri"/>
-              </a:defRPr>
-            </a:pPr>
-            <a:r>
-              <a:t>      `mosi`; `done` when complete.</a:t>
-            </a:r>
-          </a:p>
-          <a:p>
-            <a:pPr>
-              <a:lnSpc>
-                <a:spcPts val="2200"/>
-              </a:lnSpc>
-              <a:spcAft>
-                <a:spcPts val="1000"/>
-              </a:spcAft>
-              <a:defRPr sz="2000" b="0">
-                <a:solidFill>
-                  <a:srgbClr val="333333"/>
-                </a:solidFill>
-                <a:latin typeface="Calibri"/>
-              </a:defRPr>
-            </a:pPr>
-            <a:r>
-              <a:t>• Outputs: `sclk` (idle low), `mosi`, `cs_n` — no</a:t>
-            </a:r>
-          </a:p>
-          <a:p>
-            <a:pPr>
-              <a:lnSpc>
-                <a:spcPts val="2200"/>
-              </a:lnSpc>
-              <a:spcAft>
-                <a:spcPts val="1000"/>
-              </a:spcAft>
-              <a:defRPr sz="2000" b="0">
-                <a:solidFill>
-                  <a:srgbClr val="333333"/>
-                </a:solidFill>
-                <a:latin typeface="Calibri"/>
-              </a:defRPr>
-            </a:pPr>
-            <a:r>
-              <a:t>      `miso` in baseline.</a:t>
-            </a:r>
-          </a:p>
-        </p:txBody>
-      </p:sp>
-      <p:sp>
-        <p:nvSpPr>
-          <p:cNvPr id="4" name="TextBox 3"/>
+              <a:defRPr sz="1200" b="0">
+                <a:solidFill>
+                  <a:srgbClr val="333333"/>
+                </a:solidFill>
+                <a:latin typeface="Calibri"/>
+              </a:defRPr>
+            </a:pPr>
+            <a:r>
+              <a:t>Module 5: DUT hierarchy and signal flow.</a:t>
+            </a:r>
+          </a:p>
+        </p:txBody>
+      </p:sp>
+      <p:sp>
+        <p:nvSpPr>
+          <p:cNvPr id="5" name="TextBox 4"/>
           <p:cNvSpPr txBox="1"/>
           <p:nvPr/>
         </p:nvSpPr>
@@ -5060,21 +5687,45 @@
               </a:defRPr>
             </a:pPr>
             <a:r>
-              <a:t>3. Mode 0 timing on the wire</a:t>
-            </a:r>
-          </a:p>
-        </p:txBody>
-      </p:sp>
-      <p:sp>
-        <p:nvSpPr>
-          <p:cNvPr id="3" name="TextBox 2"/>
+              <a:t>Verification / testbench diagram (reference)</a:t>
+            </a:r>
+          </a:p>
+        </p:txBody>
+      </p:sp>
+      <p:pic>
+        <p:nvPicPr>
+          <p:cNvPr id="3" name="Picture 2" descr="verification_architecture.png"/>
+          <p:cNvPicPr>
+            <a:picLocks noChangeAspect="1"/>
+          </p:cNvPicPr>
+          <p:nvPr/>
+        </p:nvPicPr>
+        <p:blipFill>
+          <a:blip r:embed="rId2"/>
+          <a:stretch>
+            <a:fillRect/>
+          </a:stretch>
+        </p:blipFill>
+        <p:spPr>
+          <a:xfrm>
+            <a:off x="548640" y="1143000"/>
+            <a:ext cx="8128000" cy="4572000"/>
+          </a:xfrm>
+          <a:prstGeom prst="rect">
+            <a:avLst/>
+          </a:prstGeom>
+        </p:spPr>
+      </p:pic>
+      <p:sp>
+        <p:nvSpPr>
+          <p:cNvPr id="4" name="TextBox 3"/>
           <p:cNvSpPr txBox="1"/>
           <p:nvPr/>
         </p:nvSpPr>
         <p:spPr>
           <a:xfrm>
-            <a:off x="548640" y="1234440"/>
-            <a:ext cx="11064240" cy="4937760"/>
+            <a:off x="548640" y="5897880"/>
+            <a:ext cx="11064240" cy="411480"/>
           </a:xfrm>
           <a:prstGeom prst="rect">
             <a:avLst/>
@@ -5091,44 +5742,22 @@
               <a:lnSpc>
                 <a:spcPts val="2200"/>
               </a:lnSpc>
-              <a:spcAft>
-                <a:spcPts val="1000"/>
-              </a:spcAft>
-              <a:defRPr sz="2000" b="0">
-                <a:solidFill>
-                  <a:srgbClr val="333333"/>
-                </a:solidFill>
-                <a:latin typeface="Calibri"/>
-              </a:defRPr>
-            </a:pPr>
-            <a:r>
-              <a:t>• Capture on rising SCLK; change MOSI on falling SCLK;</a:t>
-            </a:r>
-          </a:p>
-          <a:p>
-            <a:pPr>
-              <a:lnSpc>
-                <a:spcPts val="2200"/>
-              </a:lnSpc>
-              <a:spcAft>
-                <a:spcPts val="1000"/>
-              </a:spcAft>
-              <a:defRPr sz="2000" b="0">
-                <a:solidFill>
-                  <a:srgbClr val="333333"/>
-                </a:solidFill>
-                <a:latin typeface="Calibri"/>
-              </a:defRPr>
-            </a:pPr>
-            <a:r>
-              <a:t>      8 edges per byte.</a:t>
-            </a:r>
-          </a:p>
-        </p:txBody>
-      </p:sp>
-      <p:sp>
-        <p:nvSpPr>
-          <p:cNvPr id="4" name="TextBox 3"/>
+              <a:defRPr sz="1200" b="0">
+                <a:solidFill>
+                  <a:srgbClr val="333333"/>
+                </a:solidFill>
+                <a:latin typeface="Calibri"/>
+              </a:defRPr>
+            </a:pPr>
+            <a:r>
+              <a:t>Module 5: stimulus, observation, and checking.</a:t>
+            </a:r>
+          </a:p>
+        </p:txBody>
+      </p:sp>
+      <p:sp>
+        <p:nvSpPr>
+          <p:cNvPr id="5" name="TextBox 4"/>
           <p:cNvSpPr txBox="1"/>
           <p:nvPr/>
         </p:nvSpPr>
@@ -5191,8 +5820,8 @@
         </p:nvSpPr>
         <p:spPr>
           <a:xfrm>
-            <a:off x="548640" y="2743200"/>
-            <a:ext cx="11064240" cy="1371600"/>
+            <a:off x="548640" y="411480"/>
+            <a:ext cx="11064240" cy="777240"/>
           </a:xfrm>
           <a:prstGeom prst="rect">
             <a:avLst/>
@@ -5205,11 +5834,11 @@
           </a:bodyPr>
           <a:lstStyle/>
           <a:p>
-            <a:pPr algn="ctr">
-              <a:lnSpc>
-                <a:spcPts val="2200"/>
-              </a:lnSpc>
-              <a:defRPr sz="3600" b="1">
+            <a:pPr>
+              <a:lnSpc>
+                <a:spcPts val="2200"/>
+              </a:lnSpc>
+              <a:defRPr sz="2800" b="1">
                 <a:solidFill>
                   <a:srgbClr val="1A1A2E"/>
                 </a:solidFill>
@@ -5217,7 +5846,7 @@
               </a:defRPr>
             </a:pPr>
             <a:r>
-              <a:t>Verification &amp; testing methods</a:t>
+              <a:t>spi_master — Mode 0 shift</a:t>
             </a:r>
           </a:p>
         </p:txBody>
@@ -5225,6 +5854,367 @@
       <p:sp>
         <p:nvSpPr>
           <p:cNvPr id="3" name="TextBox 2"/>
+          <p:cNvSpPr txBox="1"/>
+          <p:nvPr/>
+        </p:nvSpPr>
+        <p:spPr>
+          <a:xfrm>
+            <a:off x="548640" y="1143000"/>
+            <a:ext cx="11064240" cy="5029200"/>
+          </a:xfrm>
+          <a:prstGeom prst="rect">
+            <a:avLst/>
+          </a:prstGeom>
+          <a:solidFill>
+            <a:srgbClr val="F4F4F4"/>
+          </a:solidFill>
+        </p:spPr>
+        <p:txBody>
+          <a:bodyPr wrap="square">
+            <a:noAutofit/>
+          </a:bodyPr>
+          <a:lstStyle/>
+          <a:p>
+            <a:pPr>
+              <a:lnSpc>
+                <a:spcPts val="2200"/>
+              </a:lnSpc>
+              <a:spcAft>
+                <a:spcPts val="400"/>
+              </a:spcAft>
+              <a:defRPr sz="2000" b="0">
+                <a:solidFill>
+                  <a:srgbClr val="333333"/>
+                </a:solidFill>
+                <a:latin typeface="Consolas"/>
+              </a:defRPr>
+            </a:pPr>
+            <a:r>
+              <a:t>// Simple SPI master (mode 0, single slave, 8-bit transfers).</a:t>
+            </a:r>
+          </a:p>
+          <a:p>
+            <a:pPr>
+              <a:lnSpc>
+                <a:spcPts val="2200"/>
+              </a:lnSpc>
+              <a:spcAft>
+                <a:spcPts val="400"/>
+              </a:spcAft>
+              <a:defRPr sz="2000" b="0">
+                <a:solidFill>
+                  <a:srgbClr val="333333"/>
+                </a:solidFill>
+                <a:latin typeface="Consolas"/>
+              </a:defRPr>
+            </a:pPr>
+            <a:r>
+              <a:t>// This is a teaching example: it assumes a clean clk_div_tick input</a:t>
+            </a:r>
+          </a:p>
+          <a:p>
+            <a:pPr>
+              <a:lnSpc>
+                <a:spcPts val="2200"/>
+              </a:lnSpc>
+              <a:spcAft>
+                <a:spcPts val="400"/>
+              </a:spcAft>
+              <a:defRPr sz="2000" b="0">
+                <a:solidFill>
+                  <a:srgbClr val="333333"/>
+                </a:solidFill>
+                <a:latin typeface="Consolas"/>
+              </a:defRPr>
+            </a:pPr>
+            <a:r>
+              <a:t>that</a:t>
+            </a:r>
+          </a:p>
+          <a:p>
+            <a:pPr>
+              <a:lnSpc>
+                <a:spcPts val="2200"/>
+              </a:lnSpc>
+              <a:spcAft>
+                <a:spcPts val="400"/>
+              </a:spcAft>
+              <a:defRPr sz="2000" b="0">
+                <a:solidFill>
+                  <a:srgbClr val="333333"/>
+                </a:solidFill>
+                <a:latin typeface="Consolas"/>
+              </a:defRPr>
+            </a:pPr>
+            <a:r>
+              <a:t>// controls SCLK edges and bit timing.</a:t>
+            </a:r>
+          </a:p>
+          <a:p>
+            <a:pPr>
+              <a:lnSpc>
+                <a:spcPts val="2200"/>
+              </a:lnSpc>
+              <a:spcAft>
+                <a:spcPts val="400"/>
+              </a:spcAft>
+              <a:defRPr sz="2000" b="0">
+                <a:solidFill>
+                  <a:srgbClr val="333333"/>
+                </a:solidFill>
+                <a:latin typeface="Consolas"/>
+              </a:defRPr>
+            </a:pPr>
+            <a:r>
+              <a:t>//</a:t>
+            </a:r>
+          </a:p>
+          <a:p>
+            <a:pPr>
+              <a:lnSpc>
+                <a:spcPts val="2200"/>
+              </a:lnSpc>
+              <a:spcAft>
+                <a:spcPts val="400"/>
+              </a:spcAft>
+              <a:defRPr sz="2000" b="0">
+                <a:solidFill>
+                  <a:srgbClr val="333333"/>
+                </a:solidFill>
+                <a:latin typeface="Consolas"/>
+              </a:defRPr>
+            </a:pPr>
+            <a:r>
+              <a:t>// Mode 0 (CPOL=0, CPHA=0):</a:t>
+            </a:r>
+          </a:p>
+          <a:p>
+            <a:pPr>
+              <a:lnSpc>
+                <a:spcPts val="2200"/>
+              </a:lnSpc>
+              <a:spcAft>
+                <a:spcPts val="400"/>
+              </a:spcAft>
+              <a:defRPr sz="2000" b="0">
+                <a:solidFill>
+                  <a:srgbClr val="333333"/>
+                </a:solidFill>
+                <a:latin typeface="Consolas"/>
+              </a:defRPr>
+            </a:pPr>
+            <a:r>
+              <a:t>//   - SCLK idles low.</a:t>
+            </a:r>
+          </a:p>
+          <a:p>
+            <a:pPr>
+              <a:lnSpc>
+                <a:spcPts val="2200"/>
+              </a:lnSpc>
+              <a:spcAft>
+                <a:spcPts val="400"/>
+              </a:spcAft>
+              <a:defRPr sz="2000" b="0">
+                <a:solidFill>
+                  <a:srgbClr val="333333"/>
+                </a:solidFill>
+                <a:latin typeface="Consolas"/>
+              </a:defRPr>
+            </a:pPr>
+            <a:r>
+              <a:t>//   - Data is captured on the rising edge of SCLK.</a:t>
+            </a:r>
+          </a:p>
+          <a:p>
+            <a:pPr>
+              <a:lnSpc>
+                <a:spcPts val="2200"/>
+              </a:lnSpc>
+              <a:spcAft>
+                <a:spcPts val="400"/>
+              </a:spcAft>
+              <a:defRPr sz="2000" b="0">
+                <a:solidFill>
+                  <a:srgbClr val="333333"/>
+                </a:solidFill>
+                <a:latin typeface="Consolas"/>
+              </a:defRPr>
+            </a:pPr>
+            <a:r>
+              <a:t>//   - Data is changed on the falling edge of SCLK.</a:t>
+            </a:r>
+          </a:p>
+          <a:p>
+            <a:pPr>
+              <a:lnSpc>
+                <a:spcPts val="2200"/>
+              </a:lnSpc>
+              <a:spcAft>
+                <a:spcPts val="400"/>
+              </a:spcAft>
+              <a:defRPr sz="2000" b="0">
+                <a:solidFill>
+                  <a:srgbClr val="333333"/>
+                </a:solidFill>
+                <a:latin typeface="Consolas"/>
+              </a:defRPr>
+            </a:pPr>
+          </a:p>
+          <a:p>
+            <a:pPr>
+              <a:lnSpc>
+                <a:spcPts val="2200"/>
+              </a:lnSpc>
+              <a:spcAft>
+                <a:spcPts val="400"/>
+              </a:spcAft>
+              <a:defRPr sz="2000" b="0">
+                <a:solidFill>
+                  <a:srgbClr val="333333"/>
+                </a:solidFill>
+                <a:latin typeface="Consolas"/>
+              </a:defRPr>
+            </a:pPr>
+            <a:r>
+              <a:t>`timescale 1ns/1ps</a:t>
+            </a:r>
+          </a:p>
+          <a:p>
+            <a:pPr>
+              <a:lnSpc>
+                <a:spcPts val="2200"/>
+              </a:lnSpc>
+              <a:spcAft>
+                <a:spcPts val="400"/>
+              </a:spcAft>
+              <a:defRPr sz="2000" b="0">
+                <a:solidFill>
+                  <a:srgbClr val="333333"/>
+                </a:solidFill>
+                <a:latin typeface="Consolas"/>
+              </a:defRPr>
+            </a:pPr>
+          </a:p>
+          <a:p>
+            <a:pPr>
+              <a:lnSpc>
+                <a:spcPts val="2200"/>
+              </a:lnSpc>
+              <a:spcAft>
+                <a:spcPts val="400"/>
+              </a:spcAft>
+              <a:defRPr sz="2000" b="0">
+                <a:solidFill>
+                  <a:srgbClr val="333333"/>
+                </a:solidFill>
+                <a:latin typeface="Consolas"/>
+              </a:defRPr>
+            </a:pPr>
+            <a:r>
+              <a:t>module spi_master (</a:t>
+            </a:r>
+          </a:p>
+          <a:p>
+            <a:pPr>
+              <a:lnSpc>
+                <a:spcPts val="2200"/>
+              </a:lnSpc>
+              <a:spcAft>
+                <a:spcPts val="400"/>
+              </a:spcAft>
+              <a:defRPr sz="2000" b="0">
+                <a:solidFill>
+                  <a:srgbClr val="333333"/>
+                </a:solidFill>
+                <a:latin typeface="Consolas"/>
+              </a:defRPr>
+            </a:pPr>
+            <a:r>
+              <a:t>    input  wire       clk,</a:t>
+            </a:r>
+          </a:p>
+          <a:p>
+            <a:pPr>
+              <a:lnSpc>
+                <a:spcPts val="2200"/>
+              </a:lnSpc>
+              <a:spcAft>
+                <a:spcPts val="400"/>
+              </a:spcAft>
+              <a:defRPr sz="2000" b="0">
+                <a:solidFill>
+                  <a:srgbClr val="333333"/>
+                </a:solidFill>
+                <a:latin typeface="Consolas"/>
+              </a:defRPr>
+            </a:pPr>
+            <a:r>
+              <a:t>    input  wire       rst_n,       // Active-low async reset</a:t>
+            </a:r>
+          </a:p>
+          <a:p>
+            <a:pPr>
+              <a:lnSpc>
+                <a:spcPts val="2200"/>
+              </a:lnSpc>
+              <a:spcAft>
+                <a:spcPts val="400"/>
+              </a:spcAft>
+              <a:defRPr sz="2000" b="0">
+                <a:solidFill>
+                  <a:srgbClr val="333333"/>
+                </a:solidFill>
+                <a:latin typeface="Consolas"/>
+              </a:defRPr>
+            </a:pPr>
+            <a:r>
+              <a:t>    input  wire       clk_div_tick,// Divider pulse controlling SCLK</a:t>
+            </a:r>
+          </a:p>
+          <a:p>
+            <a:pPr>
+              <a:lnSpc>
+                <a:spcPts val="2200"/>
+              </a:lnSpc>
+              <a:spcAft>
+                <a:spcPts val="400"/>
+              </a:spcAft>
+              <a:defRPr sz="2000" b="0">
+                <a:solidFill>
+                  <a:srgbClr val="333333"/>
+                </a:solidFill>
+                <a:latin typeface="Consolas"/>
+              </a:defRPr>
+            </a:pPr>
+            <a:r>
+              <a:t>toggling</a:t>
+            </a:r>
+          </a:p>
+          <a:p>
+            <a:pPr>
+              <a:lnSpc>
+                <a:spcPts val="2200"/>
+              </a:lnSpc>
+              <a:spcAft>
+                <a:spcPts val="400"/>
+              </a:spcAft>
+              <a:defRPr sz="2000" b="0">
+                <a:solidFill>
+                  <a:srgbClr val="333333"/>
+                </a:solidFill>
+                <a:latin typeface="Consolas"/>
+              </a:defRPr>
+            </a:pPr>
+            <a:r>
+              <a:t>    input  wire       start,       // Pulse high for one cycle to start</a:t>
+            </a:r>
+          </a:p>
+        </p:txBody>
+      </p:sp>
+      <p:sp>
+        <p:nvSpPr>
+          <p:cNvPr id="4" name="TextBox 3"/>
           <p:cNvSpPr txBox="1"/>
           <p:nvPr/>
         </p:nvSpPr>
@@ -5313,50 +6303,28 @@
               </a:defRPr>
             </a:pPr>
             <a:r>
-              <a:t>Testing and closure flow</a:t>
-            </a:r>
-          </a:p>
-        </p:txBody>
-      </p:sp>
-      <p:pic>
-        <p:nvPicPr>
-          <p:cNvPr id="3" name="Picture 2" descr="testing_methods.png"/>
-          <p:cNvPicPr>
-            <a:picLocks noChangeAspect="1"/>
-          </p:cNvPicPr>
+              <a:t>clk_div — SPI clock</a:t>
+            </a:r>
+          </a:p>
+        </p:txBody>
+      </p:sp>
+      <p:sp>
+        <p:nvSpPr>
+          <p:cNvPr id="3" name="TextBox 2"/>
+          <p:cNvSpPr txBox="1"/>
           <p:nvPr/>
-        </p:nvPicPr>
-        <p:blipFill>
-          <a:blip r:embed="rId2"/>
-          <a:stretch>
-            <a:fillRect/>
-          </a:stretch>
-        </p:blipFill>
+        </p:nvSpPr>
         <p:spPr>
           <a:xfrm>
             <a:off x="548640" y="1143000"/>
-            <a:ext cx="8128000" cy="4572000"/>
+            <a:ext cx="11064240" cy="5029200"/>
           </a:xfrm>
           <a:prstGeom prst="rect">
             <a:avLst/>
           </a:prstGeom>
-        </p:spPr>
-      </p:pic>
-      <p:sp>
-        <p:nvSpPr>
-          <p:cNvPr id="4" name="TextBox 3"/>
-          <p:cNvSpPr txBox="1"/>
-          <p:nvPr/>
-        </p:nvSpPr>
-        <p:spPr>
-          <a:xfrm>
-            <a:off x="548640" y="5897880"/>
-            <a:ext cx="11064240" cy="411480"/>
-          </a:xfrm>
-          <a:prstGeom prst="rect">
-            <a:avLst/>
-          </a:prstGeom>
-          <a:noFill/>
+          <a:solidFill>
+            <a:srgbClr val="F4F4F4"/>
+          </a:solidFill>
         </p:spPr>
         <p:txBody>
           <a:bodyPr wrap="square">
@@ -5368,22 +6336,339 @@
               <a:lnSpc>
                 <a:spcPts val="2200"/>
               </a:lnSpc>
-              <a:defRPr sz="1200" b="0">
-                <a:solidFill>
-                  <a:srgbClr val="333333"/>
-                </a:solidFill>
-                <a:latin typeface="Calibri"/>
-              </a:defRPr>
-            </a:pPr>
-            <a:r>
-              <a:t>Module 5: how tests, checks, and metrics close verification goals.</a:t>
-            </a:r>
-          </a:p>
-        </p:txBody>
-      </p:sp>
-      <p:sp>
-        <p:nvSpPr>
-          <p:cNvPr id="5" name="TextBox 4"/>
+              <a:spcAft>
+                <a:spcPts val="400"/>
+              </a:spcAft>
+              <a:defRPr sz="2000" b="0">
+                <a:solidFill>
+                  <a:srgbClr val="333333"/>
+                </a:solidFill>
+                <a:latin typeface="Consolas"/>
+              </a:defRPr>
+            </a:pPr>
+            <a:r>
+              <a:t>// Simple clock divider for SPI SCLK timing.</a:t>
+            </a:r>
+          </a:p>
+          <a:p>
+            <a:pPr>
+              <a:lnSpc>
+                <a:spcPts val="2200"/>
+              </a:lnSpc>
+              <a:spcAft>
+                <a:spcPts val="400"/>
+              </a:spcAft>
+              <a:defRPr sz="2000" b="0">
+                <a:solidFill>
+                  <a:srgbClr val="333333"/>
+                </a:solidFill>
+                <a:latin typeface="Consolas"/>
+              </a:defRPr>
+            </a:pPr>
+            <a:r>
+              <a:t>// Generates a 1-cycle-wide clk_div_tick pulse every DIVIDER cycles of</a:t>
+            </a:r>
+          </a:p>
+          <a:p>
+            <a:pPr>
+              <a:lnSpc>
+                <a:spcPts val="2200"/>
+              </a:lnSpc>
+              <a:spcAft>
+                <a:spcPts val="400"/>
+              </a:spcAft>
+              <a:defRPr sz="2000" b="0">
+                <a:solidFill>
+                  <a:srgbClr val="333333"/>
+                </a:solidFill>
+                <a:latin typeface="Consolas"/>
+              </a:defRPr>
+            </a:pPr>
+            <a:r>
+              <a:t>clk.</a:t>
+            </a:r>
+          </a:p>
+          <a:p>
+            <a:pPr>
+              <a:lnSpc>
+                <a:spcPts val="2200"/>
+              </a:lnSpc>
+              <a:spcAft>
+                <a:spcPts val="400"/>
+              </a:spcAft>
+              <a:defRPr sz="2000" b="0">
+                <a:solidFill>
+                  <a:srgbClr val="333333"/>
+                </a:solidFill>
+                <a:latin typeface="Consolas"/>
+              </a:defRPr>
+            </a:pPr>
+          </a:p>
+          <a:p>
+            <a:pPr>
+              <a:lnSpc>
+                <a:spcPts val="2200"/>
+              </a:lnSpc>
+              <a:spcAft>
+                <a:spcPts val="400"/>
+              </a:spcAft>
+              <a:defRPr sz="2000" b="0">
+                <a:solidFill>
+                  <a:srgbClr val="333333"/>
+                </a:solidFill>
+                <a:latin typeface="Consolas"/>
+              </a:defRPr>
+            </a:pPr>
+            <a:r>
+              <a:t>`timescale 1ns/1ps</a:t>
+            </a:r>
+          </a:p>
+          <a:p>
+            <a:pPr>
+              <a:lnSpc>
+                <a:spcPts val="2200"/>
+              </a:lnSpc>
+              <a:spcAft>
+                <a:spcPts val="400"/>
+              </a:spcAft>
+              <a:defRPr sz="2000" b="0">
+                <a:solidFill>
+                  <a:srgbClr val="333333"/>
+                </a:solidFill>
+                <a:latin typeface="Consolas"/>
+              </a:defRPr>
+            </a:pPr>
+          </a:p>
+          <a:p>
+            <a:pPr>
+              <a:lnSpc>
+                <a:spcPts val="2200"/>
+              </a:lnSpc>
+              <a:spcAft>
+                <a:spcPts val="400"/>
+              </a:spcAft>
+              <a:defRPr sz="2000" b="0">
+                <a:solidFill>
+                  <a:srgbClr val="333333"/>
+                </a:solidFill>
+                <a:latin typeface="Consolas"/>
+              </a:defRPr>
+            </a:pPr>
+            <a:r>
+              <a:t>module clk_div #(</a:t>
+            </a:r>
+          </a:p>
+          <a:p>
+            <a:pPr>
+              <a:lnSpc>
+                <a:spcPts val="2200"/>
+              </a:lnSpc>
+              <a:spcAft>
+                <a:spcPts val="400"/>
+              </a:spcAft>
+              <a:defRPr sz="2000" b="0">
+                <a:solidFill>
+                  <a:srgbClr val="333333"/>
+                </a:solidFill>
+                <a:latin typeface="Consolas"/>
+              </a:defRPr>
+            </a:pPr>
+            <a:r>
+              <a:t>    parameter int DIVIDER = 8</a:t>
+            </a:r>
+          </a:p>
+          <a:p>
+            <a:pPr>
+              <a:lnSpc>
+                <a:spcPts val="2200"/>
+              </a:lnSpc>
+              <a:spcAft>
+                <a:spcPts val="400"/>
+              </a:spcAft>
+              <a:defRPr sz="2000" b="0">
+                <a:solidFill>
+                  <a:srgbClr val="333333"/>
+                </a:solidFill>
+                <a:latin typeface="Consolas"/>
+              </a:defRPr>
+            </a:pPr>
+            <a:r>
+              <a:t>) (</a:t>
+            </a:r>
+          </a:p>
+          <a:p>
+            <a:pPr>
+              <a:lnSpc>
+                <a:spcPts val="2200"/>
+              </a:lnSpc>
+              <a:spcAft>
+                <a:spcPts val="400"/>
+              </a:spcAft>
+              <a:defRPr sz="2000" b="0">
+                <a:solidFill>
+                  <a:srgbClr val="333333"/>
+                </a:solidFill>
+                <a:latin typeface="Consolas"/>
+              </a:defRPr>
+            </a:pPr>
+            <a:r>
+              <a:t>    input  wire clk,</a:t>
+            </a:r>
+          </a:p>
+          <a:p>
+            <a:pPr>
+              <a:lnSpc>
+                <a:spcPts val="2200"/>
+              </a:lnSpc>
+              <a:spcAft>
+                <a:spcPts val="400"/>
+              </a:spcAft>
+              <a:defRPr sz="2000" b="0">
+                <a:solidFill>
+                  <a:srgbClr val="333333"/>
+                </a:solidFill>
+                <a:latin typeface="Consolas"/>
+              </a:defRPr>
+            </a:pPr>
+            <a:r>
+              <a:t>    input  wire rst_n,       // Active-low async reset</a:t>
+            </a:r>
+          </a:p>
+          <a:p>
+            <a:pPr>
+              <a:lnSpc>
+                <a:spcPts val="2200"/>
+              </a:lnSpc>
+              <a:spcAft>
+                <a:spcPts val="400"/>
+              </a:spcAft>
+              <a:defRPr sz="2000" b="0">
+                <a:solidFill>
+                  <a:srgbClr val="333333"/>
+                </a:solidFill>
+                <a:latin typeface="Consolas"/>
+              </a:defRPr>
+            </a:pPr>
+            <a:r>
+              <a:t>    output reg  clk_div_tick // One-cycle pulse at divided rate</a:t>
+            </a:r>
+          </a:p>
+          <a:p>
+            <a:pPr>
+              <a:lnSpc>
+                <a:spcPts val="2200"/>
+              </a:lnSpc>
+              <a:spcAft>
+                <a:spcPts val="400"/>
+              </a:spcAft>
+              <a:defRPr sz="2000" b="0">
+                <a:solidFill>
+                  <a:srgbClr val="333333"/>
+                </a:solidFill>
+                <a:latin typeface="Consolas"/>
+              </a:defRPr>
+            </a:pPr>
+            <a:r>
+              <a:t>);</a:t>
+            </a:r>
+          </a:p>
+          <a:p>
+            <a:pPr>
+              <a:lnSpc>
+                <a:spcPts val="2200"/>
+              </a:lnSpc>
+              <a:spcAft>
+                <a:spcPts val="400"/>
+              </a:spcAft>
+              <a:defRPr sz="2000" b="0">
+                <a:solidFill>
+                  <a:srgbClr val="333333"/>
+                </a:solidFill>
+                <a:latin typeface="Consolas"/>
+              </a:defRPr>
+            </a:pPr>
+            <a:r>
+              <a:t>    int count;</a:t>
+            </a:r>
+          </a:p>
+          <a:p>
+            <a:pPr>
+              <a:lnSpc>
+                <a:spcPts val="2200"/>
+              </a:lnSpc>
+              <a:spcAft>
+                <a:spcPts val="400"/>
+              </a:spcAft>
+              <a:defRPr sz="2000" b="0">
+                <a:solidFill>
+                  <a:srgbClr val="333333"/>
+                </a:solidFill>
+                <a:latin typeface="Consolas"/>
+              </a:defRPr>
+            </a:pPr>
+          </a:p>
+          <a:p>
+            <a:pPr>
+              <a:lnSpc>
+                <a:spcPts val="2200"/>
+              </a:lnSpc>
+              <a:spcAft>
+                <a:spcPts val="400"/>
+              </a:spcAft>
+              <a:defRPr sz="2000" b="0">
+                <a:solidFill>
+                  <a:srgbClr val="333333"/>
+                </a:solidFill>
+                <a:latin typeface="Consolas"/>
+              </a:defRPr>
+            </a:pPr>
+            <a:r>
+              <a:t>    always @(posedge clk or negedge rst_n) begin</a:t>
+            </a:r>
+          </a:p>
+          <a:p>
+            <a:pPr>
+              <a:lnSpc>
+                <a:spcPts val="2200"/>
+              </a:lnSpc>
+              <a:spcAft>
+                <a:spcPts val="400"/>
+              </a:spcAft>
+              <a:defRPr sz="2000" b="0">
+                <a:solidFill>
+                  <a:srgbClr val="333333"/>
+                </a:solidFill>
+                <a:latin typeface="Consolas"/>
+              </a:defRPr>
+            </a:pPr>
+            <a:r>
+              <a:t>        if (!rst_n) begin</a:t>
+            </a:r>
+          </a:p>
+          <a:p>
+            <a:pPr>
+              <a:lnSpc>
+                <a:spcPts val="2200"/>
+              </a:lnSpc>
+              <a:spcAft>
+                <a:spcPts val="400"/>
+              </a:spcAft>
+              <a:defRPr sz="2000" b="0">
+                <a:solidFill>
+                  <a:srgbClr val="333333"/>
+                </a:solidFill>
+                <a:latin typeface="Consolas"/>
+              </a:defRPr>
+            </a:pPr>
+            <a:r>
+              <a:t># ...</a:t>
+            </a:r>
+          </a:p>
+        </p:txBody>
+      </p:sp>
+      <p:sp>
+        <p:nvSpPr>
+          <p:cNvPr id="4" name="TextBox 3"/>
           <p:cNvSpPr txBox="1"/>
           <p:nvPr/>
         </p:nvSpPr>
@@ -5446,8 +6731,8 @@
         </p:nvSpPr>
         <p:spPr>
           <a:xfrm>
-            <a:off x="548640" y="411480"/>
-            <a:ext cx="11064240" cy="777240"/>
+            <a:off x="548640" y="2743200"/>
+            <a:ext cx="11064240" cy="1371600"/>
           </a:xfrm>
           <a:prstGeom prst="rect">
             <a:avLst/>
@@ -5460,11 +6745,11 @@
           </a:bodyPr>
           <a:lstStyle/>
           <a:p>
-            <a:pPr>
-              <a:lnSpc>
-                <a:spcPts val="2200"/>
-              </a:lnSpc>
-              <a:defRPr sz="2800" b="1">
+            <a:pPr algn="ctr">
+              <a:lnSpc>
+                <a:spcPts val="2200"/>
+              </a:lnSpc>
+              <a:defRPr sz="3600" b="1">
                 <a:solidFill>
                   <a:srgbClr val="1A1A2E"/>
                 </a:solidFill>
@@ -5472,7 +6757,7 @@
               </a:defRPr>
             </a:pPr>
             <a:r>
-              <a:t>1. Baseline goals</a:t>
+              <a:t>Execution &amp; simulation flow</a:t>
             </a:r>
           </a:p>
         </p:txBody>
@@ -5480,67 +6765,6 @@
       <p:sp>
         <p:nvSpPr>
           <p:cNvPr id="3" name="TextBox 2"/>
-          <p:cNvSpPr txBox="1"/>
-          <p:nvPr/>
-        </p:nvSpPr>
-        <p:spPr>
-          <a:xfrm>
-            <a:off x="548640" y="1234440"/>
-            <a:ext cx="11064240" cy="4937760"/>
-          </a:xfrm>
-          <a:prstGeom prst="rect">
-            <a:avLst/>
-          </a:prstGeom>
-          <a:noFill/>
-        </p:spPr>
-        <p:txBody>
-          <a:bodyPr wrap="square">
-            <a:noAutofit/>
-          </a:bodyPr>
-          <a:lstStyle/>
-          <a:p>
-            <a:pPr>
-              <a:lnSpc>
-                <a:spcPts val="2200"/>
-              </a:lnSpc>
-              <a:spcAft>
-                <a:spcPts val="1000"/>
-              </a:spcAft>
-              <a:defRPr sz="2000" b="0">
-                <a:solidFill>
-                  <a:srgbClr val="333333"/>
-                </a:solidFill>
-                <a:latin typeface="Calibri"/>
-              </a:defRPr>
-            </a:pPr>
-            <a:r>
-              <a:t>• Confirm Mode 0 serialization before SPI UVM (Module</a:t>
-            </a:r>
-          </a:p>
-          <a:p>
-            <a:pPr>
-              <a:lnSpc>
-                <a:spcPts val="2200"/>
-              </a:lnSpc>
-              <a:spcAft>
-                <a:spcPts val="1000"/>
-              </a:spcAft>
-              <a:defRPr sz="2000" b="0">
-                <a:solidFill>
-                  <a:srgbClr val="333333"/>
-                </a:solidFill>
-                <a:latin typeface="Calibri"/>
-              </a:defRPr>
-            </a:pPr>
-            <a:r>
-              <a:t>      6).</a:t>
-            </a:r>
-          </a:p>
-        </p:txBody>
-      </p:sp>
-      <p:sp>
-        <p:nvSpPr>
-          <p:cNvPr id="4" name="TextBox 3"/>
           <p:cNvSpPr txBox="1"/>
           <p:nvPr/>
         </p:nvSpPr>
@@ -5629,7 +6853,7 @@
               </a:defRPr>
             </a:pPr>
             <a:r>
-              <a:t>2. Directed test flow</a:t>
+              <a:t>How the example runs (toolchain)</a:t>
             </a:r>
           </a:p>
         </p:txBody>
@@ -5671,7 +6895,7 @@
               </a:defRPr>
             </a:pPr>
             <a:r>
-              <a:t>• Pulse `start` + `data_in` (0x55, 0xAA);</a:t>
+              <a:t>• Makefile: Verilator compiles RTL + SystemVerilog</a:t>
             </a:r>
           </a:p>
           <a:p>
@@ -5690,7 +6914,159 @@
               </a:defRPr>
             </a:pPr>
             <a:r>
-              <a:t>      `wait(done)`; read `[PASS]` messages.</a:t>
+              <a:t>      testbench into a C++ model</a:t>
+            </a:r>
+          </a:p>
+          <a:p>
+            <a:pPr>
+              <a:lnSpc>
+                <a:spcPts val="2200"/>
+              </a:lnSpc>
+              <a:spcAft>
+                <a:spcPts val="1000"/>
+              </a:spcAft>
+              <a:defRPr sz="2000" b="0">
+                <a:solidFill>
+                  <a:srgbClr val="333333"/>
+                </a:solidFill>
+                <a:latin typeface="Calibri"/>
+              </a:defRPr>
+            </a:pPr>
+            <a:r>
+              <a:t>• sim_main.cpp: generates clk/rst_n, calls eval()</a:t>
+            </a:r>
+          </a:p>
+          <a:p>
+            <a:pPr>
+              <a:lnSpc>
+                <a:spcPts val="2200"/>
+              </a:lnSpc>
+              <a:spcAft>
+                <a:spcPts val="1000"/>
+              </a:spcAft>
+              <a:defRPr sz="2000" b="0">
+                <a:solidFill>
+                  <a:srgbClr val="333333"/>
+                </a:solidFill>
+                <a:latin typeface="Calibri"/>
+              </a:defRPr>
+            </a:pPr>
+            <a:r>
+              <a:t>      until $finish</a:t>
+            </a:r>
+          </a:p>
+          <a:p>
+            <a:pPr>
+              <a:lnSpc>
+                <a:spcPts val="2200"/>
+              </a:lnSpc>
+              <a:spcAft>
+                <a:spcPts val="1000"/>
+              </a:spcAft>
+              <a:defRPr sz="2000" b="0">
+                <a:solidFill>
+                  <a:srgbClr val="333333"/>
+                </a:solidFill>
+                <a:latin typeface="Calibri"/>
+              </a:defRPr>
+            </a:pPr>
+            <a:r>
+              <a:t>• Directed test (initial block or C++): drive</a:t>
+            </a:r>
+          </a:p>
+          <a:p>
+            <a:pPr>
+              <a:lnSpc>
+                <a:spcPts val="2200"/>
+              </a:lnSpc>
+              <a:spcAft>
+                <a:spcPts val="1000"/>
+              </a:spcAft>
+              <a:defRPr sz="2000" b="0">
+                <a:solidFill>
+                  <a:srgbClr val="333333"/>
+                </a:solidFill>
+                <a:latin typeface="Calibri"/>
+              </a:defRPr>
+            </a:pPr>
+            <a:r>
+              <a:t>      stimulus, wait for DUT flags</a:t>
+            </a:r>
+          </a:p>
+          <a:p>
+            <a:pPr>
+              <a:lnSpc>
+                <a:spcPts val="2200"/>
+              </a:lnSpc>
+              <a:spcAft>
+                <a:spcPts val="1000"/>
+              </a:spcAft>
+              <a:defRPr sz="2000" b="0">
+                <a:solidFill>
+                  <a:srgbClr val="333333"/>
+                </a:solidFill>
+                <a:latin typeface="Calibri"/>
+              </a:defRPr>
+            </a:pPr>
+            <a:r>
+              <a:t>• Self-check: compare outputs; print PASS/FAIL (see</a:t>
+            </a:r>
+          </a:p>
+          <a:p>
+            <a:pPr>
+              <a:lnSpc>
+                <a:spcPts val="2200"/>
+              </a:lnSpc>
+              <a:spcAft>
+                <a:spcPts val="1000"/>
+              </a:spcAft>
+              <a:defRPr sz="2000" b="0">
+                <a:solidFill>
+                  <a:srgbClr val="333333"/>
+                </a:solidFill>
+                <a:latin typeface="Calibri"/>
+              </a:defRPr>
+            </a:pPr>
+            <a:r>
+              <a:t>      terminal demo slide)</a:t>
+            </a:r>
+          </a:p>
+          <a:p>
+            <a:pPr>
+              <a:lnSpc>
+                <a:spcPts val="2200"/>
+              </a:lnSpc>
+              <a:spcAft>
+                <a:spcPts val="1000"/>
+              </a:spcAft>
+              <a:defRPr sz="2000" b="0">
+                <a:solidFill>
+                  <a:srgbClr val="333333"/>
+                </a:solidFill>
+                <a:latin typeface="Calibri"/>
+              </a:defRPr>
+            </a:pPr>
+            <a:r>
+              <a:t>• Repo path: module5/examples/&lt;example&gt;/ — run make</a:t>
+            </a:r>
+          </a:p>
+          <a:p>
+            <a:pPr>
+              <a:lnSpc>
+                <a:spcPts val="2200"/>
+              </a:lnSpc>
+              <a:spcAft>
+                <a:spcPts val="1000"/>
+              </a:spcAft>
+              <a:defRPr sz="2000" b="0">
+                <a:solidFill>
+                  <a:srgbClr val="333333"/>
+                </a:solidFill>
+                <a:latin typeface="Calibri"/>
+              </a:defRPr>
+            </a:pPr>
+            <a:r>
+              <a:t>      run from that directory</a:t>
             </a:r>
           </a:p>
         </p:txBody>
@@ -5786,7 +7162,7 @@
               </a:defRPr>
             </a:pPr>
             <a:r>
-              <a:t>3. Waveform learning (optional)</a:t>
+              <a:t>Example directory layout</a:t>
             </a:r>
           </a:p>
         </p:txBody>
@@ -5828,7 +7204,7 @@
               </a:defRPr>
             </a:pPr>
             <a:r>
-              <a:t>• Count 8 SCLK cycles per frame; verify MSB-first bit</a:t>
+              <a:t>• dut/: spi_master.v, clk_div.v</a:t>
             </a:r>
           </a:p>
           <a:p>
@@ -5847,7 +7223,7 @@
               </a:defRPr>
             </a:pPr>
             <a:r>
-              <a:t>      order on MOSI.</a:t>
+              <a:t>• top_spi_baseline.sv: clk_div, spi_master; directed</a:t>
             </a:r>
           </a:p>
           <a:p>
@@ -5866,7 +7242,7 @@
               </a:defRPr>
             </a:pPr>
             <a:r>
-              <a:t>• Defer MISO, multi-slave CS, and random data to</a:t>
+              <a:t>      test in initial block</a:t>
             </a:r>
           </a:p>
           <a:p>
@@ -5885,7 +7261,7 @@
               </a:defRPr>
             </a:pPr>
             <a:r>
-              <a:t>      Module 6.</a:t>
+              <a:t>• sim_main.cpp: Clock, reset; run until $finish</a:t>
             </a:r>
           </a:p>
         </p:txBody>
@@ -5955,8 +7331,8 @@
         </p:nvSpPr>
         <p:spPr>
           <a:xfrm>
-            <a:off x="548640" y="2743200"/>
-            <a:ext cx="11064240" cy="1371600"/>
+            <a:off x="548640" y="411480"/>
+            <a:ext cx="11064240" cy="777240"/>
           </a:xfrm>
           <a:prstGeom prst="rect">
             <a:avLst/>
@@ -5969,11 +7345,11 @@
           </a:bodyPr>
           <a:lstStyle/>
           <a:p>
-            <a:pPr algn="ctr">
-              <a:lnSpc>
-                <a:spcPts val="2200"/>
-              </a:lnSpc>
-              <a:defRPr sz="3600" b="1">
+            <a:pPr>
+              <a:lnSpc>
+                <a:spcPts val="2200"/>
+              </a:lnSpc>
+              <a:defRPr sz="2800" b="1">
                 <a:solidFill>
                   <a:srgbClr val="1A1A2E"/>
                 </a:solidFill>
@@ -5981,7 +7357,7 @@
               </a:defRPr>
             </a:pPr>
             <a:r>
-              <a:t>Syllabus topics</a:t>
+              <a:t>Makefile — spi_baseline run</a:t>
             </a:r>
           </a:p>
         </p:txBody>
@@ -5989,6 +7365,361 @@
       <p:sp>
         <p:nvSpPr>
           <p:cNvPr id="3" name="TextBox 2"/>
+          <p:cNvSpPr txBox="1"/>
+          <p:nvPr/>
+        </p:nvSpPr>
+        <p:spPr>
+          <a:xfrm>
+            <a:off x="548640" y="1143000"/>
+            <a:ext cx="11064240" cy="5029200"/>
+          </a:xfrm>
+          <a:prstGeom prst="rect">
+            <a:avLst/>
+          </a:prstGeom>
+          <a:solidFill>
+            <a:srgbClr val="F4F4F4"/>
+          </a:solidFill>
+        </p:spPr>
+        <p:txBody>
+          <a:bodyPr wrap="square">
+            <a:noAutofit/>
+          </a:bodyPr>
+          <a:lstStyle/>
+          <a:p>
+            <a:pPr>
+              <a:lnSpc>
+                <a:spcPts val="2200"/>
+              </a:lnSpc>
+              <a:spcAft>
+                <a:spcPts val="400"/>
+              </a:spcAft>
+              <a:defRPr sz="2000" b="0">
+                <a:solidFill>
+                  <a:srgbClr val="333333"/>
+                </a:solidFill>
+                <a:latin typeface="Consolas"/>
+              </a:defRPr>
+            </a:pPr>
+            <a:r>
+              <a:t># Makefile for Module 5 SPI baseline (basic testbench, no UVM)</a:t>
+            </a:r>
+          </a:p>
+          <a:p>
+            <a:pPr>
+              <a:lnSpc>
+                <a:spcPts val="2200"/>
+              </a:lnSpc>
+              <a:spcAft>
+                <a:spcPts val="400"/>
+              </a:spcAft>
+              <a:defRPr sz="2000" b="0">
+                <a:solidFill>
+                  <a:srgbClr val="333333"/>
+                </a:solidFill>
+                <a:latin typeface="Consolas"/>
+              </a:defRPr>
+            </a:pPr>
+            <a:r>
+              <a:t>#</a:t>
+            </a:r>
+          </a:p>
+          <a:p>
+            <a:pPr>
+              <a:lnSpc>
+                <a:spcPts val="2200"/>
+              </a:lnSpc>
+              <a:spcAft>
+                <a:spcPts val="400"/>
+              </a:spcAft>
+              <a:defRPr sz="2000" b="0">
+                <a:solidFill>
+                  <a:srgbClr val="333333"/>
+                </a:solidFill>
+                <a:latin typeface="Consolas"/>
+              </a:defRPr>
+            </a:pPr>
+            <a:r>
+              <a:t># Usage:</a:t>
+            </a:r>
+          </a:p>
+          <a:p>
+            <a:pPr>
+              <a:lnSpc>
+                <a:spcPts val="2200"/>
+              </a:lnSpc>
+              <a:spcAft>
+                <a:spcPts val="400"/>
+              </a:spcAft>
+              <a:defRPr sz="2000" b="0">
+                <a:solidFill>
+                  <a:srgbClr val="333333"/>
+                </a:solidFill>
+                <a:latin typeface="Consolas"/>
+              </a:defRPr>
+            </a:pPr>
+            <a:r>
+              <a:t>#   make run</a:t>
+            </a:r>
+          </a:p>
+          <a:p>
+            <a:pPr>
+              <a:lnSpc>
+                <a:spcPts val="2200"/>
+              </a:lnSpc>
+              <a:spcAft>
+                <a:spcPts val="400"/>
+              </a:spcAft>
+              <a:defRPr sz="2000" b="0">
+                <a:solidFill>
+                  <a:srgbClr val="333333"/>
+                </a:solidFill>
+                <a:latin typeface="Consolas"/>
+              </a:defRPr>
+            </a:pPr>
+            <a:r>
+              <a:t>#</a:t>
+            </a:r>
+          </a:p>
+          <a:p>
+            <a:pPr>
+              <a:lnSpc>
+                <a:spcPts val="2200"/>
+              </a:lnSpc>
+              <a:spcAft>
+                <a:spcPts val="400"/>
+              </a:spcAft>
+              <a:defRPr sz="2000" b="0">
+                <a:solidFill>
+                  <a:srgbClr val="333333"/>
+                </a:solidFill>
+                <a:latin typeface="Consolas"/>
+              </a:defRPr>
+            </a:pPr>
+          </a:p>
+          <a:p>
+            <a:pPr>
+              <a:lnSpc>
+                <a:spcPts val="2200"/>
+              </a:lnSpc>
+              <a:spcAft>
+                <a:spcPts val="400"/>
+              </a:spcAft>
+              <a:defRPr sz="2000" b="0">
+                <a:solidFill>
+                  <a:srgbClr val="333333"/>
+                </a:solidFill>
+                <a:latin typeface="Consolas"/>
+              </a:defRPr>
+            </a:pPr>
+            <a:r>
+              <a:t>VERILATOR ?= verilator</a:t>
+            </a:r>
+          </a:p>
+          <a:p>
+            <a:pPr>
+              <a:lnSpc>
+                <a:spcPts val="2200"/>
+              </a:lnSpc>
+              <a:spcAft>
+                <a:spcPts val="400"/>
+              </a:spcAft>
+              <a:defRPr sz="2000" b="0">
+                <a:solidFill>
+                  <a:srgbClr val="333333"/>
+                </a:solidFill>
+                <a:latin typeface="Consolas"/>
+              </a:defRPr>
+            </a:pPr>
+            <a:r>
+              <a:t>TOPLEVEL ?= top_spi_baseline</a:t>
+            </a:r>
+          </a:p>
+          <a:p>
+            <a:pPr>
+              <a:lnSpc>
+                <a:spcPts val="2200"/>
+              </a:lnSpc>
+              <a:spcAft>
+                <a:spcPts val="400"/>
+              </a:spcAft>
+              <a:defRPr sz="2000" b="0">
+                <a:solidFill>
+                  <a:srgbClr val="333333"/>
+                </a:solidFill>
+                <a:latin typeface="Consolas"/>
+              </a:defRPr>
+            </a:pPr>
+            <a:r>
+              <a:t>DUT_SRC = dut/*.v</a:t>
+            </a:r>
+          </a:p>
+          <a:p>
+            <a:pPr>
+              <a:lnSpc>
+                <a:spcPts val="2200"/>
+              </a:lnSpc>
+              <a:spcAft>
+                <a:spcPts val="400"/>
+              </a:spcAft>
+              <a:defRPr sz="2000" b="0">
+                <a:solidFill>
+                  <a:srgbClr val="333333"/>
+                </a:solidFill>
+                <a:latin typeface="Consolas"/>
+              </a:defRPr>
+            </a:pPr>
+            <a:r>
+              <a:t>RTL_SRC = top_spi_baseline.sv $(DUT_SRC)</a:t>
+            </a:r>
+          </a:p>
+          <a:p>
+            <a:pPr>
+              <a:lnSpc>
+                <a:spcPts val="2200"/>
+              </a:lnSpc>
+              <a:spcAft>
+                <a:spcPts val="400"/>
+              </a:spcAft>
+              <a:defRPr sz="2000" b="0">
+                <a:solidFill>
+                  <a:srgbClr val="333333"/>
+                </a:solidFill>
+                <a:latin typeface="Consolas"/>
+              </a:defRPr>
+            </a:pPr>
+            <a:r>
+              <a:t>HARNESS = sim_main.cpp</a:t>
+            </a:r>
+          </a:p>
+          <a:p>
+            <a:pPr>
+              <a:lnSpc>
+                <a:spcPts val="2200"/>
+              </a:lnSpc>
+              <a:spcAft>
+                <a:spcPts val="400"/>
+              </a:spcAft>
+              <a:defRPr sz="2000" b="0">
+                <a:solidFill>
+                  <a:srgbClr val="333333"/>
+                </a:solidFill>
+                <a:latin typeface="Consolas"/>
+              </a:defRPr>
+            </a:pPr>
+          </a:p>
+          <a:p>
+            <a:pPr>
+              <a:lnSpc>
+                <a:spcPts val="2200"/>
+              </a:lnSpc>
+              <a:spcAft>
+                <a:spcPts val="400"/>
+              </a:spcAft>
+              <a:defRPr sz="2000" b="0">
+                <a:solidFill>
+                  <a:srgbClr val="333333"/>
+                </a:solidFill>
+                <a:latin typeface="Consolas"/>
+              </a:defRPr>
+            </a:pPr>
+            <a:r>
+              <a:t>VERILATOR_FLAGS = -sv --timing -Wall -Wno-fatal -Wno-TIMESCALEMOD -Wno-</a:t>
+            </a:r>
+          </a:p>
+          <a:p>
+            <a:pPr>
+              <a:lnSpc>
+                <a:spcPts val="2200"/>
+              </a:lnSpc>
+              <a:spcAft>
+                <a:spcPts val="400"/>
+              </a:spcAft>
+              <a:defRPr sz="2000" b="0">
+                <a:solidFill>
+                  <a:srgbClr val="333333"/>
+                </a:solidFill>
+                <a:latin typeface="Consolas"/>
+              </a:defRPr>
+            </a:pPr>
+            <a:r>
+              <a:t>WIDTHTRUNC</a:t>
+            </a:r>
+          </a:p>
+          <a:p>
+            <a:pPr>
+              <a:lnSpc>
+                <a:spcPts val="2200"/>
+              </a:lnSpc>
+              <a:spcAft>
+                <a:spcPts val="400"/>
+              </a:spcAft>
+              <a:defRPr sz="2000" b="0">
+                <a:solidFill>
+                  <a:srgbClr val="333333"/>
+                </a:solidFill>
+                <a:latin typeface="Consolas"/>
+              </a:defRPr>
+            </a:pPr>
+          </a:p>
+          <a:p>
+            <a:pPr>
+              <a:lnSpc>
+                <a:spcPts val="2200"/>
+              </a:lnSpc>
+              <a:spcAft>
+                <a:spcPts val="400"/>
+              </a:spcAft>
+              <a:defRPr sz="2000" b="0">
+                <a:solidFill>
+                  <a:srgbClr val="333333"/>
+                </a:solidFill>
+                <a:latin typeface="Consolas"/>
+              </a:defRPr>
+            </a:pPr>
+            <a:r>
+              <a:t>.PHONY: run compile clean</a:t>
+            </a:r>
+          </a:p>
+          <a:p>
+            <a:pPr>
+              <a:lnSpc>
+                <a:spcPts val="2200"/>
+              </a:lnSpc>
+              <a:spcAft>
+                <a:spcPts val="400"/>
+              </a:spcAft>
+              <a:defRPr sz="2000" b="0">
+                <a:solidFill>
+                  <a:srgbClr val="333333"/>
+                </a:solidFill>
+                <a:latin typeface="Consolas"/>
+              </a:defRPr>
+            </a:pPr>
+          </a:p>
+          <a:p>
+            <a:pPr>
+              <a:lnSpc>
+                <a:spcPts val="2200"/>
+              </a:lnSpc>
+              <a:spcAft>
+                <a:spcPts val="400"/>
+              </a:spcAft>
+              <a:defRPr sz="2000" b="0">
+                <a:solidFill>
+                  <a:srgbClr val="333333"/>
+                </a:solidFill>
+                <a:latin typeface="Consolas"/>
+              </a:defRPr>
+            </a:pPr>
+            <a:r>
+              <a:t># ...</a:t>
+            </a:r>
+          </a:p>
+        </p:txBody>
+      </p:sp>
+      <p:sp>
+        <p:nvSpPr>
+          <p:cNvPr id="4" name="TextBox 3"/>
           <p:cNvSpPr txBox="1"/>
           <p:nvPr/>
         </p:nvSpPr>
@@ -6341,8 +8072,8 @@
         </p:nvSpPr>
         <p:spPr>
           <a:xfrm>
-            <a:off x="548640" y="411480"/>
-            <a:ext cx="11064240" cy="777240"/>
+            <a:off x="548640" y="2743200"/>
+            <a:ext cx="11064240" cy="1371600"/>
           </a:xfrm>
           <a:prstGeom prst="rect">
             <a:avLst/>
@@ -6355,11 +8086,11 @@
           </a:bodyPr>
           <a:lstStyle/>
           <a:p>
-            <a:pPr>
-              <a:lnSpc>
-                <a:spcPts val="2200"/>
-              </a:lnSpc>
-              <a:defRPr sz="2800" b="1">
+            <a:pPr algn="ctr">
+              <a:lnSpc>
+                <a:spcPts val="2200"/>
+              </a:lnSpc>
+              <a:defRPr sz="3600" b="1">
                 <a:solidFill>
                   <a:srgbClr val="1A1A2E"/>
                 </a:solidFill>
@@ -6367,7 +8098,7 @@
               </a:defRPr>
             </a:pPr>
             <a:r>
-              <a:t>1. SPI Protocol (Mode 0)</a:t>
+              <a:t>Key files to study</a:t>
             </a:r>
           </a:p>
         </p:txBody>
@@ -6375,181 +8106,6 @@
       <p:sp>
         <p:nvSpPr>
           <p:cNvPr id="3" name="TextBox 2"/>
-          <p:cNvSpPr txBox="1"/>
-          <p:nvPr/>
-        </p:nvSpPr>
-        <p:spPr>
-          <a:xfrm>
-            <a:off x="548640" y="1234440"/>
-            <a:ext cx="11064240" cy="4937760"/>
-          </a:xfrm>
-          <a:prstGeom prst="rect">
-            <a:avLst/>
-          </a:prstGeom>
-          <a:noFill/>
-        </p:spPr>
-        <p:txBody>
-          <a:bodyPr wrap="square">
-            <a:noAutofit/>
-          </a:bodyPr>
-          <a:lstStyle/>
-          <a:p>
-            <a:pPr>
-              <a:lnSpc>
-                <a:spcPts val="2200"/>
-              </a:lnSpc>
-              <a:spcAft>
-                <a:spcPts val="1000"/>
-              </a:spcAft>
-              <a:defRPr sz="2000" b="0">
-                <a:solidFill>
-                  <a:srgbClr val="333333"/>
-                </a:solidFill>
-                <a:latin typeface="Calibri"/>
-              </a:defRPr>
-            </a:pPr>
-            <a:r>
-              <a:t>• Signals: sclk (serial clock), mosi (master out,</a:t>
-            </a:r>
-          </a:p>
-          <a:p>
-            <a:pPr>
-              <a:lnSpc>
-                <a:spcPts val="2200"/>
-              </a:lnSpc>
-              <a:spcAft>
-                <a:spcPts val="1000"/>
-              </a:spcAft>
-              <a:defRPr sz="2000" b="0">
-                <a:solidFill>
-                  <a:srgbClr val="333333"/>
-                </a:solidFill>
-                <a:latin typeface="Calibri"/>
-              </a:defRPr>
-            </a:pPr>
-            <a:r>
-              <a:t>      slave in), cs_n (active-low chip select). Optional:…</a:t>
-            </a:r>
-          </a:p>
-          <a:p>
-            <a:pPr>
-              <a:lnSpc>
-                <a:spcPts val="2200"/>
-              </a:lnSpc>
-              <a:spcAft>
-                <a:spcPts val="1000"/>
-              </a:spcAft>
-              <a:defRPr sz="2000" b="0">
-                <a:solidFill>
-                  <a:srgbClr val="333333"/>
-                </a:solidFill>
-                <a:latin typeface="Calibri"/>
-              </a:defRPr>
-            </a:pPr>
-            <a:r>
-              <a:t>• Mode 0 (CPOL=0, CPHA=0): SCLK idles low; data</a:t>
-            </a:r>
-          </a:p>
-          <a:p>
-            <a:pPr>
-              <a:lnSpc>
-                <a:spcPts val="2200"/>
-              </a:lnSpc>
-              <a:spcAft>
-                <a:spcPts val="1000"/>
-              </a:spcAft>
-              <a:defRPr sz="2000" b="0">
-                <a:solidFill>
-                  <a:srgbClr val="333333"/>
-                </a:solidFill>
-                <a:latin typeface="Calibri"/>
-              </a:defRPr>
-            </a:pPr>
-            <a:r>
-              <a:t>      captured on rising edge; data changed on falling</a:t>
-            </a:r>
-          </a:p>
-          <a:p>
-            <a:pPr>
-              <a:lnSpc>
-                <a:spcPts val="2200"/>
-              </a:lnSpc>
-              <a:spcAft>
-                <a:spcPts val="1000"/>
-              </a:spcAft>
-              <a:defRPr sz="2000" b="0">
-                <a:solidFill>
-                  <a:srgbClr val="333333"/>
-                </a:solidFill>
-                <a:latin typeface="Calibri"/>
-              </a:defRPr>
-            </a:pPr>
-            <a:r>
-              <a:t>      edge.</a:t>
-            </a:r>
-          </a:p>
-          <a:p>
-            <a:pPr>
-              <a:lnSpc>
-                <a:spcPts val="2200"/>
-              </a:lnSpc>
-              <a:spcAft>
-                <a:spcPts val="1000"/>
-              </a:spcAft>
-              <a:defRPr sz="2000" b="0">
-                <a:solidFill>
-                  <a:srgbClr val="333333"/>
-                </a:solidFill>
-                <a:latin typeface="Calibri"/>
-              </a:defRPr>
-            </a:pPr>
-            <a:r>
-              <a:t>• Timing: One bit per clk_div_tick; clk_div_tick</a:t>
-            </a:r>
-          </a:p>
-          <a:p>
-            <a:pPr>
-              <a:lnSpc>
-                <a:spcPts val="2200"/>
-              </a:lnSpc>
-              <a:spcAft>
-                <a:spcPts val="1000"/>
-              </a:spcAft>
-              <a:defRPr sz="2000" b="0">
-                <a:solidFill>
-                  <a:srgbClr val="333333"/>
-                </a:solidFill>
-                <a:latin typeface="Calibri"/>
-              </a:defRPr>
-            </a:pPr>
-            <a:r>
-              <a:t>      derived from system clock via divider (e.g.</a:t>
-            </a:r>
-          </a:p>
-          <a:p>
-            <a:pPr>
-              <a:lnSpc>
-                <a:spcPts val="2200"/>
-              </a:lnSpc>
-              <a:spcAft>
-                <a:spcPts val="1000"/>
-              </a:spcAft>
-              <a:defRPr sz="2000" b="0">
-                <a:solidFill>
-                  <a:srgbClr val="333333"/>
-                </a:solidFill>
-                <a:latin typeface="Calibri"/>
-              </a:defRPr>
-            </a:pPr>
-            <a:r>
-              <a:t>      DIVIDER=…</a:t>
-            </a:r>
-          </a:p>
-        </p:txBody>
-      </p:sp>
-      <p:sp>
-        <p:nvSpPr>
-          <p:cNvPr id="4" name="TextBox 3"/>
           <p:cNvSpPr txBox="1"/>
           <p:nvPr/>
         </p:nvSpPr>
@@ -6638,7 +8194,7 @@
               </a:defRPr>
             </a:pPr>
             <a:r>
-              <a:t>2. Hands-on testbench (spi_baseline)</a:t>
+              <a:t>Open these in the repo</a:t>
             </a:r>
           </a:p>
         </p:txBody>
@@ -6680,7 +8236,7 @@
               </a:defRPr>
             </a:pPr>
             <a:r>
-              <a:t>• Directed test in `top_spi_baseline.sv`: `start`,</a:t>
+              <a:t>• `module5/examples/spi_baseline/dut/spi_master.v` —</a:t>
             </a:r>
           </a:p>
           <a:p>
@@ -6699,7 +8255,7 @@
               </a:defRPr>
             </a:pPr>
             <a:r>
-              <a:t>      `data_in`, `wait(done)`.</a:t>
+              <a:t>      Mode 0 master</a:t>
             </a:r>
           </a:p>
           <a:p>
@@ -6718,7 +8274,83 @@
               </a:defRPr>
             </a:pPr>
             <a:r>
-              <a:t>• Pass: `[PASS]` lines and `SPI baseline test PASS`.</a:t>
+              <a:t>• `module5/examples/spi_baseline/dut/clk_div.v` —</a:t>
+            </a:r>
+          </a:p>
+          <a:p>
+            <a:pPr>
+              <a:lnSpc>
+                <a:spcPts val="2200"/>
+              </a:lnSpc>
+              <a:spcAft>
+                <a:spcPts val="1000"/>
+              </a:spcAft>
+              <a:defRPr sz="2000" b="0">
+                <a:solidFill>
+                  <a:srgbClr val="333333"/>
+                </a:solidFill>
+                <a:latin typeface="Calibri"/>
+              </a:defRPr>
+            </a:pPr>
+            <a:r>
+              <a:t>      `clk_div_tick`</a:t>
+            </a:r>
+          </a:p>
+          <a:p>
+            <a:pPr>
+              <a:lnSpc>
+                <a:spcPts val="2200"/>
+              </a:lnSpc>
+              <a:spcAft>
+                <a:spcPts val="1000"/>
+              </a:spcAft>
+              <a:defRPr sz="2000" b="0">
+                <a:solidFill>
+                  <a:srgbClr val="333333"/>
+                </a:solidFill>
+                <a:latin typeface="Calibri"/>
+              </a:defRPr>
+            </a:pPr>
+            <a:r>
+              <a:t>• `module5/examples/spi_baseline/top_spi_baseline.sv`</a:t>
+            </a:r>
+          </a:p>
+          <a:p>
+            <a:pPr>
+              <a:lnSpc>
+                <a:spcPts val="2200"/>
+              </a:lnSpc>
+              <a:spcAft>
+                <a:spcPts val="1000"/>
+              </a:spcAft>
+              <a:defRPr sz="2000" b="0">
+                <a:solidFill>
+                  <a:srgbClr val="333333"/>
+                </a:solidFill>
+                <a:latin typeface="Calibri"/>
+              </a:defRPr>
+            </a:pPr>
+            <a:r>
+              <a:t>      — directed test</a:t>
+            </a:r>
+          </a:p>
+          <a:p>
+            <a:pPr>
+              <a:lnSpc>
+                <a:spcPts val="2200"/>
+              </a:lnSpc>
+              <a:spcAft>
+                <a:spcPts val="1000"/>
+              </a:spcAft>
+              <a:defRPr sz="2000" b="0">
+                <a:solidFill>
+                  <a:srgbClr val="333333"/>
+                </a:solidFill>
+                <a:latin typeface="Calibri"/>
+              </a:defRPr>
+            </a:pPr>
+            <a:r>
+              <a:t>• `docs/SPI_LEARNING_GUIDE.md` — protocol reference</a:t>
             </a:r>
           </a:p>
         </p:txBody>
@@ -6814,7 +8446,7 @@
               </a:defRPr>
             </a:pPr>
             <a:r>
-              <a:t>Hands-on examples</a:t>
+              <a:t>Verification &amp; testing methods</a:t>
             </a:r>
           </a:p>
         </p:txBody>
@@ -6910,7 +8542,7 @@
               </a:defRPr>
             </a:pPr>
             <a:r>
-              <a:t>Module 5 self-check</a:t>
+              <a:t>1. Baseline goals</a:t>
             </a:r>
           </a:p>
         </p:txBody>
@@ -6923,15 +8555,13 @@
         </p:nvSpPr>
         <p:spPr>
           <a:xfrm>
-            <a:off x="548640" y="1051560"/>
-            <a:ext cx="11064240" cy="914400"/>
+            <a:off x="548640" y="1234440"/>
+            <a:ext cx="5303520" cy="4754880"/>
           </a:xfrm>
           <a:prstGeom prst="rect">
             <a:avLst/>
           </a:prstGeom>
-          <a:solidFill>
-            <a:srgbClr val="F4F4F4"/>
-          </a:solidFill>
+          <a:noFill/>
         </p:spPr>
         <p:txBody>
           <a:bodyPr wrap="square">
@@ -6944,24 +8574,43 @@
                 <a:spcPts val="2200"/>
               </a:lnSpc>
               <a:spcAft>
-                <a:spcPts val="200"/>
-              </a:spcAft>
-              <a:defRPr sz="2000" b="0">
-                <a:solidFill>
-                  <a:srgbClr val="333333"/>
-                </a:solidFill>
-                <a:latin typeface="Consolas"/>
-              </a:defRPr>
-            </a:pPr>
-            <a:r>
-              <a:t>$ ./scripts/module5.sh --help</a:t>
+                <a:spcPts val="1000"/>
+              </a:spcAft>
+              <a:defRPr sz="2000" b="0">
+                <a:solidFill>
+                  <a:srgbClr val="333333"/>
+                </a:solidFill>
+                <a:latin typeface="Calibri"/>
+              </a:defRPr>
+            </a:pPr>
+            <a:r>
+              <a:t>• Confirm Mode 0 serialization</a:t>
+            </a:r>
+          </a:p>
+          <a:p>
+            <a:pPr>
+              <a:lnSpc>
+                <a:spcPts val="2200"/>
+              </a:lnSpc>
+              <a:spcAft>
+                <a:spcPts val="1000"/>
+              </a:spcAft>
+              <a:defRPr sz="2000" b="0">
+                <a:solidFill>
+                  <a:srgbClr val="333333"/>
+                </a:solidFill>
+                <a:latin typeface="Calibri"/>
+              </a:defRPr>
+            </a:pPr>
+            <a:r>
+              <a:t>      before SPI UVM (Module 6).</a:t>
             </a:r>
           </a:p>
         </p:txBody>
       </p:sp>
       <p:pic>
         <p:nvPicPr>
-          <p:cNvPr id="4" name="Picture 3" descr="module5_check.png"/>
+          <p:cNvPr id="4" name="Picture 3" descr="testing_methods.png"/>
           <p:cNvPicPr>
             <a:picLocks noChangeAspect="1"/>
           </p:cNvPicPr>
@@ -6975,8 +8624,8 @@
         </p:blipFill>
         <p:spPr>
           <a:xfrm>
-            <a:off x="548640" y="1965960"/>
-            <a:ext cx="7071358" cy="3977639"/>
+            <a:off x="6172200" y="2094547"/>
+            <a:ext cx="5394960" cy="3034665"/>
           </a:xfrm>
           <a:prstGeom prst="rect">
             <a:avLst/>
@@ -7074,7 +8723,7 @@
               </a:defRPr>
             </a:pPr>
             <a:r>
-              <a:t>Exercise scaffold</a:t>
+              <a:t>2. Directed test flow</a:t>
             </a:r>
           </a:p>
         </p:txBody>
@@ -7087,15 +8736,13 @@
         </p:nvSpPr>
         <p:spPr>
           <a:xfrm>
-            <a:off x="548640" y="1143000"/>
-            <a:ext cx="11064240" cy="5029200"/>
+            <a:off x="548640" y="1234440"/>
+            <a:ext cx="5303520" cy="4754880"/>
           </a:xfrm>
           <a:prstGeom prst="rect">
             <a:avLst/>
           </a:prstGeom>
-          <a:solidFill>
-            <a:srgbClr val="F4F4F4"/>
-          </a:solidFill>
+          <a:noFill/>
         </p:spPr>
         <p:txBody>
           <a:bodyPr wrap="square">
@@ -7108,24 +8755,86 @@
                 <a:spcPts val="2200"/>
               </a:lnSpc>
               <a:spcAft>
-                <a:spcPts val="400"/>
-              </a:spcAft>
-              <a:defRPr sz="2000" b="0">
-                <a:solidFill>
-                  <a:srgbClr val="333333"/>
-                </a:solidFill>
-                <a:latin typeface="Consolas"/>
-              </a:defRPr>
-            </a:pPr>
-            <a:r>
-              <a:t>./scripts/module5.sh --scaffold</a:t>
-            </a:r>
-          </a:p>
-        </p:txBody>
-      </p:sp>
-      <p:sp>
-        <p:nvSpPr>
-          <p:cNvPr id="4" name="TextBox 3"/>
+                <a:spcPts val="1000"/>
+              </a:spcAft>
+              <a:defRPr sz="2000" b="0">
+                <a:solidFill>
+                  <a:srgbClr val="333333"/>
+                </a:solidFill>
+                <a:latin typeface="Calibri"/>
+              </a:defRPr>
+            </a:pPr>
+            <a:r>
+              <a:t>• Pulse `start` + `data_in` (0x55,</a:t>
+            </a:r>
+          </a:p>
+          <a:p>
+            <a:pPr>
+              <a:lnSpc>
+                <a:spcPts val="2200"/>
+              </a:lnSpc>
+              <a:spcAft>
+                <a:spcPts val="1000"/>
+              </a:spcAft>
+              <a:defRPr sz="2000" b="0">
+                <a:solidFill>
+                  <a:srgbClr val="333333"/>
+                </a:solidFill>
+                <a:latin typeface="Calibri"/>
+              </a:defRPr>
+            </a:pPr>
+            <a:r>
+              <a:t>      0xAA); `wait(done)`; read</a:t>
+            </a:r>
+          </a:p>
+          <a:p>
+            <a:pPr>
+              <a:lnSpc>
+                <a:spcPts val="2200"/>
+              </a:lnSpc>
+              <a:spcAft>
+                <a:spcPts val="1000"/>
+              </a:spcAft>
+              <a:defRPr sz="2000" b="0">
+                <a:solidFill>
+                  <a:srgbClr val="333333"/>
+                </a:solidFill>
+                <a:latin typeface="Calibri"/>
+              </a:defRPr>
+            </a:pPr>
+            <a:r>
+              <a:t>      `[PASS]` messages.</a:t>
+            </a:r>
+          </a:p>
+        </p:txBody>
+      </p:sp>
+      <p:pic>
+        <p:nvPicPr>
+          <p:cNvPr id="4" name="Picture 3" descr="testing_methods.png"/>
+          <p:cNvPicPr>
+            <a:picLocks noChangeAspect="1"/>
+          </p:cNvPicPr>
+          <p:nvPr/>
+        </p:nvPicPr>
+        <p:blipFill>
+          <a:blip r:embed="rId2"/>
+          <a:stretch>
+            <a:fillRect/>
+          </a:stretch>
+        </p:blipFill>
+        <p:spPr>
+          <a:xfrm>
+            <a:off x="6172200" y="2094547"/>
+            <a:ext cx="5394960" cy="3034665"/>
+          </a:xfrm>
+          <a:prstGeom prst="rect">
+            <a:avLst/>
+          </a:prstGeom>
+        </p:spPr>
+      </p:pic>
+      <p:sp>
+        <p:nvSpPr>
+          <p:cNvPr id="5" name="TextBox 4"/>
           <p:cNvSpPr txBox="1"/>
           <p:nvPr/>
         </p:nvSpPr>
@@ -7214,7 +8923,7 @@
               </a:defRPr>
             </a:pPr>
             <a:r>
-              <a:t>Example 1: SPI baseline</a:t>
+              <a:t>3. Waveform learning (optional)</a:t>
             </a:r>
           </a:p>
         </p:txBody>
@@ -7228,7 +8937,7 @@
         <p:spPr>
           <a:xfrm>
             <a:off x="548640" y="1234440"/>
-            <a:ext cx="11064240" cy="4937760"/>
+            <a:ext cx="5303520" cy="4754880"/>
           </a:xfrm>
           <a:prstGeom prst="rect">
             <a:avLst/>
@@ -7256,7 +8965,7 @@
               </a:defRPr>
             </a:pPr>
             <a:r>
-              <a:t>• `dut/`: `spi_master.v`, `clk_div.v`</a:t>
+              <a:t>• Count 8 SCLK cycles per frame;</a:t>
             </a:r>
           </a:p>
           <a:p>
@@ -7275,7 +8984,7 @@
               </a:defRPr>
             </a:pPr>
             <a:r>
-              <a:t>• `top_spi_baseline.sv`: Top with clk_div, spi_master;</a:t>
+              <a:t>      verify MSB-first bit order on</a:t>
             </a:r>
           </a:p>
           <a:p>
@@ -7294,7 +9003,7 @@
               </a:defRPr>
             </a:pPr>
             <a:r>
-              <a:t>      directed stimulus and checks in initial blocks.</a:t>
+              <a:t>      MOSI.</a:t>
             </a:r>
           </a:p>
           <a:p>
@@ -7313,7 +9022,7 @@
               </a:defRPr>
             </a:pPr>
             <a:r>
-              <a:t>• `sim_main.cpp`: C++ harness (clock, reset);</a:t>
+              <a:t>• Defer MISO, multi-slave CS, and</a:t>
             </a:r>
           </a:p>
           <a:p>
@@ -7332,14 +9041,38 @@
               </a:defRPr>
             </a:pPr>
             <a:r>
-              <a:t>      simulation runs until `$finish`.</a:t>
-            </a:r>
-          </a:p>
-        </p:txBody>
-      </p:sp>
-      <p:sp>
-        <p:nvSpPr>
-          <p:cNvPr id="4" name="TextBox 3"/>
+              <a:t>      random data to Module 6.</a:t>
+            </a:r>
+          </a:p>
+        </p:txBody>
+      </p:sp>
+      <p:pic>
+        <p:nvPicPr>
+          <p:cNvPr id="4" name="Picture 3" descr="testing_methods.png"/>
+          <p:cNvPicPr>
+            <a:picLocks noChangeAspect="1"/>
+          </p:cNvPicPr>
+          <p:nvPr/>
+        </p:nvPicPr>
+        <p:blipFill>
+          <a:blip r:embed="rId2"/>
+          <a:stretch>
+            <a:fillRect/>
+          </a:stretch>
+        </p:blipFill>
+        <p:spPr>
+          <a:xfrm>
+            <a:off x="6172200" y="2094547"/>
+            <a:ext cx="5394960" cy="3034665"/>
+          </a:xfrm>
+          <a:prstGeom prst="rect">
+            <a:avLst/>
+          </a:prstGeom>
+        </p:spPr>
+      </p:pic>
+      <p:sp>
+        <p:nvSpPr>
+          <p:cNvPr id="5" name="TextBox 4"/>
           <p:cNvSpPr txBox="1"/>
           <p:nvPr/>
         </p:nvSpPr>
@@ -7428,7 +9161,7 @@
               </a:defRPr>
             </a:pPr>
             <a:r>
-              <a:t>Demo: SPI baseline</a:t>
+              <a:t>Directed SPI test</a:t>
             </a:r>
           </a:p>
         </p:txBody>
@@ -7441,8 +9174,8 @@
         </p:nvSpPr>
         <p:spPr>
           <a:xfrm>
-            <a:off x="548640" y="1051560"/>
-            <a:ext cx="11064240" cy="914400"/>
+            <a:off x="548640" y="1143000"/>
+            <a:ext cx="11064240" cy="5029200"/>
           </a:xfrm>
           <a:prstGeom prst="rect">
             <a:avLst/>
@@ -7462,7 +9195,7 @@
                 <a:spcPts val="2200"/>
               </a:lnSpc>
               <a:spcAft>
-                <a:spcPts val="200"/>
+                <a:spcPts val="400"/>
               </a:spcAft>
               <a:defRPr sz="2000" b="0">
                 <a:solidFill>
@@ -7472,38 +9205,309 @@
               </a:defRPr>
             </a:pPr>
             <a:r>
-              <a:t>$ ./scripts/module5.sh --run</a:t>
-            </a:r>
-          </a:p>
-        </p:txBody>
-      </p:sp>
-      <p:pic>
-        <p:nvPicPr>
-          <p:cNvPr id="4" name="Picture 3" descr="spi_baseline.png"/>
-          <p:cNvPicPr>
-            <a:picLocks noChangeAspect="1"/>
-          </p:cNvPicPr>
-          <p:nvPr/>
-        </p:nvPicPr>
-        <p:blipFill>
-          <a:blip r:embed="rId2"/>
-          <a:stretch>
-            <a:fillRect/>
-          </a:stretch>
-        </p:blipFill>
-        <p:spPr>
-          <a:xfrm>
-            <a:off x="548640" y="1965960"/>
-            <a:ext cx="7071358" cy="3977639"/>
-          </a:xfrm>
-          <a:prstGeom prst="rect">
-            <a:avLst/>
-          </a:prstGeom>
-        </p:spPr>
-      </p:pic>
-      <p:sp>
-        <p:nvSpPr>
-          <p:cNvPr id="5" name="TextBox 4"/>
+              <a:t>start   = 1'b0;</a:t>
+            </a:r>
+          </a:p>
+          <a:p>
+            <a:pPr>
+              <a:lnSpc>
+                <a:spcPts val="2200"/>
+              </a:lnSpc>
+              <a:spcAft>
+                <a:spcPts val="400"/>
+              </a:spcAft>
+              <a:defRPr sz="2000" b="0">
+                <a:solidFill>
+                  <a:srgbClr val="333333"/>
+                </a:solidFill>
+                <a:latin typeface="Consolas"/>
+              </a:defRPr>
+            </a:pPr>
+            <a:r>
+              <a:t>        data_in = 8'h00;</a:t>
+            </a:r>
+          </a:p>
+          <a:p>
+            <a:pPr>
+              <a:lnSpc>
+                <a:spcPts val="2200"/>
+              </a:lnSpc>
+              <a:spcAft>
+                <a:spcPts val="400"/>
+              </a:spcAft>
+              <a:defRPr sz="2000" b="0">
+                <a:solidFill>
+                  <a:srgbClr val="333333"/>
+                </a:solidFill>
+                <a:latin typeface="Consolas"/>
+              </a:defRPr>
+            </a:pPr>
+          </a:p>
+          <a:p>
+            <a:pPr>
+              <a:lnSpc>
+                <a:spcPts val="2200"/>
+              </a:lnSpc>
+              <a:spcAft>
+                <a:spcPts val="400"/>
+              </a:spcAft>
+              <a:defRPr sz="2000" b="0">
+                <a:solidFill>
+                  <a:srgbClr val="333333"/>
+                </a:solidFill>
+                <a:latin typeface="Consolas"/>
+              </a:defRPr>
+            </a:pPr>
+            <a:r>
+              <a:t>        wait (rst_n === 1'b1);</a:t>
+            </a:r>
+          </a:p>
+          <a:p>
+            <a:pPr>
+              <a:lnSpc>
+                <a:spcPts val="2200"/>
+              </a:lnSpc>
+              <a:spcAft>
+                <a:spcPts val="400"/>
+              </a:spcAft>
+              <a:defRPr sz="2000" b="0">
+                <a:solidFill>
+                  <a:srgbClr val="333333"/>
+                </a:solidFill>
+                <a:latin typeface="Consolas"/>
+              </a:defRPr>
+            </a:pPr>
+            <a:r>
+              <a:t>        repeat (10) @(posedge clk);</a:t>
+            </a:r>
+          </a:p>
+          <a:p>
+            <a:pPr>
+              <a:lnSpc>
+                <a:spcPts val="2200"/>
+              </a:lnSpc>
+              <a:spcAft>
+                <a:spcPts val="400"/>
+              </a:spcAft>
+              <a:defRPr sz="2000" b="0">
+                <a:solidFill>
+                  <a:srgbClr val="333333"/>
+                </a:solidFill>
+                <a:latin typeface="Consolas"/>
+              </a:defRPr>
+            </a:pPr>
+          </a:p>
+          <a:p>
+            <a:pPr>
+              <a:lnSpc>
+                <a:spcPts val="2200"/>
+              </a:lnSpc>
+              <a:spcAft>
+                <a:spcPts val="400"/>
+              </a:spcAft>
+              <a:defRPr sz="2000" b="0">
+                <a:solidFill>
+                  <a:srgbClr val="333333"/>
+                </a:solidFill>
+                <a:latin typeface="Consolas"/>
+              </a:defRPr>
+            </a:pPr>
+            <a:r>
+              <a:t>        // Send 0x55</a:t>
+            </a:r>
+          </a:p>
+          <a:p>
+            <a:pPr>
+              <a:lnSpc>
+                <a:spcPts val="2200"/>
+              </a:lnSpc>
+              <a:spcAft>
+                <a:spcPts val="400"/>
+              </a:spcAft>
+              <a:defRPr sz="2000" b="0">
+                <a:solidFill>
+                  <a:srgbClr val="333333"/>
+                </a:solidFill>
+                <a:latin typeface="Consolas"/>
+              </a:defRPr>
+            </a:pPr>
+            <a:r>
+              <a:t>        @(posedge clk);</a:t>
+            </a:r>
+          </a:p>
+          <a:p>
+            <a:pPr>
+              <a:lnSpc>
+                <a:spcPts val="2200"/>
+              </a:lnSpc>
+              <a:spcAft>
+                <a:spcPts val="400"/>
+              </a:spcAft>
+              <a:defRPr sz="2000" b="0">
+                <a:solidFill>
+                  <a:srgbClr val="333333"/>
+                </a:solidFill>
+                <a:latin typeface="Consolas"/>
+              </a:defRPr>
+            </a:pPr>
+            <a:r>
+              <a:t>        start   = 1'b1;</a:t>
+            </a:r>
+          </a:p>
+          <a:p>
+            <a:pPr>
+              <a:lnSpc>
+                <a:spcPts val="2200"/>
+              </a:lnSpc>
+              <a:spcAft>
+                <a:spcPts val="400"/>
+              </a:spcAft>
+              <a:defRPr sz="2000" b="0">
+                <a:solidFill>
+                  <a:srgbClr val="333333"/>
+                </a:solidFill>
+                <a:latin typeface="Consolas"/>
+              </a:defRPr>
+            </a:pPr>
+            <a:r>
+              <a:t>        data_in = 8'h55;</a:t>
+            </a:r>
+          </a:p>
+          <a:p>
+            <a:pPr>
+              <a:lnSpc>
+                <a:spcPts val="2200"/>
+              </a:lnSpc>
+              <a:spcAft>
+                <a:spcPts val="400"/>
+              </a:spcAft>
+              <a:defRPr sz="2000" b="0">
+                <a:solidFill>
+                  <a:srgbClr val="333333"/>
+                </a:solidFill>
+                <a:latin typeface="Consolas"/>
+              </a:defRPr>
+            </a:pPr>
+            <a:r>
+              <a:t>        @(posedge clk);</a:t>
+            </a:r>
+          </a:p>
+          <a:p>
+            <a:pPr>
+              <a:lnSpc>
+                <a:spcPts val="2200"/>
+              </a:lnSpc>
+              <a:spcAft>
+                <a:spcPts val="400"/>
+              </a:spcAft>
+              <a:defRPr sz="2000" b="0">
+                <a:solidFill>
+                  <a:srgbClr val="333333"/>
+                </a:solidFill>
+                <a:latin typeface="Consolas"/>
+              </a:defRPr>
+            </a:pPr>
+            <a:r>
+              <a:t>        start   = 1'b0;</a:t>
+            </a:r>
+          </a:p>
+          <a:p>
+            <a:pPr>
+              <a:lnSpc>
+                <a:spcPts val="2200"/>
+              </a:lnSpc>
+              <a:spcAft>
+                <a:spcPts val="400"/>
+              </a:spcAft>
+              <a:defRPr sz="2000" b="0">
+                <a:solidFill>
+                  <a:srgbClr val="333333"/>
+                </a:solidFill>
+                <a:latin typeface="Consolas"/>
+              </a:defRPr>
+            </a:pPr>
+            <a:r>
+              <a:t>        wait (done === 1'b1);</a:t>
+            </a:r>
+          </a:p>
+          <a:p>
+            <a:pPr>
+              <a:lnSpc>
+                <a:spcPts val="2200"/>
+              </a:lnSpc>
+              <a:spcAft>
+                <a:spcPts val="400"/>
+              </a:spcAft>
+              <a:defRPr sz="2000" b="0">
+                <a:solidFill>
+                  <a:srgbClr val="333333"/>
+                </a:solidFill>
+                <a:latin typeface="Consolas"/>
+              </a:defRPr>
+            </a:pPr>
+            <a:r>
+              <a:t>        $display("[PASS] SPI baseline: 0x55 transfer done");</a:t>
+            </a:r>
+          </a:p>
+          <a:p>
+            <a:pPr>
+              <a:lnSpc>
+                <a:spcPts val="2200"/>
+              </a:lnSpc>
+              <a:spcAft>
+                <a:spcPts val="400"/>
+              </a:spcAft>
+              <a:defRPr sz="2000" b="0">
+                <a:solidFill>
+                  <a:srgbClr val="333333"/>
+                </a:solidFill>
+                <a:latin typeface="Consolas"/>
+              </a:defRPr>
+            </a:pPr>
+          </a:p>
+          <a:p>
+            <a:pPr>
+              <a:lnSpc>
+                <a:spcPts val="2200"/>
+              </a:lnSpc>
+              <a:spcAft>
+                <a:spcPts val="400"/>
+              </a:spcAft>
+              <a:defRPr sz="2000" b="0">
+                <a:solidFill>
+                  <a:srgbClr val="333333"/>
+                </a:solidFill>
+                <a:latin typeface="Consolas"/>
+              </a:defRPr>
+            </a:pPr>
+            <a:r>
+              <a:t>        repeat (20) @(posedge clk);</a:t>
+            </a:r>
+          </a:p>
+          <a:p>
+            <a:pPr>
+              <a:lnSpc>
+                <a:spcPts val="2200"/>
+              </a:lnSpc>
+              <a:spcAft>
+                <a:spcPts val="400"/>
+              </a:spcAft>
+              <a:defRPr sz="2000" b="0">
+                <a:solidFill>
+                  <a:srgbClr val="333333"/>
+                </a:solidFill>
+                <a:latin typeface="Consolas"/>
+              </a:defRPr>
+            </a:pPr>
+            <a:r>
+              <a:t># ...</a:t>
+            </a:r>
+          </a:p>
+        </p:txBody>
+      </p:sp>
+      <p:sp>
+        <p:nvSpPr>
+          <p:cNvPr id="4" name="TextBox 3"/>
           <p:cNvSpPr txBox="1"/>
           <p:nvPr/>
         </p:nvSpPr>
@@ -7592,7 +9596,7 @@
               </a:defRPr>
             </a:pPr>
             <a:r>
-              <a:t>Practice &amp; assessment</a:t>
+              <a:t>Syllabus topics</a:t>
             </a:r>
           </a:p>
         </p:txBody>
@@ -7688,7 +9692,7 @@
               </a:defRPr>
             </a:pPr>
             <a:r>
-              <a:t>What you should know</a:t>
+              <a:t>1. SPI Protocol (Mode 0)</a:t>
             </a:r>
           </a:p>
         </p:txBody>
@@ -7730,7 +9734,7 @@
               </a:defRPr>
             </a:pPr>
             <a:r>
-              <a:t>• Describe SPI mode 0 and the role of sclk, mosi,</a:t>
+              <a:t>• Signals: sclk (serial clock), mosi (master out,</a:t>
             </a:r>
           </a:p>
           <a:p>
@@ -7749,7 +9753,7 @@
               </a:defRPr>
             </a:pPr>
             <a:r>
-              <a:t>      cs_n, clk_div_tick.</a:t>
+              <a:t>      slave in), cs_n (active-low chip select). Optional:…</a:t>
             </a:r>
           </a:p>
           <a:p>
@@ -7768,7 +9772,7 @@
               </a:defRPr>
             </a:pPr>
             <a:r>
-              <a:t>• Explain the role of spi_master and clk_div.</a:t>
+              <a:t>• Mode 0 (CPOL=0, CPHA=0): SCLK idles low; data</a:t>
             </a:r>
           </a:p>
           <a:p>
@@ -7787,7 +9791,7 @@
               </a:defRPr>
             </a:pPr>
             <a:r>
-              <a:t>• Run the spi_baseline example and interpret the</a:t>
+              <a:t>      captured on rising edge; data changed on falling</a:t>
             </a:r>
           </a:p>
           <a:p>
@@ -7806,7 +9810,7 @@
               </a:defRPr>
             </a:pPr>
             <a:r>
-              <a:t>      directed test.</a:t>
+              <a:t>      edge.</a:t>
             </a:r>
           </a:p>
           <a:p>
@@ -7825,7 +9829,45 @@
               </a:defRPr>
             </a:pPr>
             <a:r>
-              <a:t>• Ready for Module 6: SPI UVM+SV verification.</a:t>
+              <a:t>• Timing: One bit per clk_div_tick; clk_div_tick</a:t>
+            </a:r>
+          </a:p>
+          <a:p>
+            <a:pPr>
+              <a:lnSpc>
+                <a:spcPts val="2200"/>
+              </a:lnSpc>
+              <a:spcAft>
+                <a:spcPts val="1000"/>
+              </a:spcAft>
+              <a:defRPr sz="2000" b="0">
+                <a:solidFill>
+                  <a:srgbClr val="333333"/>
+                </a:solidFill>
+                <a:latin typeface="Calibri"/>
+              </a:defRPr>
+            </a:pPr>
+            <a:r>
+              <a:t>      derived from system clock via divider (e.g.</a:t>
+            </a:r>
+          </a:p>
+          <a:p>
+            <a:pPr>
+              <a:lnSpc>
+                <a:spcPts val="2200"/>
+              </a:lnSpc>
+              <a:spcAft>
+                <a:spcPts val="1000"/>
+              </a:spcAft>
+              <a:defRPr sz="2000" b="0">
+                <a:solidFill>
+                  <a:srgbClr val="333333"/>
+                </a:solidFill>
+                <a:latin typeface="Calibri"/>
+              </a:defRPr>
+            </a:pPr>
+            <a:r>
+              <a:t>      DIVIDER=…</a:t>
             </a:r>
           </a:p>
         </p:txBody>
@@ -7921,7 +9963,7 @@
               </a:defRPr>
             </a:pPr>
             <a:r>
-              <a:t>Exercises</a:t>
+              <a:t>2. Hands-on testbench (spi_baseline)</a:t>
             </a:r>
           </a:p>
         </p:txBody>
@@ -7963,7 +10005,7 @@
               </a:defRPr>
             </a:pPr>
             <a:r>
-              <a:t>• Run spi_baseline</a:t>
+              <a:t>• Directed test in `top_spi_baseline.sv`: `start`,</a:t>
             </a:r>
           </a:p>
           <a:p>
@@ -7982,7 +10024,7 @@
               </a:defRPr>
             </a:pPr>
             <a:r>
-              <a:t>• Trace one transfer</a:t>
+              <a:t>      `data_in`, `wait(done)`.</a:t>
             </a:r>
           </a:p>
           <a:p>
@@ -8001,26 +10043,7 @@
               </a:defRPr>
             </a:pPr>
             <a:r>
-              <a:t>• Mode 0 timing</a:t>
-            </a:r>
-          </a:p>
-          <a:p>
-            <a:pPr>
-              <a:lnSpc>
-                <a:spcPts val="2200"/>
-              </a:lnSpc>
-              <a:spcAft>
-                <a:spcPts val="1000"/>
-              </a:spcAft>
-              <a:defRPr sz="2000" b="0">
-                <a:solidFill>
-                  <a:srgbClr val="333333"/>
-                </a:solidFill>
-                <a:latin typeface="Calibri"/>
-              </a:defRPr>
-            </a:pPr>
-            <a:r>
-              <a:t>• Optional: Waveforms</a:t>
+              <a:t>• Pass: `[PASS]` lines and `SPI baseline test PASS`.</a:t>
             </a:r>
           </a:p>
         </p:txBody>
@@ -8285,8 +10308,8 @@
         </p:nvSpPr>
         <p:spPr>
           <a:xfrm>
-            <a:off x="548640" y="411480"/>
-            <a:ext cx="11064240" cy="777240"/>
+            <a:off x="548640" y="2743200"/>
+            <a:ext cx="11064240" cy="1371600"/>
           </a:xfrm>
           <a:prstGeom prst="rect">
             <a:avLst/>
@@ -8299,11 +10322,11 @@
           </a:bodyPr>
           <a:lstStyle/>
           <a:p>
-            <a:pPr>
-              <a:lnSpc>
-                <a:spcPts val="2200"/>
-              </a:lnSpc>
-              <a:defRPr sz="2800" b="1">
+            <a:pPr algn="ctr">
+              <a:lnSpc>
+                <a:spcPts val="2200"/>
+              </a:lnSpc>
+              <a:defRPr sz="3600" b="1">
                 <a:solidFill>
                   <a:srgbClr val="1A1A2E"/>
                 </a:solidFill>
@@ -8311,7 +10334,7 @@
               </a:defRPr>
             </a:pPr>
             <a:r>
-              <a:t>Assessment checklist</a:t>
+              <a:t>Hands-on examples</a:t>
             </a:r>
           </a:p>
         </p:txBody>
@@ -8319,181 +10342,6 @@
       <p:sp>
         <p:nvSpPr>
           <p:cNvPr id="3" name="TextBox 2"/>
-          <p:cNvSpPr txBox="1"/>
-          <p:nvPr/>
-        </p:nvSpPr>
-        <p:spPr>
-          <a:xfrm>
-            <a:off x="548640" y="1234440"/>
-            <a:ext cx="11064240" cy="4937760"/>
-          </a:xfrm>
-          <a:prstGeom prst="rect">
-            <a:avLst/>
-          </a:prstGeom>
-          <a:noFill/>
-        </p:spPr>
-        <p:txBody>
-          <a:bodyPr wrap="square">
-            <a:noAutofit/>
-          </a:bodyPr>
-          <a:lstStyle/>
-          <a:p>
-            <a:pPr>
-              <a:lnSpc>
-                <a:spcPts val="2200"/>
-              </a:lnSpc>
-              <a:spcAft>
-                <a:spcPts val="1000"/>
-              </a:spcAft>
-              <a:defRPr sz="2000" b="0">
-                <a:solidFill>
-                  <a:srgbClr val="333333"/>
-                </a:solidFill>
-                <a:latin typeface="Calibri"/>
-              </a:defRPr>
-            </a:pPr>
-            <a:r>
-              <a:t>• Can describe SPI mode 0 (idle low, capture on</a:t>
-            </a:r>
-          </a:p>
-          <a:p>
-            <a:pPr>
-              <a:lnSpc>
-                <a:spcPts val="2200"/>
-              </a:lnSpc>
-              <a:spcAft>
-                <a:spcPts val="1000"/>
-              </a:spcAft>
-              <a:defRPr sz="2000" b="0">
-                <a:solidFill>
-                  <a:srgbClr val="333333"/>
-                </a:solidFill>
-                <a:latin typeface="Calibri"/>
-              </a:defRPr>
-            </a:pPr>
-            <a:r>
-              <a:t>      rising, change on falling) and signals sclk, mosi,</a:t>
-            </a:r>
-          </a:p>
-          <a:p>
-            <a:pPr>
-              <a:lnSpc>
-                <a:spcPts val="2200"/>
-              </a:lnSpc>
-              <a:spcAft>
-                <a:spcPts val="1000"/>
-              </a:spcAft>
-              <a:defRPr sz="2000" b="0">
-                <a:solidFill>
-                  <a:srgbClr val="333333"/>
-                </a:solidFill>
-                <a:latin typeface="Calibri"/>
-              </a:defRPr>
-            </a:pPr>
-            <a:r>
-              <a:t>      cs…</a:t>
-            </a:r>
-          </a:p>
-          <a:p>
-            <a:pPr>
-              <a:lnSpc>
-                <a:spcPts val="2200"/>
-              </a:lnSpc>
-              <a:spcAft>
-                <a:spcPts val="1000"/>
-              </a:spcAft>
-              <a:defRPr sz="2000" b="0">
-                <a:solidFill>
-                  <a:srgbClr val="333333"/>
-                </a:solidFill>
-                <a:latin typeface="Calibri"/>
-              </a:defRPr>
-            </a:pPr>
-            <a:r>
-              <a:t>• Can explain the role of spi_master and clk_div in</a:t>
-            </a:r>
-          </a:p>
-          <a:p>
-            <a:pPr>
-              <a:lnSpc>
-                <a:spcPts val="2200"/>
-              </a:lnSpc>
-              <a:spcAft>
-                <a:spcPts val="1000"/>
-              </a:spcAft>
-              <a:defRPr sz="2000" b="0">
-                <a:solidFill>
-                  <a:srgbClr val="333333"/>
-                </a:solidFill>
-                <a:latin typeface="Calibri"/>
-              </a:defRPr>
-            </a:pPr>
-            <a:r>
-              <a:t>      the RTL.</a:t>
-            </a:r>
-          </a:p>
-          <a:p>
-            <a:pPr>
-              <a:lnSpc>
-                <a:spcPts val="2200"/>
-              </a:lnSpc>
-              <a:spcAft>
-                <a:spcPts val="1000"/>
-              </a:spcAft>
-              <a:defRPr sz="2000" b="0">
-                <a:solidFill>
-                  <a:srgbClr val="333333"/>
-                </a:solidFill>
-                <a:latin typeface="Calibri"/>
-              </a:defRPr>
-            </a:pPr>
-            <a:r>
-              <a:t>• Can run spi_baseline and interpret the directed test</a:t>
-            </a:r>
-          </a:p>
-          <a:p>
-            <a:pPr>
-              <a:lnSpc>
-                <a:spcPts val="2200"/>
-              </a:lnSpc>
-              <a:spcAft>
-                <a:spcPts val="1000"/>
-              </a:spcAft>
-              <a:defRPr sz="2000" b="0">
-                <a:solidFill>
-                  <a:srgbClr val="333333"/>
-                </a:solidFill>
-                <a:latin typeface="Calibri"/>
-              </a:defRPr>
-            </a:pPr>
-            <a:r>
-              <a:t>      result.</a:t>
-            </a:r>
-          </a:p>
-          <a:p>
-            <a:pPr>
-              <a:lnSpc>
-                <a:spcPts val="2200"/>
-              </a:lnSpc>
-              <a:spcAft>
-                <a:spcPts val="1000"/>
-              </a:spcAft>
-              <a:defRPr sz="2000" b="0">
-                <a:solidFill>
-                  <a:srgbClr val="333333"/>
-                </a:solidFill>
-                <a:latin typeface="Calibri"/>
-              </a:defRPr>
-            </a:pPr>
-            <a:r>
-              <a:t>• Ready for Module 6: SPI UVM+SV verification.</a:t>
-            </a:r>
-          </a:p>
-        </p:txBody>
-      </p:sp>
-      <p:sp>
-        <p:nvSpPr>
-          <p:cNvPr id="4" name="TextBox 3"/>
           <p:cNvSpPr txBox="1"/>
           <p:nvPr/>
         </p:nvSpPr>
@@ -8582,7 +10430,7 @@
               </a:defRPr>
             </a:pPr>
             <a:r>
-              <a:t>Summary &amp; next steps</a:t>
+              <a:t>Module 5 self-check</a:t>
             </a:r>
           </a:p>
         </p:txBody>
@@ -8595,8 +10443,76 @@
         </p:nvSpPr>
         <p:spPr>
           <a:xfrm>
-            <a:off x="548640" y="1234440"/>
-            <a:ext cx="11064240" cy="4937760"/>
+            <a:off x="548640" y="1051560"/>
+            <a:ext cx="11064240" cy="914400"/>
+          </a:xfrm>
+          <a:prstGeom prst="rect">
+            <a:avLst/>
+          </a:prstGeom>
+          <a:solidFill>
+            <a:srgbClr val="F4F4F4"/>
+          </a:solidFill>
+        </p:spPr>
+        <p:txBody>
+          <a:bodyPr wrap="square">
+            <a:noAutofit/>
+          </a:bodyPr>
+          <a:lstStyle/>
+          <a:p>
+            <a:pPr>
+              <a:lnSpc>
+                <a:spcPts val="2200"/>
+              </a:lnSpc>
+              <a:spcAft>
+                <a:spcPts val="200"/>
+              </a:spcAft>
+              <a:defRPr sz="2000" b="0">
+                <a:solidFill>
+                  <a:srgbClr val="333333"/>
+                </a:solidFill>
+                <a:latin typeface="Consolas"/>
+              </a:defRPr>
+            </a:pPr>
+            <a:r>
+              <a:t>$ ./scripts/module5.sh --help</a:t>
+            </a:r>
+          </a:p>
+        </p:txBody>
+      </p:sp>
+      <p:pic>
+        <p:nvPicPr>
+          <p:cNvPr id="4" name="Picture 3" descr="module5_check.png"/>
+          <p:cNvPicPr>
+            <a:picLocks noChangeAspect="1"/>
+          </p:cNvPicPr>
+          <p:nvPr/>
+        </p:nvPicPr>
+        <p:blipFill>
+          <a:blip r:embed="rId2"/>
+          <a:stretch>
+            <a:fillRect/>
+          </a:stretch>
+        </p:blipFill>
+        <p:spPr>
+          <a:xfrm>
+            <a:off x="548640" y="1965960"/>
+            <a:ext cx="7071358" cy="3977639"/>
+          </a:xfrm>
+          <a:prstGeom prst="rect">
+            <a:avLst/>
+          </a:prstGeom>
+        </p:spPr>
+      </p:pic>
+      <p:sp>
+        <p:nvSpPr>
+          <p:cNvPr id="5" name="TextBox 4"/>
+          <p:cNvSpPr txBox="1"/>
+          <p:nvPr/>
+        </p:nvSpPr>
+        <p:spPr>
+          <a:xfrm>
+            <a:off x="548640" y="6355080"/>
+            <a:ext cx="11064240" cy="320040"/>
           </a:xfrm>
           <a:prstGeom prst="rect">
             <a:avLst/>
@@ -8609,6 +10525,102 @@
           </a:bodyPr>
           <a:lstStyle/>
           <a:p>
+            <a:pPr algn="r">
+              <a:lnSpc>
+                <a:spcPts val="2200"/>
+              </a:lnSpc>
+              <a:defRPr sz="1000" b="0">
+                <a:solidFill>
+                  <a:srgbClr val="666666"/>
+                </a:solidFill>
+                <a:latin typeface="Calibri"/>
+              </a:defRPr>
+            </a:pPr>
+            <a:r>
+              <a:t>learn_uart_spi_i2c / Module 5</a:t>
+            </a:r>
+          </a:p>
+        </p:txBody>
+      </p:sp>
+    </p:spTree>
+  </p:cSld>
+  <p:clrMapOvr>
+    <a:masterClrMapping/>
+  </p:clrMapOvr>
+</p:sld>
+</file>
+
+<file path=ppt/slides/slide32.xml><?xml version="1.0" encoding="utf-8"?>
+<p:sld xmlns:a="http://schemas.openxmlformats.org/drawingml/2006/main" xmlns:p="http://schemas.openxmlformats.org/presentationml/2006/main" xmlns:r="http://schemas.openxmlformats.org/officeDocument/2006/relationships">
+  <p:cSld>
+    <p:spTree>
+      <p:nvGrpSpPr>
+        <p:cNvPr id="1" name=""/>
+        <p:cNvGrpSpPr/>
+        <p:nvPr/>
+      </p:nvGrpSpPr>
+      <p:grpSpPr/>
+      <p:sp>
+        <p:nvSpPr>
+          <p:cNvPr id="2" name="TextBox 1"/>
+          <p:cNvSpPr txBox="1"/>
+          <p:nvPr/>
+        </p:nvSpPr>
+        <p:spPr>
+          <a:xfrm>
+            <a:off x="548640" y="411480"/>
+            <a:ext cx="11064240" cy="777240"/>
+          </a:xfrm>
+          <a:prstGeom prst="rect">
+            <a:avLst/>
+          </a:prstGeom>
+          <a:noFill/>
+        </p:spPr>
+        <p:txBody>
+          <a:bodyPr wrap="square">
+            <a:noAutofit/>
+          </a:bodyPr>
+          <a:lstStyle/>
+          <a:p>
+            <a:pPr>
+              <a:lnSpc>
+                <a:spcPts val="2200"/>
+              </a:lnSpc>
+              <a:defRPr sz="2800" b="1">
+                <a:solidFill>
+                  <a:srgbClr val="1A1A2E"/>
+                </a:solidFill>
+                <a:latin typeface="Calibri"/>
+              </a:defRPr>
+            </a:pPr>
+            <a:r>
+              <a:t>Example 1: SPI baseline master</a:t>
+            </a:r>
+          </a:p>
+        </p:txBody>
+      </p:sp>
+      <p:sp>
+        <p:nvSpPr>
+          <p:cNvPr id="3" name="TextBox 2"/>
+          <p:cNvSpPr txBox="1"/>
+          <p:nvPr/>
+        </p:nvSpPr>
+        <p:spPr>
+          <a:xfrm>
+            <a:off x="548640" y="1234440"/>
+            <a:ext cx="11064240" cy="4937760"/>
+          </a:xfrm>
+          <a:prstGeom prst="rect">
+            <a:avLst/>
+          </a:prstGeom>
+          <a:noFill/>
+        </p:spPr>
+        <p:txBody>
+          <a:bodyPr wrap="square">
+            <a:noAutofit/>
+          </a:bodyPr>
+          <a:lstStyle/>
+          <a:p>
             <a:pPr>
               <a:lnSpc>
                 <a:spcPts val="2200"/>
@@ -8624,7 +10636,7 @@
               </a:defRPr>
             </a:pPr>
             <a:r>
-              <a:t>• Understand the SPI protocol (mode 0, signals),</a:t>
+              <a:t>• SPI Mode 0 master RTL (`spi_master` + `clk_div`)</a:t>
             </a:r>
           </a:p>
           <a:p>
@@ -8643,7 +10655,7 @@
               </a:defRPr>
             </a:pPr>
             <a:r>
-              <a:t>      translate it to RTL (SPI master, clk_div), and</a:t>
+              <a:t>• Directed writes 0x55 and 0xAA with `start` /</a:t>
             </a:r>
           </a:p>
           <a:p>
@@ -8662,7 +10674,7 @@
               </a:defRPr>
             </a:pPr>
             <a:r>
-              <a:t>      verif…</a:t>
+              <a:t>      `wait(done)`</a:t>
             </a:r>
           </a:p>
           <a:p>
@@ -8681,7 +10693,7 @@
               </a:defRPr>
             </a:pPr>
             <a:r>
-              <a:t>• Complete module5/CHECKLIST.md</a:t>
+              <a:t>• Observing SCLK, MOSI, and CS_N timing in simulation</a:t>
             </a:r>
           </a:p>
           <a:p>
@@ -8700,9 +10712,388 @@
               </a:defRPr>
             </a:pPr>
             <a:r>
-              <a:t>• Review module5/EXAMPLES.md and run each lab</a:t>
-            </a:r>
-          </a:p>
+              <a:t>      (optional VCD)</a:t>
+            </a:r>
+          </a:p>
+        </p:txBody>
+      </p:sp>
+      <p:sp>
+        <p:nvSpPr>
+          <p:cNvPr id="4" name="TextBox 3"/>
+          <p:cNvSpPr txBox="1"/>
+          <p:nvPr/>
+        </p:nvSpPr>
+        <p:spPr>
+          <a:xfrm>
+            <a:off x="548640" y="6355080"/>
+            <a:ext cx="11064240" cy="320040"/>
+          </a:xfrm>
+          <a:prstGeom prst="rect">
+            <a:avLst/>
+          </a:prstGeom>
+          <a:noFill/>
+        </p:spPr>
+        <p:txBody>
+          <a:bodyPr wrap="square">
+            <a:noAutofit/>
+          </a:bodyPr>
+          <a:lstStyle/>
+          <a:p>
+            <a:pPr algn="r">
+              <a:lnSpc>
+                <a:spcPts val="2200"/>
+              </a:lnSpc>
+              <a:defRPr sz="1000" b="0">
+                <a:solidFill>
+                  <a:srgbClr val="666666"/>
+                </a:solidFill>
+                <a:latin typeface="Calibri"/>
+              </a:defRPr>
+            </a:pPr>
+            <a:r>
+              <a:t>learn_uart_spi_i2c / Module 5</a:t>
+            </a:r>
+          </a:p>
+        </p:txBody>
+      </p:sp>
+    </p:spTree>
+  </p:cSld>
+  <p:clrMapOvr>
+    <a:masterClrMapping/>
+  </p:clrMapOvr>
+</p:sld>
+</file>
+
+<file path=ppt/slides/slide33.xml><?xml version="1.0" encoding="utf-8"?>
+<p:sld xmlns:a="http://schemas.openxmlformats.org/drawingml/2006/main" xmlns:p="http://schemas.openxmlformats.org/presentationml/2006/main" xmlns:r="http://schemas.openxmlformats.org/officeDocument/2006/relationships">
+  <p:cSld>
+    <p:spTree>
+      <p:nvGrpSpPr>
+        <p:cNvPr id="1" name=""/>
+        <p:cNvGrpSpPr/>
+        <p:nvPr/>
+      </p:nvGrpSpPr>
+      <p:grpSpPr/>
+      <p:sp>
+        <p:nvSpPr>
+          <p:cNvPr id="2" name="TextBox 1"/>
+          <p:cNvSpPr txBox="1"/>
+          <p:nvPr/>
+        </p:nvSpPr>
+        <p:spPr>
+          <a:xfrm>
+            <a:off x="548640" y="411480"/>
+            <a:ext cx="11064240" cy="777240"/>
+          </a:xfrm>
+          <a:prstGeom prst="rect">
+            <a:avLst/>
+          </a:prstGeom>
+          <a:noFill/>
+        </p:spPr>
+        <p:txBody>
+          <a:bodyPr wrap="square">
+            <a:noAutofit/>
+          </a:bodyPr>
+          <a:lstStyle/>
+          <a:p>
+            <a:pPr>
+              <a:lnSpc>
+                <a:spcPts val="2200"/>
+              </a:lnSpc>
+              <a:defRPr sz="2800" b="1">
+                <a:solidFill>
+                  <a:srgbClr val="1A1A2E"/>
+                </a:solidFill>
+                <a:latin typeface="Calibri"/>
+              </a:defRPr>
+            </a:pPr>
+            <a:r>
+              <a:t>Demo: SPI baseline master</a:t>
+            </a:r>
+          </a:p>
+        </p:txBody>
+      </p:sp>
+      <p:sp>
+        <p:nvSpPr>
+          <p:cNvPr id="3" name="TextBox 2"/>
+          <p:cNvSpPr txBox="1"/>
+          <p:nvPr/>
+        </p:nvSpPr>
+        <p:spPr>
+          <a:xfrm>
+            <a:off x="548640" y="1051560"/>
+            <a:ext cx="11064240" cy="914400"/>
+          </a:xfrm>
+          <a:prstGeom prst="rect">
+            <a:avLst/>
+          </a:prstGeom>
+          <a:solidFill>
+            <a:srgbClr val="F4F4F4"/>
+          </a:solidFill>
+        </p:spPr>
+        <p:txBody>
+          <a:bodyPr wrap="square">
+            <a:noAutofit/>
+          </a:bodyPr>
+          <a:lstStyle/>
+          <a:p>
+            <a:pPr>
+              <a:lnSpc>
+                <a:spcPts val="2200"/>
+              </a:lnSpc>
+              <a:spcAft>
+                <a:spcPts val="200"/>
+              </a:spcAft>
+              <a:defRPr sz="2000" b="0">
+                <a:solidFill>
+                  <a:srgbClr val="333333"/>
+                </a:solidFill>
+                <a:latin typeface="Consolas"/>
+              </a:defRPr>
+            </a:pPr>
+            <a:r>
+              <a:t>$ cd module5/examples/spi_baseline &amp;&amp; make run</a:t>
+            </a:r>
+          </a:p>
+        </p:txBody>
+      </p:sp>
+      <p:pic>
+        <p:nvPicPr>
+          <p:cNvPr id="4" name="Picture 3" descr="ex01_spi_baseline.png"/>
+          <p:cNvPicPr>
+            <a:picLocks noChangeAspect="1"/>
+          </p:cNvPicPr>
+          <p:nvPr/>
+        </p:nvPicPr>
+        <p:blipFill>
+          <a:blip r:embed="rId2"/>
+          <a:stretch>
+            <a:fillRect/>
+          </a:stretch>
+        </p:blipFill>
+        <p:spPr>
+          <a:xfrm>
+            <a:off x="548640" y="1965960"/>
+            <a:ext cx="7071358" cy="3977639"/>
+          </a:xfrm>
+          <a:prstGeom prst="rect">
+            <a:avLst/>
+          </a:prstGeom>
+        </p:spPr>
+      </p:pic>
+      <p:sp>
+        <p:nvSpPr>
+          <p:cNvPr id="5" name="TextBox 4"/>
+          <p:cNvSpPr txBox="1"/>
+          <p:nvPr/>
+        </p:nvSpPr>
+        <p:spPr>
+          <a:xfrm>
+            <a:off x="548640" y="6355080"/>
+            <a:ext cx="11064240" cy="320040"/>
+          </a:xfrm>
+          <a:prstGeom prst="rect">
+            <a:avLst/>
+          </a:prstGeom>
+          <a:noFill/>
+        </p:spPr>
+        <p:txBody>
+          <a:bodyPr wrap="square">
+            <a:noAutofit/>
+          </a:bodyPr>
+          <a:lstStyle/>
+          <a:p>
+            <a:pPr algn="r">
+              <a:lnSpc>
+                <a:spcPts val="2200"/>
+              </a:lnSpc>
+              <a:defRPr sz="1000" b="0">
+                <a:solidFill>
+                  <a:srgbClr val="666666"/>
+                </a:solidFill>
+                <a:latin typeface="Calibri"/>
+              </a:defRPr>
+            </a:pPr>
+            <a:r>
+              <a:t>learn_uart_spi_i2c / Module 5</a:t>
+            </a:r>
+          </a:p>
+        </p:txBody>
+      </p:sp>
+    </p:spTree>
+  </p:cSld>
+  <p:clrMapOvr>
+    <a:masterClrMapping/>
+  </p:clrMapOvr>
+</p:sld>
+</file>
+
+<file path=ppt/slides/slide34.xml><?xml version="1.0" encoding="utf-8"?>
+<p:sld xmlns:a="http://schemas.openxmlformats.org/drawingml/2006/main" xmlns:p="http://schemas.openxmlformats.org/presentationml/2006/main" xmlns:r="http://schemas.openxmlformats.org/officeDocument/2006/relationships">
+  <p:cSld>
+    <p:spTree>
+      <p:nvGrpSpPr>
+        <p:cNvPr id="1" name=""/>
+        <p:cNvGrpSpPr/>
+        <p:nvPr/>
+      </p:nvGrpSpPr>
+      <p:grpSpPr/>
+      <p:sp>
+        <p:nvSpPr>
+          <p:cNvPr id="2" name="TextBox 1"/>
+          <p:cNvSpPr txBox="1"/>
+          <p:nvPr/>
+        </p:nvSpPr>
+        <p:spPr>
+          <a:xfrm>
+            <a:off x="548640" y="2743200"/>
+            <a:ext cx="11064240" cy="1371600"/>
+          </a:xfrm>
+          <a:prstGeom prst="rect">
+            <a:avLst/>
+          </a:prstGeom>
+          <a:noFill/>
+        </p:spPr>
+        <p:txBody>
+          <a:bodyPr wrap="square">
+            <a:noAutofit/>
+          </a:bodyPr>
+          <a:lstStyle/>
+          <a:p>
+            <a:pPr algn="ctr">
+              <a:lnSpc>
+                <a:spcPts val="2200"/>
+              </a:lnSpc>
+              <a:defRPr sz="3600" b="1">
+                <a:solidFill>
+                  <a:srgbClr val="1A1A2E"/>
+                </a:solidFill>
+                <a:latin typeface="Calibri"/>
+              </a:defRPr>
+            </a:pPr>
+            <a:r>
+              <a:t>Key concepts</a:t>
+            </a:r>
+          </a:p>
+        </p:txBody>
+      </p:sp>
+      <p:sp>
+        <p:nvSpPr>
+          <p:cNvPr id="3" name="TextBox 2"/>
+          <p:cNvSpPr txBox="1"/>
+          <p:nvPr/>
+        </p:nvSpPr>
+        <p:spPr>
+          <a:xfrm>
+            <a:off x="548640" y="6355080"/>
+            <a:ext cx="11064240" cy="320040"/>
+          </a:xfrm>
+          <a:prstGeom prst="rect">
+            <a:avLst/>
+          </a:prstGeom>
+          <a:noFill/>
+        </p:spPr>
+        <p:txBody>
+          <a:bodyPr wrap="square">
+            <a:noAutofit/>
+          </a:bodyPr>
+          <a:lstStyle/>
+          <a:p>
+            <a:pPr algn="r">
+              <a:lnSpc>
+                <a:spcPts val="2200"/>
+              </a:lnSpc>
+              <a:defRPr sz="1000" b="0">
+                <a:solidFill>
+                  <a:srgbClr val="666666"/>
+                </a:solidFill>
+                <a:latin typeface="Calibri"/>
+              </a:defRPr>
+            </a:pPr>
+            <a:r>
+              <a:t>learn_uart_spi_i2c / Module 5</a:t>
+            </a:r>
+          </a:p>
+        </p:txBody>
+      </p:sp>
+    </p:spTree>
+  </p:cSld>
+  <p:clrMapOvr>
+    <a:masterClrMapping/>
+  </p:clrMapOvr>
+</p:sld>
+</file>
+
+<file path=ppt/slides/slide35.xml><?xml version="1.0" encoding="utf-8"?>
+<p:sld xmlns:a="http://schemas.openxmlformats.org/drawingml/2006/main" xmlns:p="http://schemas.openxmlformats.org/presentationml/2006/main" xmlns:r="http://schemas.openxmlformats.org/officeDocument/2006/relationships">
+  <p:cSld>
+    <p:spTree>
+      <p:nvGrpSpPr>
+        <p:cNvPr id="1" name=""/>
+        <p:cNvGrpSpPr/>
+        <p:nvPr/>
+      </p:nvGrpSpPr>
+      <p:grpSpPr/>
+      <p:sp>
+        <p:nvSpPr>
+          <p:cNvPr id="2" name="TextBox 1"/>
+          <p:cNvSpPr txBox="1"/>
+          <p:nvPr/>
+        </p:nvSpPr>
+        <p:spPr>
+          <a:xfrm>
+            <a:off x="548640" y="411480"/>
+            <a:ext cx="11064240" cy="777240"/>
+          </a:xfrm>
+          <a:prstGeom prst="rect">
+            <a:avLst/>
+          </a:prstGeom>
+          <a:noFill/>
+        </p:spPr>
+        <p:txBody>
+          <a:bodyPr wrap="square">
+            <a:noAutofit/>
+          </a:bodyPr>
+          <a:lstStyle/>
+          <a:p>
+            <a:pPr>
+              <a:lnSpc>
+                <a:spcPts val="2200"/>
+              </a:lnSpc>
+              <a:defRPr sz="2800" b="1">
+                <a:solidFill>
+                  <a:srgbClr val="1A1A2E"/>
+                </a:solidFill>
+                <a:latin typeface="Calibri"/>
+              </a:defRPr>
+            </a:pPr>
+            <a:r>
+              <a:t>1. Synchronous serial (SPI)</a:t>
+            </a:r>
+          </a:p>
+        </p:txBody>
+      </p:sp>
+      <p:sp>
+        <p:nvSpPr>
+          <p:cNvPr id="3" name="TextBox 2"/>
+          <p:cNvSpPr txBox="1"/>
+          <p:nvPr/>
+        </p:nvSpPr>
+        <p:spPr>
+          <a:xfrm>
+            <a:off x="548640" y="1234440"/>
+            <a:ext cx="11064240" cy="4937760"/>
+          </a:xfrm>
+          <a:prstGeom prst="rect">
+            <a:avLst/>
+          </a:prstGeom>
+          <a:noFill/>
+        </p:spPr>
+        <p:txBody>
+          <a:bodyPr wrap="square">
+            <a:noAutofit/>
+          </a:bodyPr>
+          <a:lstStyle/>
           <a:p>
             <a:pPr>
               <a:lnSpc>
@@ -8719,7 +11110,745 @@
               </a:defRPr>
             </a:pPr>
             <a:r>
-              <a:t>• Next: SPI UVM+SV</a:t>
+              <a:t>• `sclk` defines bit times; unlike UART there is an</a:t>
+            </a:r>
+          </a:p>
+          <a:p>
+            <a:pPr>
+              <a:lnSpc>
+                <a:spcPts val="2200"/>
+              </a:lnSpc>
+              <a:spcAft>
+                <a:spcPts val="1000"/>
+              </a:spcAft>
+              <a:defRPr sz="2000" b="0">
+                <a:solidFill>
+                  <a:srgbClr val="333333"/>
+                </a:solidFill>
+                <a:latin typeface="Calibri"/>
+              </a:defRPr>
+            </a:pPr>
+            <a:r>
+              <a:t>      explicit clock line.</a:t>
+            </a:r>
+          </a:p>
+          <a:p>
+            <a:pPr>
+              <a:lnSpc>
+                <a:spcPts val="2200"/>
+              </a:lnSpc>
+              <a:spcAft>
+                <a:spcPts val="1000"/>
+              </a:spcAft>
+              <a:defRPr sz="2000" b="0">
+                <a:solidFill>
+                  <a:srgbClr val="333333"/>
+                </a:solidFill>
+                <a:latin typeface="Calibri"/>
+              </a:defRPr>
+            </a:pPr>
+            <a:r>
+              <a:t>• Mode 0: idle low, sample MOSI on rising edge, change</a:t>
+            </a:r>
+          </a:p>
+          <a:p>
+            <a:pPr>
+              <a:lnSpc>
+                <a:spcPts val="2200"/>
+              </a:lnSpc>
+              <a:spcAft>
+                <a:spcPts val="1000"/>
+              </a:spcAft>
+              <a:defRPr sz="2000" b="0">
+                <a:solidFill>
+                  <a:srgbClr val="333333"/>
+                </a:solidFill>
+                <a:latin typeface="Calibri"/>
+              </a:defRPr>
+            </a:pPr>
+            <a:r>
+              <a:t>      on falling edge.</a:t>
+            </a:r>
+          </a:p>
+        </p:txBody>
+      </p:sp>
+      <p:sp>
+        <p:nvSpPr>
+          <p:cNvPr id="4" name="TextBox 3"/>
+          <p:cNvSpPr txBox="1"/>
+          <p:nvPr/>
+        </p:nvSpPr>
+        <p:spPr>
+          <a:xfrm>
+            <a:off x="548640" y="6355080"/>
+            <a:ext cx="11064240" cy="320040"/>
+          </a:xfrm>
+          <a:prstGeom prst="rect">
+            <a:avLst/>
+          </a:prstGeom>
+          <a:noFill/>
+        </p:spPr>
+        <p:txBody>
+          <a:bodyPr wrap="square">
+            <a:noAutofit/>
+          </a:bodyPr>
+          <a:lstStyle/>
+          <a:p>
+            <a:pPr algn="r">
+              <a:lnSpc>
+                <a:spcPts val="2200"/>
+              </a:lnSpc>
+              <a:defRPr sz="1000" b="0">
+                <a:solidFill>
+                  <a:srgbClr val="666666"/>
+                </a:solidFill>
+                <a:latin typeface="Calibri"/>
+              </a:defRPr>
+            </a:pPr>
+            <a:r>
+              <a:t>learn_uart_spi_i2c / Module 5</a:t>
+            </a:r>
+          </a:p>
+        </p:txBody>
+      </p:sp>
+    </p:spTree>
+  </p:cSld>
+  <p:clrMapOvr>
+    <a:masterClrMapping/>
+  </p:clrMapOvr>
+</p:sld>
+</file>
+
+<file path=ppt/slides/slide36.xml><?xml version="1.0" encoding="utf-8"?>
+<p:sld xmlns:a="http://schemas.openxmlformats.org/drawingml/2006/main" xmlns:p="http://schemas.openxmlformats.org/presentationml/2006/main" xmlns:r="http://schemas.openxmlformats.org/officeDocument/2006/relationships">
+  <p:cSld>
+    <p:spTree>
+      <p:nvGrpSpPr>
+        <p:cNvPr id="1" name=""/>
+        <p:cNvGrpSpPr/>
+        <p:nvPr/>
+      </p:nvGrpSpPr>
+      <p:grpSpPr/>
+      <p:sp>
+        <p:nvSpPr>
+          <p:cNvPr id="2" name="TextBox 1"/>
+          <p:cNvSpPr txBox="1"/>
+          <p:nvPr/>
+        </p:nvSpPr>
+        <p:spPr>
+          <a:xfrm>
+            <a:off x="548640" y="411480"/>
+            <a:ext cx="11064240" cy="777240"/>
+          </a:xfrm>
+          <a:prstGeom prst="rect">
+            <a:avLst/>
+          </a:prstGeom>
+          <a:noFill/>
+        </p:spPr>
+        <p:txBody>
+          <a:bodyPr wrap="square">
+            <a:noAutofit/>
+          </a:bodyPr>
+          <a:lstStyle/>
+          <a:p>
+            <a:pPr>
+              <a:lnSpc>
+                <a:spcPts val="2200"/>
+              </a:lnSpc>
+              <a:defRPr sz="2800" b="1">
+                <a:solidFill>
+                  <a:srgbClr val="1A1A2E"/>
+                </a:solidFill>
+                <a:latin typeface="Calibri"/>
+              </a:defRPr>
+            </a:pPr>
+            <a:r>
+              <a:t>2. Chip select frames</a:t>
+            </a:r>
+          </a:p>
+        </p:txBody>
+      </p:sp>
+      <p:sp>
+        <p:nvSpPr>
+          <p:cNvPr id="3" name="TextBox 2"/>
+          <p:cNvSpPr txBox="1"/>
+          <p:nvPr/>
+        </p:nvSpPr>
+        <p:spPr>
+          <a:xfrm>
+            <a:off x="548640" y="1234440"/>
+            <a:ext cx="11064240" cy="4937760"/>
+          </a:xfrm>
+          <a:prstGeom prst="rect">
+            <a:avLst/>
+          </a:prstGeom>
+          <a:noFill/>
+        </p:spPr>
+        <p:txBody>
+          <a:bodyPr wrap="square">
+            <a:noAutofit/>
+          </a:bodyPr>
+          <a:lstStyle/>
+          <a:p>
+            <a:pPr>
+              <a:lnSpc>
+                <a:spcPts val="2200"/>
+              </a:lnSpc>
+              <a:spcAft>
+                <a:spcPts val="1000"/>
+              </a:spcAft>
+              <a:defRPr sz="2000" b="0">
+                <a:solidFill>
+                  <a:srgbClr val="333333"/>
+                </a:solidFill>
+                <a:latin typeface="Calibri"/>
+              </a:defRPr>
+            </a:pPr>
+            <a:r>
+              <a:t>• `cs_n` low defines one transfer; typically 8 SCLK</a:t>
+            </a:r>
+          </a:p>
+          <a:p>
+            <a:pPr>
+              <a:lnSpc>
+                <a:spcPts val="2200"/>
+              </a:lnSpc>
+              <a:spcAft>
+                <a:spcPts val="1000"/>
+              </a:spcAft>
+              <a:defRPr sz="2000" b="0">
+                <a:solidFill>
+                  <a:srgbClr val="333333"/>
+                </a:solidFill>
+                <a:latin typeface="Calibri"/>
+              </a:defRPr>
+            </a:pPr>
+            <a:r>
+              <a:t>      cycles per byte.</a:t>
+            </a:r>
+          </a:p>
+        </p:txBody>
+      </p:sp>
+      <p:sp>
+        <p:nvSpPr>
+          <p:cNvPr id="4" name="TextBox 3"/>
+          <p:cNvSpPr txBox="1"/>
+          <p:nvPr/>
+        </p:nvSpPr>
+        <p:spPr>
+          <a:xfrm>
+            <a:off x="548640" y="6355080"/>
+            <a:ext cx="11064240" cy="320040"/>
+          </a:xfrm>
+          <a:prstGeom prst="rect">
+            <a:avLst/>
+          </a:prstGeom>
+          <a:noFill/>
+        </p:spPr>
+        <p:txBody>
+          <a:bodyPr wrap="square">
+            <a:noAutofit/>
+          </a:bodyPr>
+          <a:lstStyle/>
+          <a:p>
+            <a:pPr algn="r">
+              <a:lnSpc>
+                <a:spcPts val="2200"/>
+              </a:lnSpc>
+              <a:defRPr sz="1000" b="0">
+                <a:solidFill>
+                  <a:srgbClr val="666666"/>
+                </a:solidFill>
+                <a:latin typeface="Calibri"/>
+              </a:defRPr>
+            </a:pPr>
+            <a:r>
+              <a:t>learn_uart_spi_i2c / Module 5</a:t>
+            </a:r>
+          </a:p>
+        </p:txBody>
+      </p:sp>
+    </p:spTree>
+  </p:cSld>
+  <p:clrMapOvr>
+    <a:masterClrMapping/>
+  </p:clrMapOvr>
+</p:sld>
+</file>
+
+<file path=ppt/slides/slide37.xml><?xml version="1.0" encoding="utf-8"?>
+<p:sld xmlns:a="http://schemas.openxmlformats.org/drawingml/2006/main" xmlns:p="http://schemas.openxmlformats.org/presentationml/2006/main" xmlns:r="http://schemas.openxmlformats.org/officeDocument/2006/relationships">
+  <p:cSld>
+    <p:spTree>
+      <p:nvGrpSpPr>
+        <p:cNvPr id="1" name=""/>
+        <p:cNvGrpSpPr/>
+        <p:nvPr/>
+      </p:nvGrpSpPr>
+      <p:grpSpPr/>
+      <p:sp>
+        <p:nvSpPr>
+          <p:cNvPr id="2" name="TextBox 1"/>
+          <p:cNvSpPr txBox="1"/>
+          <p:nvPr/>
+        </p:nvSpPr>
+        <p:spPr>
+          <a:xfrm>
+            <a:off x="548640" y="2743200"/>
+            <a:ext cx="11064240" cy="1371600"/>
+          </a:xfrm>
+          <a:prstGeom prst="rect">
+            <a:avLst/>
+          </a:prstGeom>
+          <a:noFill/>
+        </p:spPr>
+        <p:txBody>
+          <a:bodyPr wrap="square">
+            <a:noAutofit/>
+          </a:bodyPr>
+          <a:lstStyle/>
+          <a:p>
+            <a:pPr algn="ctr">
+              <a:lnSpc>
+                <a:spcPts val="2200"/>
+              </a:lnSpc>
+              <a:defRPr sz="3600" b="1">
+                <a:solidFill>
+                  <a:srgbClr val="1A1A2E"/>
+                </a:solidFill>
+                <a:latin typeface="Calibri"/>
+              </a:defRPr>
+            </a:pPr>
+            <a:r>
+              <a:t>Common pitfalls</a:t>
+            </a:r>
+          </a:p>
+        </p:txBody>
+      </p:sp>
+      <p:sp>
+        <p:nvSpPr>
+          <p:cNvPr id="3" name="TextBox 2"/>
+          <p:cNvSpPr txBox="1"/>
+          <p:nvPr/>
+        </p:nvSpPr>
+        <p:spPr>
+          <a:xfrm>
+            <a:off x="548640" y="6355080"/>
+            <a:ext cx="11064240" cy="320040"/>
+          </a:xfrm>
+          <a:prstGeom prst="rect">
+            <a:avLst/>
+          </a:prstGeom>
+          <a:noFill/>
+        </p:spPr>
+        <p:txBody>
+          <a:bodyPr wrap="square">
+            <a:noAutofit/>
+          </a:bodyPr>
+          <a:lstStyle/>
+          <a:p>
+            <a:pPr algn="r">
+              <a:lnSpc>
+                <a:spcPts val="2200"/>
+              </a:lnSpc>
+              <a:defRPr sz="1000" b="0">
+                <a:solidFill>
+                  <a:srgbClr val="666666"/>
+                </a:solidFill>
+                <a:latin typeface="Calibri"/>
+              </a:defRPr>
+            </a:pPr>
+            <a:r>
+              <a:t>learn_uart_spi_i2c / Module 5</a:t>
+            </a:r>
+          </a:p>
+        </p:txBody>
+      </p:sp>
+    </p:spTree>
+  </p:cSld>
+  <p:clrMapOvr>
+    <a:masterClrMapping/>
+  </p:clrMapOvr>
+</p:sld>
+</file>
+
+<file path=ppt/slides/slide38.xml><?xml version="1.0" encoding="utf-8"?>
+<p:sld xmlns:a="http://schemas.openxmlformats.org/drawingml/2006/main" xmlns:p="http://schemas.openxmlformats.org/presentationml/2006/main" xmlns:r="http://schemas.openxmlformats.org/officeDocument/2006/relationships">
+  <p:cSld>
+    <p:spTree>
+      <p:nvGrpSpPr>
+        <p:cNvPr id="1" name=""/>
+        <p:cNvGrpSpPr/>
+        <p:nvPr/>
+      </p:nvGrpSpPr>
+      <p:grpSpPr/>
+      <p:sp>
+        <p:nvSpPr>
+          <p:cNvPr id="2" name="TextBox 1"/>
+          <p:cNvSpPr txBox="1"/>
+          <p:nvPr/>
+        </p:nvSpPr>
+        <p:spPr>
+          <a:xfrm>
+            <a:off x="548640" y="411480"/>
+            <a:ext cx="11064240" cy="777240"/>
+          </a:xfrm>
+          <a:prstGeom prst="rect">
+            <a:avLst/>
+          </a:prstGeom>
+          <a:noFill/>
+        </p:spPr>
+        <p:txBody>
+          <a:bodyPr wrap="square">
+            <a:noAutofit/>
+          </a:bodyPr>
+          <a:lstStyle/>
+          <a:p>
+            <a:pPr>
+              <a:lnSpc>
+                <a:spcPts val="2200"/>
+              </a:lnSpc>
+              <a:defRPr sz="2800" b="1">
+                <a:solidFill>
+                  <a:srgbClr val="1A1A2E"/>
+                </a:solidFill>
+                <a:latin typeface="Calibri"/>
+              </a:defRPr>
+            </a:pPr>
+            <a:r>
+              <a:t>Wrong SPI mode in head</a:t>
+            </a:r>
+          </a:p>
+        </p:txBody>
+      </p:sp>
+      <p:sp>
+        <p:nvSpPr>
+          <p:cNvPr id="3" name="TextBox 2"/>
+          <p:cNvSpPr txBox="1"/>
+          <p:nvPr/>
+        </p:nvSpPr>
+        <p:spPr>
+          <a:xfrm>
+            <a:off x="548640" y="1234440"/>
+            <a:ext cx="11064240" cy="4937760"/>
+          </a:xfrm>
+          <a:prstGeom prst="rect">
+            <a:avLst/>
+          </a:prstGeom>
+          <a:noFill/>
+        </p:spPr>
+        <p:txBody>
+          <a:bodyPr wrap="square">
+            <a:noAutofit/>
+          </a:bodyPr>
+          <a:lstStyle/>
+          <a:p>
+            <a:pPr>
+              <a:lnSpc>
+                <a:spcPts val="2200"/>
+              </a:lnSpc>
+              <a:spcAft>
+                <a:spcPts val="1000"/>
+              </a:spcAft>
+              <a:defRPr sz="2000" b="0">
+                <a:solidFill>
+                  <a:srgbClr val="333333"/>
+                </a:solidFill>
+                <a:latin typeface="Calibri"/>
+              </a:defRPr>
+            </a:pPr>
+            <a:r>
+              <a:t>• Mistake: Sampling on falling edge when using Mode 0.</a:t>
+            </a:r>
+          </a:p>
+          <a:p>
+            <a:pPr>
+              <a:lnSpc>
+                <a:spcPts val="2200"/>
+              </a:lnSpc>
+              <a:spcAft>
+                <a:spcPts val="1000"/>
+              </a:spcAft>
+              <a:defRPr sz="2000" b="0">
+                <a:solidFill>
+                  <a:srgbClr val="333333"/>
+                </a:solidFill>
+                <a:latin typeface="Calibri"/>
+              </a:defRPr>
+            </a:pPr>
+            <a:r>
+              <a:t>• Correct: Rising edge capture, falling edge change</a:t>
+            </a:r>
+          </a:p>
+          <a:p>
+            <a:pPr>
+              <a:lnSpc>
+                <a:spcPts val="2200"/>
+              </a:lnSpc>
+              <a:spcAft>
+                <a:spcPts val="1000"/>
+              </a:spcAft>
+              <a:defRPr sz="2000" b="0">
+                <a:solidFill>
+                  <a:srgbClr val="333333"/>
+                </a:solidFill>
+                <a:latin typeface="Calibri"/>
+              </a:defRPr>
+            </a:pPr>
+            <a:r>
+              <a:t>      for CPOL=0, CPHA=0.</a:t>
+            </a:r>
+          </a:p>
+          <a:p>
+            <a:pPr>
+              <a:lnSpc>
+                <a:spcPts val="2200"/>
+              </a:lnSpc>
+              <a:spcAft>
+                <a:spcPts val="1000"/>
+              </a:spcAft>
+              <a:defRPr sz="2000" b="0">
+                <a:solidFill>
+                  <a:srgbClr val="333333"/>
+                </a:solidFill>
+                <a:latin typeface="Calibri"/>
+              </a:defRPr>
+            </a:pPr>
+            <a:r>
+              <a:t>• Why: Bits will be shifted and MSB/LSB order will</a:t>
+            </a:r>
+          </a:p>
+          <a:p>
+            <a:pPr>
+              <a:lnSpc>
+                <a:spcPts val="2200"/>
+              </a:lnSpc>
+              <a:spcAft>
+                <a:spcPts val="1000"/>
+              </a:spcAft>
+              <a:defRPr sz="2000" b="0">
+                <a:solidFill>
+                  <a:srgbClr val="333333"/>
+                </a:solidFill>
+                <a:latin typeface="Calibri"/>
+              </a:defRPr>
+            </a:pPr>
+            <a:r>
+              <a:t>      look wrong.</a:t>
+            </a:r>
+          </a:p>
+        </p:txBody>
+      </p:sp>
+      <p:sp>
+        <p:nvSpPr>
+          <p:cNvPr id="4" name="TextBox 3"/>
+          <p:cNvSpPr txBox="1"/>
+          <p:nvPr/>
+        </p:nvSpPr>
+        <p:spPr>
+          <a:xfrm>
+            <a:off x="548640" y="6355080"/>
+            <a:ext cx="11064240" cy="320040"/>
+          </a:xfrm>
+          <a:prstGeom prst="rect">
+            <a:avLst/>
+          </a:prstGeom>
+          <a:noFill/>
+        </p:spPr>
+        <p:txBody>
+          <a:bodyPr wrap="square">
+            <a:noAutofit/>
+          </a:bodyPr>
+          <a:lstStyle/>
+          <a:p>
+            <a:pPr algn="r">
+              <a:lnSpc>
+                <a:spcPts val="2200"/>
+              </a:lnSpc>
+              <a:defRPr sz="1000" b="0">
+                <a:solidFill>
+                  <a:srgbClr val="666666"/>
+                </a:solidFill>
+                <a:latin typeface="Calibri"/>
+              </a:defRPr>
+            </a:pPr>
+            <a:r>
+              <a:t>learn_uart_spi_i2c / Module 5</a:t>
+            </a:r>
+          </a:p>
+        </p:txBody>
+      </p:sp>
+    </p:spTree>
+  </p:cSld>
+  <p:clrMapOvr>
+    <a:masterClrMapping/>
+  </p:clrMapOvr>
+</p:sld>
+</file>
+
+<file path=ppt/slides/slide39.xml><?xml version="1.0" encoding="utf-8"?>
+<p:sld xmlns:a="http://schemas.openxmlformats.org/drawingml/2006/main" xmlns:p="http://schemas.openxmlformats.org/presentationml/2006/main" xmlns:r="http://schemas.openxmlformats.org/officeDocument/2006/relationships">
+  <p:cSld>
+    <p:spTree>
+      <p:nvGrpSpPr>
+        <p:cNvPr id="1" name=""/>
+        <p:cNvGrpSpPr/>
+        <p:nvPr/>
+      </p:nvGrpSpPr>
+      <p:grpSpPr/>
+      <p:sp>
+        <p:nvSpPr>
+          <p:cNvPr id="2" name="TextBox 1"/>
+          <p:cNvSpPr txBox="1"/>
+          <p:nvPr/>
+        </p:nvSpPr>
+        <p:spPr>
+          <a:xfrm>
+            <a:off x="548640" y="411480"/>
+            <a:ext cx="11064240" cy="777240"/>
+          </a:xfrm>
+          <a:prstGeom prst="rect">
+            <a:avLst/>
+          </a:prstGeom>
+          <a:noFill/>
+        </p:spPr>
+        <p:txBody>
+          <a:bodyPr wrap="square">
+            <a:noAutofit/>
+          </a:bodyPr>
+          <a:lstStyle/>
+          <a:p>
+            <a:pPr>
+              <a:lnSpc>
+                <a:spcPts val="2200"/>
+              </a:lnSpc>
+              <a:defRPr sz="2800" b="1">
+                <a:solidFill>
+                  <a:srgbClr val="1A1A2E"/>
+                </a:solidFill>
+                <a:latin typeface="Calibri"/>
+              </a:defRPr>
+            </a:pPr>
+            <a:r>
+              <a:t>Trusting `done` only</a:t>
+            </a:r>
+          </a:p>
+        </p:txBody>
+      </p:sp>
+      <p:sp>
+        <p:nvSpPr>
+          <p:cNvPr id="3" name="TextBox 2"/>
+          <p:cNvSpPr txBox="1"/>
+          <p:nvPr/>
+        </p:nvSpPr>
+        <p:spPr>
+          <a:xfrm>
+            <a:off x="548640" y="1234440"/>
+            <a:ext cx="11064240" cy="4937760"/>
+          </a:xfrm>
+          <a:prstGeom prst="rect">
+            <a:avLst/>
+          </a:prstGeom>
+          <a:noFill/>
+        </p:spPr>
+        <p:txBody>
+          <a:bodyPr wrap="square">
+            <a:noAutofit/>
+          </a:bodyPr>
+          <a:lstStyle/>
+          <a:p>
+            <a:pPr>
+              <a:lnSpc>
+                <a:spcPts val="2200"/>
+              </a:lnSpc>
+              <a:spcAft>
+                <a:spcPts val="1000"/>
+              </a:spcAft>
+              <a:defRPr sz="2000" b="0">
+                <a:solidFill>
+                  <a:srgbClr val="333333"/>
+                </a:solidFill>
+                <a:latin typeface="Calibri"/>
+              </a:defRPr>
+            </a:pPr>
+            <a:r>
+              <a:t>• Mistake: No waveform or bus check on MOSI/SCLK.</a:t>
+            </a:r>
+          </a:p>
+          <a:p>
+            <a:pPr>
+              <a:lnSpc>
+                <a:spcPts val="2200"/>
+              </a:lnSpc>
+              <a:spcAft>
+                <a:spcPts val="1000"/>
+              </a:spcAft>
+              <a:defRPr sz="2000" b="0">
+                <a:solidFill>
+                  <a:srgbClr val="333333"/>
+                </a:solidFill>
+                <a:latin typeface="Calibri"/>
+              </a:defRPr>
+            </a:pPr>
+            <a:r>
+              <a:t>• Correct: Optional VCD review or Module 6 monitor-</a:t>
+            </a:r>
+          </a:p>
+          <a:p>
+            <a:pPr>
+              <a:lnSpc>
+                <a:spcPts val="2200"/>
+              </a:lnSpc>
+              <a:spcAft>
+                <a:spcPts val="1000"/>
+              </a:spcAft>
+              <a:defRPr sz="2000" b="0">
+                <a:solidFill>
+                  <a:srgbClr val="333333"/>
+                </a:solidFill>
+                <a:latin typeface="Calibri"/>
+              </a:defRPr>
+            </a:pPr>
+            <a:r>
+              <a:t>      based check.</a:t>
+            </a:r>
+          </a:p>
+          <a:p>
+            <a:pPr>
+              <a:lnSpc>
+                <a:spcPts val="2200"/>
+              </a:lnSpc>
+              <a:spcAft>
+                <a:spcPts val="1000"/>
+              </a:spcAft>
+              <a:defRPr sz="2000" b="0">
+                <a:solidFill>
+                  <a:srgbClr val="333333"/>
+                </a:solidFill>
+                <a:latin typeface="Calibri"/>
+              </a:defRPr>
+            </a:pPr>
+            <a:r>
+              <a:t>• Why: `done` only means the FSM finished, not that</a:t>
+            </a:r>
+          </a:p>
+          <a:p>
+            <a:pPr>
+              <a:lnSpc>
+                <a:spcPts val="2200"/>
+              </a:lnSpc>
+              <a:spcAft>
+                <a:spcPts val="1000"/>
+              </a:spcAft>
+              <a:defRPr sz="2000" b="0">
+                <a:solidFill>
+                  <a:srgbClr val="333333"/>
+                </a:solidFill>
+                <a:latin typeface="Calibri"/>
+              </a:defRPr>
+            </a:pPr>
+            <a:r>
+              <a:t>      bits were correct.</a:t>
             </a:r>
           </a:p>
         </p:txBody>
@@ -8930,6 +12059,1034 @@
 </p:sld>
 </file>
 
+<file path=ppt/slides/slide40.xml><?xml version="1.0" encoding="utf-8"?>
+<p:sld xmlns:a="http://schemas.openxmlformats.org/drawingml/2006/main" xmlns:p="http://schemas.openxmlformats.org/presentationml/2006/main" xmlns:r="http://schemas.openxmlformats.org/officeDocument/2006/relationships">
+  <p:cSld>
+    <p:spTree>
+      <p:nvGrpSpPr>
+        <p:cNvPr id="1" name=""/>
+        <p:cNvGrpSpPr/>
+        <p:nvPr/>
+      </p:nvGrpSpPr>
+      <p:grpSpPr/>
+      <p:sp>
+        <p:nvSpPr>
+          <p:cNvPr id="2" name="TextBox 1"/>
+          <p:cNvSpPr txBox="1"/>
+          <p:nvPr/>
+        </p:nvSpPr>
+        <p:spPr>
+          <a:xfrm>
+            <a:off x="548640" y="2743200"/>
+            <a:ext cx="11064240" cy="1371600"/>
+          </a:xfrm>
+          <a:prstGeom prst="rect">
+            <a:avLst/>
+          </a:prstGeom>
+          <a:noFill/>
+        </p:spPr>
+        <p:txBody>
+          <a:bodyPr wrap="square">
+            <a:noAutofit/>
+          </a:bodyPr>
+          <a:lstStyle/>
+          <a:p>
+            <a:pPr algn="ctr">
+              <a:lnSpc>
+                <a:spcPts val="2200"/>
+              </a:lnSpc>
+              <a:defRPr sz="3600" b="1">
+                <a:solidFill>
+                  <a:srgbClr val="1A1A2E"/>
+                </a:solidFill>
+                <a:latin typeface="Calibri"/>
+              </a:defRPr>
+            </a:pPr>
+            <a:r>
+              <a:t>Practice &amp; assessment</a:t>
+            </a:r>
+          </a:p>
+        </p:txBody>
+      </p:sp>
+      <p:sp>
+        <p:nvSpPr>
+          <p:cNvPr id="3" name="TextBox 2"/>
+          <p:cNvSpPr txBox="1"/>
+          <p:nvPr/>
+        </p:nvSpPr>
+        <p:spPr>
+          <a:xfrm>
+            <a:off x="548640" y="6355080"/>
+            <a:ext cx="11064240" cy="320040"/>
+          </a:xfrm>
+          <a:prstGeom prst="rect">
+            <a:avLst/>
+          </a:prstGeom>
+          <a:noFill/>
+        </p:spPr>
+        <p:txBody>
+          <a:bodyPr wrap="square">
+            <a:noAutofit/>
+          </a:bodyPr>
+          <a:lstStyle/>
+          <a:p>
+            <a:pPr algn="r">
+              <a:lnSpc>
+                <a:spcPts val="2200"/>
+              </a:lnSpc>
+              <a:defRPr sz="1000" b="0">
+                <a:solidFill>
+                  <a:srgbClr val="666666"/>
+                </a:solidFill>
+                <a:latin typeface="Calibri"/>
+              </a:defRPr>
+            </a:pPr>
+            <a:r>
+              <a:t>learn_uart_spi_i2c / Module 5</a:t>
+            </a:r>
+          </a:p>
+        </p:txBody>
+      </p:sp>
+    </p:spTree>
+  </p:cSld>
+  <p:clrMapOvr>
+    <a:masterClrMapping/>
+  </p:clrMapOvr>
+</p:sld>
+</file>
+
+<file path=ppt/slides/slide41.xml><?xml version="1.0" encoding="utf-8"?>
+<p:sld xmlns:a="http://schemas.openxmlformats.org/drawingml/2006/main" xmlns:p="http://schemas.openxmlformats.org/presentationml/2006/main" xmlns:r="http://schemas.openxmlformats.org/officeDocument/2006/relationships">
+  <p:cSld>
+    <p:spTree>
+      <p:nvGrpSpPr>
+        <p:cNvPr id="1" name=""/>
+        <p:cNvGrpSpPr/>
+        <p:nvPr/>
+      </p:nvGrpSpPr>
+      <p:grpSpPr/>
+      <p:sp>
+        <p:nvSpPr>
+          <p:cNvPr id="2" name="TextBox 1"/>
+          <p:cNvSpPr txBox="1"/>
+          <p:nvPr/>
+        </p:nvSpPr>
+        <p:spPr>
+          <a:xfrm>
+            <a:off x="548640" y="411480"/>
+            <a:ext cx="11064240" cy="777240"/>
+          </a:xfrm>
+          <a:prstGeom prst="rect">
+            <a:avLst/>
+          </a:prstGeom>
+          <a:noFill/>
+        </p:spPr>
+        <p:txBody>
+          <a:bodyPr wrap="square">
+            <a:noAutofit/>
+          </a:bodyPr>
+          <a:lstStyle/>
+          <a:p>
+            <a:pPr>
+              <a:lnSpc>
+                <a:spcPts val="2200"/>
+              </a:lnSpc>
+              <a:defRPr sz="2800" b="1">
+                <a:solidFill>
+                  <a:srgbClr val="1A1A2E"/>
+                </a:solidFill>
+                <a:latin typeface="Calibri"/>
+              </a:defRPr>
+            </a:pPr>
+            <a:r>
+              <a:t>What you should know</a:t>
+            </a:r>
+          </a:p>
+        </p:txBody>
+      </p:sp>
+      <p:sp>
+        <p:nvSpPr>
+          <p:cNvPr id="3" name="TextBox 2"/>
+          <p:cNvSpPr txBox="1"/>
+          <p:nvPr/>
+        </p:nvSpPr>
+        <p:spPr>
+          <a:xfrm>
+            <a:off x="548640" y="1234440"/>
+            <a:ext cx="11064240" cy="4937760"/>
+          </a:xfrm>
+          <a:prstGeom prst="rect">
+            <a:avLst/>
+          </a:prstGeom>
+          <a:noFill/>
+        </p:spPr>
+        <p:txBody>
+          <a:bodyPr wrap="square">
+            <a:noAutofit/>
+          </a:bodyPr>
+          <a:lstStyle/>
+          <a:p>
+            <a:pPr>
+              <a:lnSpc>
+                <a:spcPts val="2200"/>
+              </a:lnSpc>
+              <a:spcAft>
+                <a:spcPts val="1000"/>
+              </a:spcAft>
+              <a:defRPr sz="2000" b="0">
+                <a:solidFill>
+                  <a:srgbClr val="333333"/>
+                </a:solidFill>
+                <a:latin typeface="Calibri"/>
+              </a:defRPr>
+            </a:pPr>
+            <a:r>
+              <a:t>• Describe SPI mode 0 and the role of sclk, mosi,</a:t>
+            </a:r>
+          </a:p>
+          <a:p>
+            <a:pPr>
+              <a:lnSpc>
+                <a:spcPts val="2200"/>
+              </a:lnSpc>
+              <a:spcAft>
+                <a:spcPts val="1000"/>
+              </a:spcAft>
+              <a:defRPr sz="2000" b="0">
+                <a:solidFill>
+                  <a:srgbClr val="333333"/>
+                </a:solidFill>
+                <a:latin typeface="Calibri"/>
+              </a:defRPr>
+            </a:pPr>
+            <a:r>
+              <a:t>      cs_n, clk_div_tick.</a:t>
+            </a:r>
+          </a:p>
+          <a:p>
+            <a:pPr>
+              <a:lnSpc>
+                <a:spcPts val="2200"/>
+              </a:lnSpc>
+              <a:spcAft>
+                <a:spcPts val="1000"/>
+              </a:spcAft>
+              <a:defRPr sz="2000" b="0">
+                <a:solidFill>
+                  <a:srgbClr val="333333"/>
+                </a:solidFill>
+                <a:latin typeface="Calibri"/>
+              </a:defRPr>
+            </a:pPr>
+            <a:r>
+              <a:t>• Explain the role of spi_master and clk_div.</a:t>
+            </a:r>
+          </a:p>
+          <a:p>
+            <a:pPr>
+              <a:lnSpc>
+                <a:spcPts val="2200"/>
+              </a:lnSpc>
+              <a:spcAft>
+                <a:spcPts val="1000"/>
+              </a:spcAft>
+              <a:defRPr sz="2000" b="0">
+                <a:solidFill>
+                  <a:srgbClr val="333333"/>
+                </a:solidFill>
+                <a:latin typeface="Calibri"/>
+              </a:defRPr>
+            </a:pPr>
+            <a:r>
+              <a:t>• Run the spi_baseline example and interpret the</a:t>
+            </a:r>
+          </a:p>
+          <a:p>
+            <a:pPr>
+              <a:lnSpc>
+                <a:spcPts val="2200"/>
+              </a:lnSpc>
+              <a:spcAft>
+                <a:spcPts val="1000"/>
+              </a:spcAft>
+              <a:defRPr sz="2000" b="0">
+                <a:solidFill>
+                  <a:srgbClr val="333333"/>
+                </a:solidFill>
+                <a:latin typeface="Calibri"/>
+              </a:defRPr>
+            </a:pPr>
+            <a:r>
+              <a:t>      directed test.</a:t>
+            </a:r>
+          </a:p>
+          <a:p>
+            <a:pPr>
+              <a:lnSpc>
+                <a:spcPts val="2200"/>
+              </a:lnSpc>
+              <a:spcAft>
+                <a:spcPts val="1000"/>
+              </a:spcAft>
+              <a:defRPr sz="2000" b="0">
+                <a:solidFill>
+                  <a:srgbClr val="333333"/>
+                </a:solidFill>
+                <a:latin typeface="Calibri"/>
+              </a:defRPr>
+            </a:pPr>
+            <a:r>
+              <a:t>• Ready for Module 6: SPI UVM+SV verification.</a:t>
+            </a:r>
+          </a:p>
+        </p:txBody>
+      </p:sp>
+      <p:sp>
+        <p:nvSpPr>
+          <p:cNvPr id="4" name="TextBox 3"/>
+          <p:cNvSpPr txBox="1"/>
+          <p:nvPr/>
+        </p:nvSpPr>
+        <p:spPr>
+          <a:xfrm>
+            <a:off x="548640" y="6355080"/>
+            <a:ext cx="11064240" cy="320040"/>
+          </a:xfrm>
+          <a:prstGeom prst="rect">
+            <a:avLst/>
+          </a:prstGeom>
+          <a:noFill/>
+        </p:spPr>
+        <p:txBody>
+          <a:bodyPr wrap="square">
+            <a:noAutofit/>
+          </a:bodyPr>
+          <a:lstStyle/>
+          <a:p>
+            <a:pPr algn="r">
+              <a:lnSpc>
+                <a:spcPts val="2200"/>
+              </a:lnSpc>
+              <a:defRPr sz="1000" b="0">
+                <a:solidFill>
+                  <a:srgbClr val="666666"/>
+                </a:solidFill>
+                <a:latin typeface="Calibri"/>
+              </a:defRPr>
+            </a:pPr>
+            <a:r>
+              <a:t>learn_uart_spi_i2c / Module 5</a:t>
+            </a:r>
+          </a:p>
+        </p:txBody>
+      </p:sp>
+    </p:spTree>
+  </p:cSld>
+  <p:clrMapOvr>
+    <a:masterClrMapping/>
+  </p:clrMapOvr>
+</p:sld>
+</file>
+
+<file path=ppt/slides/slide42.xml><?xml version="1.0" encoding="utf-8"?>
+<p:sld xmlns:a="http://schemas.openxmlformats.org/drawingml/2006/main" xmlns:p="http://schemas.openxmlformats.org/presentationml/2006/main" xmlns:r="http://schemas.openxmlformats.org/officeDocument/2006/relationships">
+  <p:cSld>
+    <p:spTree>
+      <p:nvGrpSpPr>
+        <p:cNvPr id="1" name=""/>
+        <p:cNvGrpSpPr/>
+        <p:nvPr/>
+      </p:nvGrpSpPr>
+      <p:grpSpPr/>
+      <p:sp>
+        <p:nvSpPr>
+          <p:cNvPr id="2" name="TextBox 1"/>
+          <p:cNvSpPr txBox="1"/>
+          <p:nvPr/>
+        </p:nvSpPr>
+        <p:spPr>
+          <a:xfrm>
+            <a:off x="548640" y="411480"/>
+            <a:ext cx="11064240" cy="777240"/>
+          </a:xfrm>
+          <a:prstGeom prst="rect">
+            <a:avLst/>
+          </a:prstGeom>
+          <a:noFill/>
+        </p:spPr>
+        <p:txBody>
+          <a:bodyPr wrap="square">
+            <a:noAutofit/>
+          </a:bodyPr>
+          <a:lstStyle/>
+          <a:p>
+            <a:pPr>
+              <a:lnSpc>
+                <a:spcPts val="2200"/>
+              </a:lnSpc>
+              <a:defRPr sz="2800" b="1">
+                <a:solidFill>
+                  <a:srgbClr val="1A1A2E"/>
+                </a:solidFill>
+                <a:latin typeface="Calibri"/>
+              </a:defRPr>
+            </a:pPr>
+            <a:r>
+              <a:t>Exercises</a:t>
+            </a:r>
+          </a:p>
+        </p:txBody>
+      </p:sp>
+      <p:sp>
+        <p:nvSpPr>
+          <p:cNvPr id="3" name="TextBox 2"/>
+          <p:cNvSpPr txBox="1"/>
+          <p:nvPr/>
+        </p:nvSpPr>
+        <p:spPr>
+          <a:xfrm>
+            <a:off x="548640" y="1234440"/>
+            <a:ext cx="11064240" cy="4937760"/>
+          </a:xfrm>
+          <a:prstGeom prst="rect">
+            <a:avLst/>
+          </a:prstGeom>
+          <a:noFill/>
+        </p:spPr>
+        <p:txBody>
+          <a:bodyPr wrap="square">
+            <a:noAutofit/>
+          </a:bodyPr>
+          <a:lstStyle/>
+          <a:p>
+            <a:pPr>
+              <a:lnSpc>
+                <a:spcPts val="2200"/>
+              </a:lnSpc>
+              <a:spcAft>
+                <a:spcPts val="1000"/>
+              </a:spcAft>
+              <a:defRPr sz="2000" b="0">
+                <a:solidFill>
+                  <a:srgbClr val="333333"/>
+                </a:solidFill>
+                <a:latin typeface="Calibri"/>
+              </a:defRPr>
+            </a:pPr>
+            <a:r>
+              <a:t>• Run spi_baseline</a:t>
+            </a:r>
+          </a:p>
+          <a:p>
+            <a:pPr>
+              <a:lnSpc>
+                <a:spcPts val="2200"/>
+              </a:lnSpc>
+              <a:spcAft>
+                <a:spcPts val="1000"/>
+              </a:spcAft>
+              <a:defRPr sz="2000" b="0">
+                <a:solidFill>
+                  <a:srgbClr val="333333"/>
+                </a:solidFill>
+                <a:latin typeface="Calibri"/>
+              </a:defRPr>
+            </a:pPr>
+            <a:r>
+              <a:t>• Trace one transfer</a:t>
+            </a:r>
+          </a:p>
+          <a:p>
+            <a:pPr>
+              <a:lnSpc>
+                <a:spcPts val="2200"/>
+              </a:lnSpc>
+              <a:spcAft>
+                <a:spcPts val="1000"/>
+              </a:spcAft>
+              <a:defRPr sz="2000" b="0">
+                <a:solidFill>
+                  <a:srgbClr val="333333"/>
+                </a:solidFill>
+                <a:latin typeface="Calibri"/>
+              </a:defRPr>
+            </a:pPr>
+            <a:r>
+              <a:t>• Mode 0 timing</a:t>
+            </a:r>
+          </a:p>
+          <a:p>
+            <a:pPr>
+              <a:lnSpc>
+                <a:spcPts val="2200"/>
+              </a:lnSpc>
+              <a:spcAft>
+                <a:spcPts val="1000"/>
+              </a:spcAft>
+              <a:defRPr sz="2000" b="0">
+                <a:solidFill>
+                  <a:srgbClr val="333333"/>
+                </a:solidFill>
+                <a:latin typeface="Calibri"/>
+              </a:defRPr>
+            </a:pPr>
+            <a:r>
+              <a:t>• Optional: Waveforms</a:t>
+            </a:r>
+          </a:p>
+        </p:txBody>
+      </p:sp>
+      <p:sp>
+        <p:nvSpPr>
+          <p:cNvPr id="4" name="TextBox 3"/>
+          <p:cNvSpPr txBox="1"/>
+          <p:nvPr/>
+        </p:nvSpPr>
+        <p:spPr>
+          <a:xfrm>
+            <a:off x="548640" y="6355080"/>
+            <a:ext cx="11064240" cy="320040"/>
+          </a:xfrm>
+          <a:prstGeom prst="rect">
+            <a:avLst/>
+          </a:prstGeom>
+          <a:noFill/>
+        </p:spPr>
+        <p:txBody>
+          <a:bodyPr wrap="square">
+            <a:noAutofit/>
+          </a:bodyPr>
+          <a:lstStyle/>
+          <a:p>
+            <a:pPr algn="r">
+              <a:lnSpc>
+                <a:spcPts val="2200"/>
+              </a:lnSpc>
+              <a:defRPr sz="1000" b="0">
+                <a:solidFill>
+                  <a:srgbClr val="666666"/>
+                </a:solidFill>
+                <a:latin typeface="Calibri"/>
+              </a:defRPr>
+            </a:pPr>
+            <a:r>
+              <a:t>learn_uart_spi_i2c / Module 5</a:t>
+            </a:r>
+          </a:p>
+        </p:txBody>
+      </p:sp>
+    </p:spTree>
+  </p:cSld>
+  <p:clrMapOvr>
+    <a:masterClrMapping/>
+  </p:clrMapOvr>
+</p:sld>
+</file>
+
+<file path=ppt/slides/slide43.xml><?xml version="1.0" encoding="utf-8"?>
+<p:sld xmlns:a="http://schemas.openxmlformats.org/drawingml/2006/main" xmlns:p="http://schemas.openxmlformats.org/presentationml/2006/main" xmlns:r="http://schemas.openxmlformats.org/officeDocument/2006/relationships">
+  <p:cSld>
+    <p:spTree>
+      <p:nvGrpSpPr>
+        <p:cNvPr id="1" name=""/>
+        <p:cNvGrpSpPr/>
+        <p:nvPr/>
+      </p:nvGrpSpPr>
+      <p:grpSpPr/>
+      <p:sp>
+        <p:nvSpPr>
+          <p:cNvPr id="2" name="TextBox 1"/>
+          <p:cNvSpPr txBox="1"/>
+          <p:nvPr/>
+        </p:nvSpPr>
+        <p:spPr>
+          <a:xfrm>
+            <a:off x="548640" y="411480"/>
+            <a:ext cx="11064240" cy="777240"/>
+          </a:xfrm>
+          <a:prstGeom prst="rect">
+            <a:avLst/>
+          </a:prstGeom>
+          <a:noFill/>
+        </p:spPr>
+        <p:txBody>
+          <a:bodyPr wrap="square">
+            <a:noAutofit/>
+          </a:bodyPr>
+          <a:lstStyle/>
+          <a:p>
+            <a:pPr>
+              <a:lnSpc>
+                <a:spcPts val="2200"/>
+              </a:lnSpc>
+              <a:defRPr sz="2800" b="1">
+                <a:solidFill>
+                  <a:srgbClr val="1A1A2E"/>
+                </a:solidFill>
+                <a:latin typeface="Calibri"/>
+              </a:defRPr>
+            </a:pPr>
+            <a:r>
+              <a:t>Assessment checklist</a:t>
+            </a:r>
+          </a:p>
+        </p:txBody>
+      </p:sp>
+      <p:sp>
+        <p:nvSpPr>
+          <p:cNvPr id="3" name="TextBox 2"/>
+          <p:cNvSpPr txBox="1"/>
+          <p:nvPr/>
+        </p:nvSpPr>
+        <p:spPr>
+          <a:xfrm>
+            <a:off x="548640" y="1234440"/>
+            <a:ext cx="11064240" cy="4937760"/>
+          </a:xfrm>
+          <a:prstGeom prst="rect">
+            <a:avLst/>
+          </a:prstGeom>
+          <a:noFill/>
+        </p:spPr>
+        <p:txBody>
+          <a:bodyPr wrap="square">
+            <a:noAutofit/>
+          </a:bodyPr>
+          <a:lstStyle/>
+          <a:p>
+            <a:pPr>
+              <a:lnSpc>
+                <a:spcPts val="2200"/>
+              </a:lnSpc>
+              <a:spcAft>
+                <a:spcPts val="1000"/>
+              </a:spcAft>
+              <a:defRPr sz="2000" b="0">
+                <a:solidFill>
+                  <a:srgbClr val="333333"/>
+                </a:solidFill>
+                <a:latin typeface="Calibri"/>
+              </a:defRPr>
+            </a:pPr>
+            <a:r>
+              <a:t>• Can describe SPI mode 0 (idle low, capture on</a:t>
+            </a:r>
+          </a:p>
+          <a:p>
+            <a:pPr>
+              <a:lnSpc>
+                <a:spcPts val="2200"/>
+              </a:lnSpc>
+              <a:spcAft>
+                <a:spcPts val="1000"/>
+              </a:spcAft>
+              <a:defRPr sz="2000" b="0">
+                <a:solidFill>
+                  <a:srgbClr val="333333"/>
+                </a:solidFill>
+                <a:latin typeface="Calibri"/>
+              </a:defRPr>
+            </a:pPr>
+            <a:r>
+              <a:t>      rising, change on falling) and signals sclk, mosi,</a:t>
+            </a:r>
+          </a:p>
+          <a:p>
+            <a:pPr>
+              <a:lnSpc>
+                <a:spcPts val="2200"/>
+              </a:lnSpc>
+              <a:spcAft>
+                <a:spcPts val="1000"/>
+              </a:spcAft>
+              <a:defRPr sz="2000" b="0">
+                <a:solidFill>
+                  <a:srgbClr val="333333"/>
+                </a:solidFill>
+                <a:latin typeface="Calibri"/>
+              </a:defRPr>
+            </a:pPr>
+            <a:r>
+              <a:t>      cs…</a:t>
+            </a:r>
+          </a:p>
+          <a:p>
+            <a:pPr>
+              <a:lnSpc>
+                <a:spcPts val="2200"/>
+              </a:lnSpc>
+              <a:spcAft>
+                <a:spcPts val="1000"/>
+              </a:spcAft>
+              <a:defRPr sz="2000" b="0">
+                <a:solidFill>
+                  <a:srgbClr val="333333"/>
+                </a:solidFill>
+                <a:latin typeface="Calibri"/>
+              </a:defRPr>
+            </a:pPr>
+            <a:r>
+              <a:t>• Can explain the role of spi_master and clk_div in</a:t>
+            </a:r>
+          </a:p>
+          <a:p>
+            <a:pPr>
+              <a:lnSpc>
+                <a:spcPts val="2200"/>
+              </a:lnSpc>
+              <a:spcAft>
+                <a:spcPts val="1000"/>
+              </a:spcAft>
+              <a:defRPr sz="2000" b="0">
+                <a:solidFill>
+                  <a:srgbClr val="333333"/>
+                </a:solidFill>
+                <a:latin typeface="Calibri"/>
+              </a:defRPr>
+            </a:pPr>
+            <a:r>
+              <a:t>      the RTL.</a:t>
+            </a:r>
+          </a:p>
+          <a:p>
+            <a:pPr>
+              <a:lnSpc>
+                <a:spcPts val="2200"/>
+              </a:lnSpc>
+              <a:spcAft>
+                <a:spcPts val="1000"/>
+              </a:spcAft>
+              <a:defRPr sz="2000" b="0">
+                <a:solidFill>
+                  <a:srgbClr val="333333"/>
+                </a:solidFill>
+                <a:latin typeface="Calibri"/>
+              </a:defRPr>
+            </a:pPr>
+            <a:r>
+              <a:t>• Can run spi_baseline and interpret the directed test</a:t>
+            </a:r>
+          </a:p>
+          <a:p>
+            <a:pPr>
+              <a:lnSpc>
+                <a:spcPts val="2200"/>
+              </a:lnSpc>
+              <a:spcAft>
+                <a:spcPts val="1000"/>
+              </a:spcAft>
+              <a:defRPr sz="2000" b="0">
+                <a:solidFill>
+                  <a:srgbClr val="333333"/>
+                </a:solidFill>
+                <a:latin typeface="Calibri"/>
+              </a:defRPr>
+            </a:pPr>
+            <a:r>
+              <a:t>      result.</a:t>
+            </a:r>
+          </a:p>
+          <a:p>
+            <a:pPr>
+              <a:lnSpc>
+                <a:spcPts val="2200"/>
+              </a:lnSpc>
+              <a:spcAft>
+                <a:spcPts val="1000"/>
+              </a:spcAft>
+              <a:defRPr sz="2000" b="0">
+                <a:solidFill>
+                  <a:srgbClr val="333333"/>
+                </a:solidFill>
+                <a:latin typeface="Calibri"/>
+              </a:defRPr>
+            </a:pPr>
+            <a:r>
+              <a:t>• Ready for Module 6: SPI UVM+SV verification.</a:t>
+            </a:r>
+          </a:p>
+        </p:txBody>
+      </p:sp>
+      <p:sp>
+        <p:nvSpPr>
+          <p:cNvPr id="4" name="TextBox 3"/>
+          <p:cNvSpPr txBox="1"/>
+          <p:nvPr/>
+        </p:nvSpPr>
+        <p:spPr>
+          <a:xfrm>
+            <a:off x="548640" y="6355080"/>
+            <a:ext cx="11064240" cy="320040"/>
+          </a:xfrm>
+          <a:prstGeom prst="rect">
+            <a:avLst/>
+          </a:prstGeom>
+          <a:noFill/>
+        </p:spPr>
+        <p:txBody>
+          <a:bodyPr wrap="square">
+            <a:noAutofit/>
+          </a:bodyPr>
+          <a:lstStyle/>
+          <a:p>
+            <a:pPr algn="r">
+              <a:lnSpc>
+                <a:spcPts val="2200"/>
+              </a:lnSpc>
+              <a:defRPr sz="1000" b="0">
+                <a:solidFill>
+                  <a:srgbClr val="666666"/>
+                </a:solidFill>
+                <a:latin typeface="Calibri"/>
+              </a:defRPr>
+            </a:pPr>
+            <a:r>
+              <a:t>learn_uart_spi_i2c / Module 5</a:t>
+            </a:r>
+          </a:p>
+        </p:txBody>
+      </p:sp>
+    </p:spTree>
+  </p:cSld>
+  <p:clrMapOvr>
+    <a:masterClrMapping/>
+  </p:clrMapOvr>
+</p:sld>
+</file>
+
+<file path=ppt/slides/slide44.xml><?xml version="1.0" encoding="utf-8"?>
+<p:sld xmlns:a="http://schemas.openxmlformats.org/drawingml/2006/main" xmlns:p="http://schemas.openxmlformats.org/presentationml/2006/main" xmlns:r="http://schemas.openxmlformats.org/officeDocument/2006/relationships">
+  <p:cSld>
+    <p:spTree>
+      <p:nvGrpSpPr>
+        <p:cNvPr id="1" name=""/>
+        <p:cNvGrpSpPr/>
+        <p:nvPr/>
+      </p:nvGrpSpPr>
+      <p:grpSpPr/>
+      <p:sp>
+        <p:nvSpPr>
+          <p:cNvPr id="2" name="TextBox 1"/>
+          <p:cNvSpPr txBox="1"/>
+          <p:nvPr/>
+        </p:nvSpPr>
+        <p:spPr>
+          <a:xfrm>
+            <a:off x="548640" y="411480"/>
+            <a:ext cx="11064240" cy="777240"/>
+          </a:xfrm>
+          <a:prstGeom prst="rect">
+            <a:avLst/>
+          </a:prstGeom>
+          <a:noFill/>
+        </p:spPr>
+        <p:txBody>
+          <a:bodyPr wrap="square">
+            <a:noAutofit/>
+          </a:bodyPr>
+          <a:lstStyle/>
+          <a:p>
+            <a:pPr>
+              <a:lnSpc>
+                <a:spcPts val="2200"/>
+              </a:lnSpc>
+              <a:defRPr sz="2800" b="1">
+                <a:solidFill>
+                  <a:srgbClr val="1A1A2E"/>
+                </a:solidFill>
+                <a:latin typeface="Calibri"/>
+              </a:defRPr>
+            </a:pPr>
+            <a:r>
+              <a:t>Summary &amp; next steps</a:t>
+            </a:r>
+          </a:p>
+        </p:txBody>
+      </p:sp>
+      <p:sp>
+        <p:nvSpPr>
+          <p:cNvPr id="3" name="TextBox 2"/>
+          <p:cNvSpPr txBox="1"/>
+          <p:nvPr/>
+        </p:nvSpPr>
+        <p:spPr>
+          <a:xfrm>
+            <a:off x="548640" y="1234440"/>
+            <a:ext cx="11064240" cy="4937760"/>
+          </a:xfrm>
+          <a:prstGeom prst="rect">
+            <a:avLst/>
+          </a:prstGeom>
+          <a:noFill/>
+        </p:spPr>
+        <p:txBody>
+          <a:bodyPr wrap="square">
+            <a:noAutofit/>
+          </a:bodyPr>
+          <a:lstStyle/>
+          <a:p>
+            <a:pPr>
+              <a:lnSpc>
+                <a:spcPts val="2200"/>
+              </a:lnSpc>
+              <a:spcAft>
+                <a:spcPts val="1000"/>
+              </a:spcAft>
+              <a:defRPr sz="2000" b="0">
+                <a:solidFill>
+                  <a:srgbClr val="333333"/>
+                </a:solidFill>
+                <a:latin typeface="Calibri"/>
+              </a:defRPr>
+            </a:pPr>
+            <a:r>
+              <a:t>• Understand the SPI protocol (mode 0, signals),</a:t>
+            </a:r>
+          </a:p>
+          <a:p>
+            <a:pPr>
+              <a:lnSpc>
+                <a:spcPts val="2200"/>
+              </a:lnSpc>
+              <a:spcAft>
+                <a:spcPts val="1000"/>
+              </a:spcAft>
+              <a:defRPr sz="2000" b="0">
+                <a:solidFill>
+                  <a:srgbClr val="333333"/>
+                </a:solidFill>
+                <a:latin typeface="Calibri"/>
+              </a:defRPr>
+            </a:pPr>
+            <a:r>
+              <a:t>      translate it to RTL (SPI master, clk_div), and</a:t>
+            </a:r>
+          </a:p>
+          <a:p>
+            <a:pPr>
+              <a:lnSpc>
+                <a:spcPts val="2200"/>
+              </a:lnSpc>
+              <a:spcAft>
+                <a:spcPts val="1000"/>
+              </a:spcAft>
+              <a:defRPr sz="2000" b="0">
+                <a:solidFill>
+                  <a:srgbClr val="333333"/>
+                </a:solidFill>
+                <a:latin typeface="Calibri"/>
+              </a:defRPr>
+            </a:pPr>
+            <a:r>
+              <a:t>      verif…</a:t>
+            </a:r>
+          </a:p>
+          <a:p>
+            <a:pPr>
+              <a:lnSpc>
+                <a:spcPts val="2200"/>
+              </a:lnSpc>
+              <a:spcAft>
+                <a:spcPts val="1000"/>
+              </a:spcAft>
+              <a:defRPr sz="2000" b="0">
+                <a:solidFill>
+                  <a:srgbClr val="333333"/>
+                </a:solidFill>
+                <a:latin typeface="Calibri"/>
+              </a:defRPr>
+            </a:pPr>
+            <a:r>
+              <a:t>• Complete module5/CHECKLIST.md</a:t>
+            </a:r>
+          </a:p>
+          <a:p>
+            <a:pPr>
+              <a:lnSpc>
+                <a:spcPts val="2200"/>
+              </a:lnSpc>
+              <a:spcAft>
+                <a:spcPts val="1000"/>
+              </a:spcAft>
+              <a:defRPr sz="2000" b="0">
+                <a:solidFill>
+                  <a:srgbClr val="333333"/>
+                </a:solidFill>
+                <a:latin typeface="Calibri"/>
+              </a:defRPr>
+            </a:pPr>
+            <a:r>
+              <a:t>• Review module5/EXAMPLES.md and run each lab</a:t>
+            </a:r>
+          </a:p>
+          <a:p>
+            <a:pPr>
+              <a:lnSpc>
+                <a:spcPts val="2200"/>
+              </a:lnSpc>
+              <a:spcAft>
+                <a:spcPts val="1000"/>
+              </a:spcAft>
+              <a:defRPr sz="2000" b="0">
+                <a:solidFill>
+                  <a:srgbClr val="333333"/>
+                </a:solidFill>
+                <a:latin typeface="Calibri"/>
+              </a:defRPr>
+            </a:pPr>
+            <a:r>
+              <a:t>• Next: SPI UVM+SV</a:t>
+            </a:r>
+          </a:p>
+        </p:txBody>
+      </p:sp>
+      <p:sp>
+        <p:nvSpPr>
+          <p:cNvPr id="4" name="TextBox 3"/>
+          <p:cNvSpPr txBox="1"/>
+          <p:nvPr/>
+        </p:nvSpPr>
+        <p:spPr>
+          <a:xfrm>
+            <a:off x="548640" y="6355080"/>
+            <a:ext cx="11064240" cy="320040"/>
+          </a:xfrm>
+          <a:prstGeom prst="rect">
+            <a:avLst/>
+          </a:prstGeom>
+          <a:noFill/>
+        </p:spPr>
+        <p:txBody>
+          <a:bodyPr wrap="square">
+            <a:noAutofit/>
+          </a:bodyPr>
+          <a:lstStyle/>
+          <a:p>
+            <a:pPr algn="r">
+              <a:lnSpc>
+                <a:spcPts val="2200"/>
+              </a:lnSpc>
+              <a:defRPr sz="1000" b="0">
+                <a:solidFill>
+                  <a:srgbClr val="666666"/>
+                </a:solidFill>
+                <a:latin typeface="Calibri"/>
+              </a:defRPr>
+            </a:pPr>
+            <a:r>
+              <a:t>learn_uart_spi_i2c / Module 5</a:t>
+            </a:r>
+          </a:p>
+        </p:txBody>
+      </p:sp>
+    </p:spTree>
+  </p:cSld>
+  <p:clrMapOvr>
+    <a:masterClrMapping/>
+  </p:clrMapOvr>
+</p:sld>
+</file>
+
 <file path=ppt/slides/slide5.xml><?xml version="1.0" encoding="utf-8"?>
 <p:sld xmlns:a="http://schemas.openxmlformats.org/drawingml/2006/main" xmlns:p="http://schemas.openxmlformats.org/presentationml/2006/main" xmlns:r="http://schemas.openxmlformats.org/officeDocument/2006/relationships">
   <p:cSld>
@@ -9556,14 +13713,94 @@
               </a:defRPr>
             </a:pPr>
             <a:r>
-              <a:t>RTL / block architecture</a:t>
+              <a:t>1. Block hierarchy</a:t>
+            </a:r>
+          </a:p>
+        </p:txBody>
+      </p:sp>
+      <p:sp>
+        <p:nvSpPr>
+          <p:cNvPr id="3" name="TextBox 2"/>
+          <p:cNvSpPr txBox="1"/>
+          <p:nvPr/>
+        </p:nvSpPr>
+        <p:spPr>
+          <a:xfrm>
+            <a:off x="548640" y="1234440"/>
+            <a:ext cx="5303520" cy="4754880"/>
+          </a:xfrm>
+          <a:prstGeom prst="rect">
+            <a:avLst/>
+          </a:prstGeom>
+          <a:noFill/>
+        </p:spPr>
+        <p:txBody>
+          <a:bodyPr wrap="square">
+            <a:noAutofit/>
+          </a:bodyPr>
+          <a:lstStyle/>
+          <a:p>
+            <a:pPr>
+              <a:lnSpc>
+                <a:spcPts val="2200"/>
+              </a:lnSpc>
+              <a:spcAft>
+                <a:spcPts val="1000"/>
+              </a:spcAft>
+              <a:defRPr sz="2000" b="0">
+                <a:solidFill>
+                  <a:srgbClr val="333333"/>
+                </a:solidFill>
+                <a:latin typeface="Calibri"/>
+              </a:defRPr>
+            </a:pPr>
+            <a:r>
+              <a:t>• top_spi_baseline → `clk_div` +</a:t>
+            </a:r>
+          </a:p>
+          <a:p>
+            <a:pPr>
+              <a:lnSpc>
+                <a:spcPts val="2200"/>
+              </a:lnSpc>
+              <a:spcAft>
+                <a:spcPts val="1000"/>
+              </a:spcAft>
+              <a:defRPr sz="2000" b="0">
+                <a:solidFill>
+                  <a:srgbClr val="333333"/>
+                </a:solidFill>
+                <a:latin typeface="Calibri"/>
+              </a:defRPr>
+            </a:pPr>
+            <a:r>
+              <a:t>      `spi_master`; C++ supplies</a:t>
+            </a:r>
+          </a:p>
+          <a:p>
+            <a:pPr>
+              <a:lnSpc>
+                <a:spcPts val="2200"/>
+              </a:lnSpc>
+              <a:spcAft>
+                <a:spcPts val="1000"/>
+              </a:spcAft>
+              <a:defRPr sz="2000" b="0">
+                <a:solidFill>
+                  <a:srgbClr val="333333"/>
+                </a:solidFill>
+                <a:latin typeface="Calibri"/>
+              </a:defRPr>
+            </a:pPr>
+            <a:r>
+              <a:t>      `clk`/`rst_n`.</a:t>
             </a:r>
           </a:p>
         </p:txBody>
       </p:sp>
       <p:pic>
         <p:nvPicPr>
-          <p:cNvPr id="3" name="Picture 2" descr="rtl_architecture.png"/>
+          <p:cNvPr id="4" name="Picture 3" descr="rtl_architecture.png"/>
           <p:cNvPicPr>
             <a:picLocks noChangeAspect="1"/>
           </p:cNvPicPr>
@@ -9577,53 +13814,14 @@
         </p:blipFill>
         <p:spPr>
           <a:xfrm>
-            <a:off x="548640" y="1143000"/>
-            <a:ext cx="8128000" cy="4572000"/>
+            <a:off x="6172200" y="2094547"/>
+            <a:ext cx="5394960" cy="3034665"/>
           </a:xfrm>
           <a:prstGeom prst="rect">
             <a:avLst/>
           </a:prstGeom>
         </p:spPr>
       </p:pic>
-      <p:sp>
-        <p:nvSpPr>
-          <p:cNvPr id="4" name="TextBox 3"/>
-          <p:cNvSpPr txBox="1"/>
-          <p:nvPr/>
-        </p:nvSpPr>
-        <p:spPr>
-          <a:xfrm>
-            <a:off x="548640" y="5897880"/>
-            <a:ext cx="11064240" cy="411480"/>
-          </a:xfrm>
-          <a:prstGeom prst="rect">
-            <a:avLst/>
-          </a:prstGeom>
-          <a:noFill/>
-        </p:spPr>
-        <p:txBody>
-          <a:bodyPr wrap="square">
-            <a:noAutofit/>
-          </a:bodyPr>
-          <a:lstStyle/>
-          <a:p>
-            <a:pPr>
-              <a:lnSpc>
-                <a:spcPts val="2200"/>
-              </a:lnSpc>
-              <a:defRPr sz="1200" b="0">
-                <a:solidFill>
-                  <a:srgbClr val="333333"/>
-                </a:solidFill>
-                <a:latin typeface="Calibri"/>
-              </a:defRPr>
-            </a:pPr>
-            <a:r>
-              <a:t>Module 5: DUT / block hierarchy (see module5/examples/).</a:t>
-            </a:r>
-          </a:p>
-        </p:txBody>
-      </p:sp>
       <p:sp>
         <p:nvSpPr>
           <p:cNvPr id="5" name="TextBox 4"/>
